--- a/Retrieve_최종발표.pptx
+++ b/Retrieve_최종발표.pptx
@@ -4,6 +4,9 @@
   <p:sldMasterIdLst>
     <p:sldMasterId id="2147483648" r:id="rId1"/>
   </p:sldMasterIdLst>
+  <p:notesMasterIdLst>
+    <p:notesMasterId r:id="rId14"/>
+  </p:notesMasterIdLst>
   <p:sldIdLst>
     <p:sldId id="256" r:id="rId2"/>
     <p:sldId id="257" r:id="rId3"/>
@@ -18,10 +21,7 @@
     <p:sldId id="266" r:id="rId12"/>
     <p:sldId id="267" r:id="rId13"/>
   </p:sldIdLst>
-  <p:notesMasterIdLst>
-    <p:notesMasterId r:id="rId14"/>
-  </p:notesMasterIdLst>
-  <p:sldSz cx="9144000" cy="5143500"/>
+  <p:sldSz cx="9144000" cy="5143500" type="screen16x9"/>
   <p:notesSz cx="5143500" cy="9144000"/>
   <p:defaultTextStyle>
     <a:lvl1pPr marL="0" algn="l" defTabSz="914400" rtl="0" eaLnBrk="1" latinLnBrk="0" hangingPunct="1">
@@ -115,6 +115,11 @@
       </a:defRPr>
     </a:lvl9pPr>
   </p:defaultTextStyle>
+  <p:extLst>
+    <p:ext uri="{EFAFB233-063F-42B5-8137-9DF3F51BA10A}">
+      <p15:sldGuideLst xmlns:p15="http://schemas.microsoft.com/office/powerpoint/2012/main"/>
+    </p:ext>
+  </p:extLst>
 </p:presentation>
 </file>
 
@@ -140,240 +145,16 @@
           <a:chExt cx="0" cy="0"/>
         </a:xfrm>
       </p:grpSpPr>
-      <p:sp>
-        <p:nvSpPr>
-          <p:cNvPr id="2" name="Header Placeholder 1"/>
-          <p:cNvSpPr>
-            <a:spLocks noGrp="1"/>
-          </p:cNvSpPr>
-          <p:nvPr>
-            <p:ph type="hdr" sz="quarter"/>
-          </p:nvPr>
-        </p:nvSpPr>
-        <p:spPr>
-          <a:xfrm>
-            <a:off x="0" y="0"/>
-            <a:ext cx="2971800" cy="458788"/>
-          </a:xfrm>
-          <a:prstGeom prst="rect">
-            <a:avLst/>
-          </a:prstGeom>
-        </p:spPr>
-        <p:txBody>
-          <a:bodyPr vert="horz" lIns="91440" tIns="45720" rIns="91440" bIns="45720" rtlCol="0"/>
-          <a:lstStyle>
-            <a:lvl1pPr algn="l">
-              <a:defRPr sz="1200"/>
-            </a:lvl1pPr>
-          </a:lstStyle>
-          <a:p>
-            <a:endParaRPr lang="en-US"/>
-          </a:p>
-        </p:txBody>
-      </p:sp>
-      <p:sp>
-        <p:nvSpPr>
-          <p:cNvPr id="3" name="Date Placeholder 2"/>
-          <p:cNvSpPr>
-            <a:spLocks noGrp="1"/>
-          </p:cNvSpPr>
-          <p:nvPr>
-            <p:ph type="dt" idx="1"/>
-          </p:nvPr>
-        </p:nvSpPr>
-        <p:spPr>
-          <a:xfrm>
-            <a:off x="3884613" y="0"/>
-            <a:ext cx="2971800" cy="458788"/>
-          </a:xfrm>
-          <a:prstGeom prst="rect">
-            <a:avLst/>
-          </a:prstGeom>
-        </p:spPr>
-        <p:txBody>
-          <a:bodyPr vert="horz" lIns="91440" tIns="45720" rIns="91440" bIns="45720" rtlCol="0"/>
-          <a:lstStyle>
-            <a:lvl1pPr algn="r">
-              <a:defRPr sz="1200"/>
-            </a:lvl1pPr>
-          </a:lstStyle>
-          <a:p>
-            <a:fld id="{5282F153-3F37-0F45-9E97-73ACFA13230C}" type="datetimeFigureOut">
-              <a:rPr lang="en-US"/>
-              <a:t>7/23/19</a:t>
-            </a:fld>
-            <a:endParaRPr lang="en-US"/>
-          </a:p>
-        </p:txBody>
-      </p:sp>
-      <p:sp>
-        <p:nvSpPr>
-          <p:cNvPr id="4" name="Slide Image Placeholder 3"/>
-          <p:cNvSpPr>
-            <a:spLocks noGrp="1" noRot="1" noChangeAspect="1"/>
-          </p:cNvSpPr>
-          <p:nvPr>
-            <p:ph type="sldImg" idx="2"/>
-          </p:nvPr>
-        </p:nvSpPr>
-        <p:spPr>
-          <a:xfrm>
-            <a:off x="685800" y="1143000"/>
-            <a:ext cx="5486400" cy="3086100"/>
-          </a:xfrm>
-          <a:prstGeom prst="rect">
-            <a:avLst/>
-          </a:prstGeom>
-          <a:noFill/>
-          <a:ln w="12700">
-            <a:solidFill>
-              <a:prstClr val="black"/>
-            </a:solidFill>
-          </a:ln>
-        </p:spPr>
-        <p:txBody>
-          <a:bodyPr vert="horz" lIns="91440" tIns="45720" rIns="91440" bIns="45720" rtlCol="0" anchor="ctr"/>
-          <a:lstStyle/>
-          <a:p>
-            <a:endParaRPr lang="en-US"/>
-          </a:p>
-        </p:txBody>
-      </p:sp>
-      <p:sp>
-        <p:nvSpPr>
-          <p:cNvPr id="5" name="Notes Placeholder 4"/>
-          <p:cNvSpPr>
-            <a:spLocks noGrp="1"/>
-          </p:cNvSpPr>
-          <p:nvPr>
-            <p:ph type="body" sz="quarter" idx="3"/>
-          </p:nvPr>
-        </p:nvSpPr>
-        <p:spPr>
-          <a:xfrm>
-            <a:off x="685800" y="4400550"/>
-            <a:ext cx="5486400" cy="3600450"/>
-          </a:xfrm>
-          <a:prstGeom prst="rect">
-            <a:avLst/>
-          </a:prstGeom>
-        </p:spPr>
-        <p:txBody>
-          <a:bodyPr vert="horz" lIns="91440" tIns="45720" rIns="91440" bIns="45720" rtlCol="0"/>
-          <a:lstStyle/>
-          <a:p>
-            <a:pPr lvl="0"/>
-            <a:r>
-              <a:rPr lang="en-US"/>
-              <a:t>Click to edit Master text styles</a:t>
-            </a:r>
-          </a:p>
-          <a:p>
-            <a:pPr lvl="1"/>
-            <a:r>
-              <a:rPr lang="en-US"/>
-              <a:t>Second level</a:t>
-            </a:r>
-          </a:p>
-          <a:p>
-            <a:pPr lvl="2"/>
-            <a:r>
-              <a:rPr lang="en-US"/>
-              <a:t>Third level</a:t>
-            </a:r>
-          </a:p>
-          <a:p>
-            <a:pPr lvl="3"/>
-            <a:r>
-              <a:rPr lang="en-US"/>
-              <a:t>Fourth level</a:t>
-            </a:r>
-          </a:p>
-          <a:p>
-            <a:pPr lvl="4"/>
-            <a:r>
-              <a:rPr lang="en-US"/>
-              <a:t>Fifth level</a:t>
-            </a:r>
-          </a:p>
-        </p:txBody>
-      </p:sp>
-      <p:sp>
-        <p:nvSpPr>
-          <p:cNvPr id="6" name="Footer Placeholder 5"/>
-          <p:cNvSpPr>
-            <a:spLocks noGrp="1"/>
-          </p:cNvSpPr>
-          <p:nvPr>
-            <p:ph type="ftr" sz="quarter" idx="4"/>
-          </p:nvPr>
-        </p:nvSpPr>
-        <p:spPr>
-          <a:xfrm>
-            <a:off x="0" y="8685213"/>
-            <a:ext cx="2971800" cy="458787"/>
-          </a:xfrm>
-          <a:prstGeom prst="rect">
-            <a:avLst/>
-          </a:prstGeom>
-        </p:spPr>
-        <p:txBody>
-          <a:bodyPr vert="horz" lIns="91440" tIns="45720" rIns="91440" bIns="45720" rtlCol="0" anchor="b"/>
-          <a:lstStyle>
-            <a:lvl1pPr algn="l">
-              <a:defRPr sz="1200"/>
-            </a:lvl1pPr>
-          </a:lstStyle>
-          <a:p>
-            <a:endParaRPr lang="en-US"/>
-          </a:p>
-        </p:txBody>
-      </p:sp>
-      <p:sp>
-        <p:nvSpPr>
-          <p:cNvPr id="7" name="Slide Number Placeholder 6"/>
-          <p:cNvSpPr>
-            <a:spLocks noGrp="1"/>
-          </p:cNvSpPr>
-          <p:nvPr>
-            <p:ph type="sldNum" sz="quarter" idx="5"/>
-          </p:nvPr>
-        </p:nvSpPr>
-        <p:spPr>
-          <a:xfrm>
-            <a:off x="3884613" y="8685213"/>
-            <a:ext cx="2971800" cy="458787"/>
-          </a:xfrm>
-          <a:prstGeom prst="rect">
-            <a:avLst/>
-          </a:prstGeom>
-        </p:spPr>
-        <p:txBody>
-          <a:bodyPr vert="horz" lIns="91440" tIns="45720" rIns="91440" bIns="45720" rtlCol="0" anchor="b"/>
-          <a:lstStyle>
-            <a:lvl1pPr algn="r">
-              <a:defRPr sz="1200"/>
-            </a:lvl1pPr>
-          </a:lstStyle>
-          <a:p>
-            <a:fld id="{CE5E9CC1-C706-0F49-92D6-E571CC5EEA8F}" type="slidenum">
-              <a:rPr lang="en-US"/>
-              <a:t>‹#›</a:t>
-            </a:fld>
-            <a:endParaRPr lang="en-US"/>
-          </a:p>
-        </p:txBody>
-      </p:sp>
     </p:spTree>
     <p:extLst>
       <p:ext uri="{BB962C8B-B14F-4D97-AF65-F5344CB8AC3E}">
-        <p14:creationId xmlns:p14="http://schemas.microsoft.com/office/powerpoint/2010/main" val="1024086991"/>
+        <p14:creationId xmlns:p14="http://schemas.microsoft.com/office/powerpoint/2010/main" val="3737200271"/>
       </p:ext>
     </p:extLst>
   </p:cSld>
   <p:clrMap bg1="lt1" tx1="dk1" bg2="lt2" tx2="dk2" accent1="accent1" accent2="accent2" accent3="accent3" accent4="accent4" accent5="accent5" accent6="accent6" hlink="hlink" folHlink="folHlink"/>
   <p:notesStyle>
-    <a:lvl1pPr marL="0" algn="l" defTabSz="914400" rtl="0" eaLnBrk="1" latinLnBrk="0" hangingPunct="1">
+    <a:lvl1pPr marL="0" algn="l" defTabSz="914400" rtl="0" eaLnBrk="1" latinLnBrk="1" hangingPunct="1">
       <a:defRPr sz="1200" kern="1200">
         <a:solidFill>
           <a:schemeClr val="tx1"/>
@@ -383,7 +164,7 @@
         <a:cs typeface="+mn-cs"/>
       </a:defRPr>
     </a:lvl1pPr>
-    <a:lvl2pPr marL="457200" algn="l" defTabSz="914400" rtl="0" eaLnBrk="1" latinLnBrk="0" hangingPunct="1">
+    <a:lvl2pPr marL="457200" algn="l" defTabSz="914400" rtl="0" eaLnBrk="1" latinLnBrk="1" hangingPunct="1">
       <a:defRPr sz="1200" kern="1200">
         <a:solidFill>
           <a:schemeClr val="tx1"/>
@@ -393,7 +174,7 @@
         <a:cs typeface="+mn-cs"/>
       </a:defRPr>
     </a:lvl2pPr>
-    <a:lvl3pPr marL="914400" algn="l" defTabSz="914400" rtl="0" eaLnBrk="1" latinLnBrk="0" hangingPunct="1">
+    <a:lvl3pPr marL="914400" algn="l" defTabSz="914400" rtl="0" eaLnBrk="1" latinLnBrk="1" hangingPunct="1">
       <a:defRPr sz="1200" kern="1200">
         <a:solidFill>
           <a:schemeClr val="tx1"/>
@@ -403,7 +184,7 @@
         <a:cs typeface="+mn-cs"/>
       </a:defRPr>
     </a:lvl3pPr>
-    <a:lvl4pPr marL="1371600" algn="l" defTabSz="914400" rtl="0" eaLnBrk="1" latinLnBrk="0" hangingPunct="1">
+    <a:lvl4pPr marL="1371600" algn="l" defTabSz="914400" rtl="0" eaLnBrk="1" latinLnBrk="1" hangingPunct="1">
       <a:defRPr sz="1200" kern="1200">
         <a:solidFill>
           <a:schemeClr val="tx1"/>
@@ -413,7 +194,7 @@
         <a:cs typeface="+mn-cs"/>
       </a:defRPr>
     </a:lvl4pPr>
-    <a:lvl5pPr marL="1828800" algn="l" defTabSz="914400" rtl="0" eaLnBrk="1" latinLnBrk="0" hangingPunct="1">
+    <a:lvl5pPr marL="1828800" algn="l" defTabSz="914400" rtl="0" eaLnBrk="1" latinLnBrk="1" hangingPunct="1">
       <a:defRPr sz="1200" kern="1200">
         <a:solidFill>
           <a:schemeClr val="tx1"/>
@@ -423,7 +204,7 @@
         <a:cs typeface="+mn-cs"/>
       </a:defRPr>
     </a:lvl5pPr>
-    <a:lvl6pPr marL="2286000" algn="l" defTabSz="914400" rtl="0" eaLnBrk="1" latinLnBrk="0" hangingPunct="1">
+    <a:lvl6pPr marL="2286000" algn="l" defTabSz="914400" rtl="0" eaLnBrk="1" latinLnBrk="1" hangingPunct="1">
       <a:defRPr sz="1200" kern="1200">
         <a:solidFill>
           <a:schemeClr val="tx1"/>
@@ -433,7 +214,7 @@
         <a:cs typeface="+mn-cs"/>
       </a:defRPr>
     </a:lvl6pPr>
-    <a:lvl7pPr marL="2743200" algn="l" defTabSz="914400" rtl="0" eaLnBrk="1" latinLnBrk="0" hangingPunct="1">
+    <a:lvl7pPr marL="2743200" algn="l" defTabSz="914400" rtl="0" eaLnBrk="1" latinLnBrk="1" hangingPunct="1">
       <a:defRPr sz="1200" kern="1200">
         <a:solidFill>
           <a:schemeClr val="tx1"/>
@@ -443,7 +224,7 @@
         <a:cs typeface="+mn-cs"/>
       </a:defRPr>
     </a:lvl7pPr>
-    <a:lvl8pPr marL="3200400" algn="l" defTabSz="914400" rtl="0" eaLnBrk="1" latinLnBrk="0" hangingPunct="1">
+    <a:lvl8pPr marL="3200400" algn="l" defTabSz="914400" rtl="0" eaLnBrk="1" latinLnBrk="1" hangingPunct="1">
       <a:defRPr sz="1200" kern="1200">
         <a:solidFill>
           <a:schemeClr val="tx1"/>
@@ -453,7 +234,7 @@
         <a:cs typeface="+mn-cs"/>
       </a:defRPr>
     </a:lvl8pPr>
-    <a:lvl9pPr marL="3657600" algn="l" defTabSz="914400" rtl="0" eaLnBrk="1" latinLnBrk="0" hangingPunct="1">
+    <a:lvl9pPr marL="3657600" algn="l" defTabSz="914400" rtl="0" eaLnBrk="1" latinLnBrk="1" hangingPunct="1">
       <a:defRPr sz="1200" kern="1200">
         <a:solidFill>
           <a:schemeClr val="tx1"/>
@@ -511,10 +292,6 @@
           <a:bodyPr/>
           <a:lstStyle/>
           <a:p>
-            <a:r>
-              <a:rPr lang="en-US" dirty="0"/>
-              <a:t/>
-            </a:r>
             <a:endParaRPr lang="en-US" dirty="0"/>
           </a:p>
         </p:txBody>
@@ -599,10 +376,6 @@
           <a:bodyPr/>
           <a:lstStyle/>
           <a:p>
-            <a:r>
-              <a:rPr lang="en-US" dirty="0"/>
-              <a:t/>
-            </a:r>
             <a:endParaRPr lang="en-US" dirty="0"/>
           </a:p>
         </p:txBody>
@@ -687,10 +460,6 @@
           <a:bodyPr/>
           <a:lstStyle/>
           <a:p>
-            <a:r>
-              <a:rPr lang="en-US" dirty="0"/>
-              <a:t/>
-            </a:r>
             <a:endParaRPr lang="en-US" dirty="0"/>
           </a:p>
         </p:txBody>
@@ -775,10 +544,6 @@
           <a:bodyPr/>
           <a:lstStyle/>
           <a:p>
-            <a:r>
-              <a:rPr lang="en-US" dirty="0"/>
-              <a:t/>
-            </a:r>
             <a:endParaRPr lang="en-US" dirty="0"/>
           </a:p>
         </p:txBody>
@@ -863,10 +628,6 @@
           <a:bodyPr/>
           <a:lstStyle/>
           <a:p>
-            <a:r>
-              <a:rPr lang="en-US" dirty="0"/>
-              <a:t/>
-            </a:r>
             <a:endParaRPr lang="en-US" dirty="0"/>
           </a:p>
         </p:txBody>
@@ -951,10 +712,6 @@
           <a:bodyPr/>
           <a:lstStyle/>
           <a:p>
-            <a:r>
-              <a:rPr lang="en-US" dirty="0"/>
-              <a:t/>
-            </a:r>
             <a:endParaRPr lang="en-US" dirty="0"/>
           </a:p>
         </p:txBody>
@@ -1039,10 +796,6 @@
           <a:bodyPr/>
           <a:lstStyle/>
           <a:p>
-            <a:r>
-              <a:rPr lang="en-US" dirty="0"/>
-              <a:t/>
-            </a:r>
             <a:endParaRPr lang="en-US" dirty="0"/>
           </a:p>
         </p:txBody>
@@ -1127,10 +880,6 @@
           <a:bodyPr/>
           <a:lstStyle/>
           <a:p>
-            <a:r>
-              <a:rPr lang="en-US" dirty="0"/>
-              <a:t/>
-            </a:r>
             <a:endParaRPr lang="en-US" dirty="0"/>
           </a:p>
         </p:txBody>
@@ -1215,10 +964,6 @@
           <a:bodyPr/>
           <a:lstStyle/>
           <a:p>
-            <a:r>
-              <a:rPr lang="en-US" dirty="0"/>
-              <a:t/>
-            </a:r>
             <a:endParaRPr lang="en-US" dirty="0"/>
           </a:p>
         </p:txBody>
@@ -1303,10 +1048,6 @@
           <a:bodyPr/>
           <a:lstStyle/>
           <a:p>
-            <a:r>
-              <a:rPr lang="en-US" dirty="0"/>
-              <a:t/>
-            </a:r>
             <a:endParaRPr lang="en-US" dirty="0"/>
           </a:p>
         </p:txBody>
@@ -1391,10 +1132,6 @@
           <a:bodyPr/>
           <a:lstStyle/>
           <a:p>
-            <a:r>
-              <a:rPr lang="en-US" dirty="0"/>
-              <a:t/>
-            </a:r>
             <a:endParaRPr lang="en-US" dirty="0"/>
           </a:p>
         </p:txBody>
@@ -1479,10 +1216,6 @@
           <a:bodyPr/>
           <a:lstStyle/>
           <a:p>
-            <a:r>
-              <a:rPr lang="en-US" dirty="0"/>
-              <a:t/>
-            </a:r>
             <a:endParaRPr lang="en-US" dirty="0"/>
           </a:p>
         </p:txBody>
@@ -1556,6 +1289,11 @@
 <file path=ppt/slideMasters/slideMaster1.xml><?xml version="1.0" encoding="utf-8"?>
 <p:sldMaster xmlns:a="http://schemas.openxmlformats.org/drawingml/2006/main" xmlns:r="http://schemas.openxmlformats.org/officeDocument/2006/relationships" xmlns:p="http://schemas.openxmlformats.org/presentationml/2006/main">
   <p:cSld>
+    <p:bg>
+      <p:bgRef idx="1001">
+        <a:schemeClr val="bg1"/>
+      </p:bgRef>
+    </p:bg>
     <p:spTree>
       <p:nvGrpSpPr>
         <p:cNvPr id="1" name=""/>
@@ -1838,6 +1576,7 @@
         <a:solidFill>
           <a:srgbClr val="1A2B4A"/>
         </a:solidFill>
+        <a:effectLst/>
       </p:bgPr>
     </p:bg>
     <p:spTree>
@@ -1882,6 +1621,13 @@
             <a:prstDash val="solid"/>
           </a:ln>
         </p:spPr>
+        <p:txBody>
+          <a:bodyPr/>
+          <a:lstStyle/>
+          <a:p>
+            <a:endParaRPr lang="ko-KR" altLang="en-US"/>
+          </a:p>
+        </p:txBody>
       </p:sp>
       <p:sp>
         <p:nvSpPr>
@@ -1891,7 +1637,7 @@
         </p:nvSpPr>
         <p:spPr>
           <a:xfrm>
-            <a:off x="-914400" y="2286000"/>
+            <a:off x="-914400" y="2141982"/>
             <a:ext cx="3657600" cy="3657600"/>
           </a:xfrm>
           <a:prstGeom prst="ellipse">
@@ -1911,6 +1657,13 @@
             <a:prstDash val="solid"/>
           </a:ln>
         </p:spPr>
+        <p:txBody>
+          <a:bodyPr/>
+          <a:lstStyle/>
+          <a:p>
+            <a:endParaRPr lang="ko-KR" altLang="en-US"/>
+          </a:p>
+        </p:txBody>
       </p:sp>
       <p:sp>
         <p:nvSpPr>
@@ -1920,7 +1673,7 @@
         </p:nvSpPr>
         <p:spPr>
           <a:xfrm>
-            <a:off x="640080" y="1645920"/>
+            <a:off x="586824" y="1157734"/>
             <a:ext cx="73152" cy="2011680"/>
           </a:xfrm>
           <a:prstGeom prst="rect">
@@ -1936,6 +1689,13 @@
             <a:prstDash val="solid"/>
           </a:ln>
         </p:spPr>
+        <p:txBody>
+          <a:bodyPr/>
+          <a:lstStyle/>
+          <a:p>
+            <a:endParaRPr lang="ko-KR" altLang="en-US"/>
+          </a:p>
+        </p:txBody>
       </p:sp>
       <p:sp>
         <p:nvSpPr>
@@ -1945,7 +1705,7 @@
         </p:nvSpPr>
         <p:spPr>
           <a:xfrm>
-            <a:off x="822960" y="1554480"/>
+            <a:off x="822960" y="1033021"/>
             <a:ext cx="7315200" cy="1097280"/>
           </a:xfrm>
           <a:prstGeom prst="rect">
@@ -1958,7 +1718,7 @@
           <a:bodyPr wrap="square" lIns="0" tIns="0" rIns="0" bIns="0" rtlCol="0" anchor="ctr"/>
           <a:lstStyle/>
           <a:p>
-            <a:pPr indent="0" marL="0">
+            <a:pPr marL="0" indent="0">
               <a:buNone/>
             </a:pPr>
             <a:r>
@@ -1984,7 +1744,7 @@
         </p:nvSpPr>
         <p:spPr>
           <a:xfrm>
-            <a:off x="822960" y="2606040"/>
+            <a:off x="822960" y="1913382"/>
             <a:ext cx="6858000" cy="457200"/>
           </a:xfrm>
           <a:prstGeom prst="rect">
@@ -1997,7 +1757,7 @@
           <a:bodyPr wrap="square" lIns="0" tIns="0" rIns="0" bIns="0" rtlCol="0" anchor="ctr"/>
           <a:lstStyle/>
           <a:p>
-            <a:pPr indent="0" marL="0">
+            <a:pPr marL="0" indent="0">
               <a:buNone/>
             </a:pPr>
             <a:r>
@@ -2023,7 +1783,7 @@
         </p:nvSpPr>
         <p:spPr>
           <a:xfrm>
-            <a:off x="822960" y="3154680"/>
+            <a:off x="822960" y="2573860"/>
             <a:ext cx="7315200" cy="320040"/>
           </a:xfrm>
           <a:prstGeom prst="rect">
@@ -2036,7 +1796,7 @@
           <a:bodyPr wrap="square" lIns="0" tIns="0" rIns="0" bIns="0" rtlCol="0" anchor="ctr"/>
           <a:lstStyle/>
           <a:p>
-            <a:pPr indent="0" marL="0">
+            <a:pPr marL="0" indent="0">
               <a:buNone/>
             </a:pPr>
             <a:r>
@@ -2048,7 +1808,49 @@
                 <a:ea typeface="Calibri" pitchFamily="34" charset="-122"/>
                 <a:cs typeface="Calibri" pitchFamily="34" charset="-120"/>
               </a:rPr>
-              <a:t>개인 프로젝트 최종 발표  |  Godot 4 / GDScript  |  2026.04 – 05</a:t>
+              <a:t>개인 프로젝트 최종 발표  |  Godot 4 / GDScript  |  2026.04.01 ~ 05.31</a:t>
+            </a:r>
+            <a:br>
+              <a:rPr lang="en-US" sz="1200" dirty="0">
+                <a:solidFill>
+                  <a:srgbClr val="94A3B8"/>
+                </a:solidFill>
+                <a:latin typeface="Calibri" pitchFamily="34" charset="0"/>
+                <a:ea typeface="Calibri" pitchFamily="34" charset="-122"/>
+                <a:cs typeface="Calibri" pitchFamily="34" charset="-120"/>
+              </a:rPr>
+            </a:br>
+            <a:br>
+              <a:rPr lang="en-US" sz="1200" dirty="0">
+                <a:solidFill>
+                  <a:srgbClr val="94A3B8"/>
+                </a:solidFill>
+                <a:latin typeface="Calibri" pitchFamily="34" charset="0"/>
+                <a:ea typeface="Calibri" pitchFamily="34" charset="-122"/>
+                <a:cs typeface="Calibri" pitchFamily="34" charset="-120"/>
+              </a:rPr>
+            </a:br>
+            <a:r>
+              <a:rPr lang="en-US" sz="1200" dirty="0">
+                <a:solidFill>
+                  <a:srgbClr val="94A3B8"/>
+                </a:solidFill>
+                <a:latin typeface="Calibri" pitchFamily="34" charset="0"/>
+                <a:ea typeface="Calibri" pitchFamily="34" charset="-122"/>
+                <a:cs typeface="Calibri" pitchFamily="34" charset="-120"/>
+              </a:rPr>
+              <a:t>5702770 </a:t>
+            </a:r>
+            <a:r>
+              <a:rPr lang="ko-KR" altLang="en-US" sz="1200" dirty="0">
+                <a:solidFill>
+                  <a:srgbClr val="94A3B8"/>
+                </a:solidFill>
+                <a:latin typeface="Calibri" pitchFamily="34" charset="0"/>
+                <a:ea typeface="Calibri" pitchFamily="34" charset="-122"/>
+                <a:cs typeface="Calibri" pitchFamily="34" charset="-120"/>
+              </a:rPr>
+              <a:t>김준형</a:t>
             </a:r>
             <a:endParaRPr lang="en-US" sz="1200" dirty="0"/>
           </a:p>
@@ -2062,8 +1864,8 @@
         </p:nvSpPr>
         <p:spPr>
           <a:xfrm>
-            <a:off x="0" y="4800600"/>
-            <a:ext cx="9144000" cy="342900"/>
+            <a:off x="0" y="4181094"/>
+            <a:ext cx="9144000" cy="937260"/>
           </a:xfrm>
           <a:prstGeom prst="rect">
             <a:avLst/>
@@ -2078,6 +1880,13 @@
             <a:prstDash val="solid"/>
           </a:ln>
         </p:spPr>
+        <p:txBody>
+          <a:bodyPr/>
+          <a:lstStyle/>
+          <a:p>
+            <a:endParaRPr lang="ko-KR" altLang="en-US"/>
+          </a:p>
+        </p:txBody>
       </p:sp>
       <p:sp>
         <p:nvSpPr>
@@ -2087,34 +1896,38 @@
         </p:nvSpPr>
         <p:spPr>
           <a:xfrm>
-            <a:off x="457200" y="4818888"/>
-            <a:ext cx="8229600" cy="301752"/>
-          </a:xfrm>
-          <a:prstGeom prst="rect">
-            <a:avLst/>
-          </a:prstGeom>
-          <a:noFill/>
-          <a:ln/>
-        </p:spPr>
-        <p:txBody>
-          <a:bodyPr wrap="square" lIns="0" tIns="0" rIns="0" bIns="0" rtlCol="0" anchor="ctr"/>
-          <a:lstStyle/>
-          <a:p>
-            <a:pPr indent="0" marL="0">
-              <a:buNone/>
-            </a:pPr>
-            <a:r>
-              <a:rPr lang="en-US" sz="900" dirty="0">
-                <a:solidFill>
-                  <a:srgbClr val="94A3B8"/>
-                </a:solidFill>
-                <a:latin typeface="Calibri" pitchFamily="34" charset="0"/>
-                <a:ea typeface="Calibri" pitchFamily="34" charset="-122"/>
-                <a:cs typeface="Calibri" pitchFamily="34" charset="-120"/>
-              </a:rPr>
-              <a:t>GitHub: github.com/JunhyeongKim1/Retrieve-game-   |   시연 영상: youtu.be/961TFhMLXEA</a:t>
-            </a:r>
-            <a:endParaRPr lang="en-US" sz="900" dirty="0"/>
+            <a:off x="0" y="4498848"/>
+            <a:ext cx="9052560" cy="301752"/>
+          </a:xfrm>
+          <a:prstGeom prst="rect">
+            <a:avLst/>
+          </a:prstGeom>
+          <a:noFill/>
+          <a:ln/>
+        </p:spPr>
+        <p:txBody>
+          <a:bodyPr wrap="square" lIns="0" tIns="0" rIns="0" bIns="0" rtlCol="0" anchor="ctr"/>
+          <a:lstStyle/>
+          <a:p>
+            <a:pPr marL="0" indent="0" algn="ctr">
+              <a:buNone/>
+            </a:pPr>
+            <a:r>
+              <a:rPr lang="en-US" sz="2000" dirty="0">
+                <a:solidFill>
+                  <a:schemeClr val="bg1"/>
+                </a:solidFill>
+                <a:latin typeface="Calibri" pitchFamily="34" charset="0"/>
+                <a:ea typeface="Calibri" pitchFamily="34" charset="-122"/>
+                <a:cs typeface="Calibri" pitchFamily="34" charset="-120"/>
+              </a:rPr>
+              <a:t>GitHub: github.com/JunhyeongKim1/Retrieve-game-</a:t>
+            </a:r>
+            <a:endParaRPr lang="en-US" sz="2000" dirty="0">
+              <a:solidFill>
+                <a:schemeClr val="bg1"/>
+              </a:solidFill>
+            </a:endParaRPr>
           </a:p>
         </p:txBody>
       </p:sp>
@@ -2134,6 +1947,7 @@
         <a:solidFill>
           <a:srgbClr val="F8FAFC"/>
         </a:solidFill>
+        <a:effectLst/>
       </p:bgPr>
     </p:bg>
     <p:spTree>
@@ -2174,6 +1988,13 @@
             <a:prstDash val="solid"/>
           </a:ln>
         </p:spPr>
+        <p:txBody>
+          <a:bodyPr/>
+          <a:lstStyle/>
+          <a:p>
+            <a:endParaRPr lang="ko-KR" altLang="en-US"/>
+          </a:p>
+        </p:txBody>
       </p:sp>
       <p:sp>
         <p:nvSpPr>
@@ -2196,7 +2017,7 @@
           <a:bodyPr wrap="square" lIns="0" tIns="0" rIns="0" bIns="0" rtlCol="0" anchor="ctr"/>
           <a:lstStyle/>
           <a:p>
-            <a:pPr indent="0" marL="0">
+            <a:pPr marL="0" indent="0">
               <a:buNone/>
             </a:pPr>
             <a:r>
@@ -2235,7 +2056,7 @@
           <a:bodyPr wrap="square" lIns="0" tIns="0" rIns="0" bIns="0" rtlCol="0" anchor="ctr"/>
           <a:lstStyle/>
           <a:p>
-            <a:pPr indent="0" marL="0">
+            <a:pPr marL="0" indent="0">
               <a:buNone/>
             </a:pPr>
             <a:r>
@@ -2277,13 +2098,20 @@
             <a:prstDash val="solid"/>
           </a:ln>
           <a:effectLst>
-            <a:outerShdw sx="100000" sy="100000" kx="0" ky="0" algn="bl" rotWithShape="0" blurRad="101600" dist="38100" dir="8100000">
+            <a:outerShdw blurRad="101600" dist="38100" dir="8100000" algn="bl" rotWithShape="0">
               <a:srgbClr val="000000">
                 <a:alpha val="18000"/>
               </a:srgbClr>
             </a:outerShdw>
           </a:effectLst>
         </p:spPr>
+        <p:txBody>
+          <a:bodyPr/>
+          <a:lstStyle/>
+          <a:p>
+            <a:endParaRPr lang="ko-KR" altLang="en-US"/>
+          </a:p>
+        </p:txBody>
       </p:sp>
       <p:sp>
         <p:nvSpPr>
@@ -2309,6 +2137,13 @@
             <a:prstDash val="solid"/>
           </a:ln>
         </p:spPr>
+        <p:txBody>
+          <a:bodyPr/>
+          <a:lstStyle/>
+          <a:p>
+            <a:endParaRPr lang="ko-KR" altLang="en-US"/>
+          </a:p>
+        </p:txBody>
       </p:sp>
       <p:sp>
         <p:nvSpPr>
@@ -2331,7 +2166,7 @@
           <a:bodyPr wrap="square" lIns="0" tIns="0" rIns="0" bIns="0" rtlCol="0" anchor="ctr"/>
           <a:lstStyle/>
           <a:p>
-            <a:pPr algn="ctr" indent="0" marL="0">
+            <a:pPr marL="0" indent="0" algn="ctr">
               <a:buNone/>
             </a:pPr>
             <a:r>
@@ -2370,7 +2205,7 @@
           <a:bodyPr wrap="square" lIns="0" tIns="0" rIns="0" bIns="0" rtlCol="0" anchor="ctr"/>
           <a:lstStyle/>
           <a:p>
-            <a:pPr indent="0" marL="0">
+            <a:pPr marL="0" indent="0">
               <a:buNone/>
             </a:pPr>
             <a:r>
@@ -2412,13 +2247,20 @@
             <a:prstDash val="solid"/>
           </a:ln>
           <a:effectLst>
-            <a:outerShdw sx="100000" sy="100000" kx="0" ky="0" algn="bl" rotWithShape="0" blurRad="101600" dist="38100" dir="8100000">
+            <a:outerShdw blurRad="101600" dist="38100" dir="8100000" algn="bl" rotWithShape="0">
               <a:srgbClr val="000000">
                 <a:alpha val="18000"/>
               </a:srgbClr>
             </a:outerShdw>
           </a:effectLst>
         </p:spPr>
+        <p:txBody>
+          <a:bodyPr/>
+          <a:lstStyle/>
+          <a:p>
+            <a:endParaRPr lang="ko-KR" altLang="en-US"/>
+          </a:p>
+        </p:txBody>
       </p:sp>
       <p:sp>
         <p:nvSpPr>
@@ -2444,6 +2286,13 @@
             <a:prstDash val="solid"/>
           </a:ln>
         </p:spPr>
+        <p:txBody>
+          <a:bodyPr/>
+          <a:lstStyle/>
+          <a:p>
+            <a:endParaRPr lang="ko-KR" altLang="en-US"/>
+          </a:p>
+        </p:txBody>
       </p:sp>
       <p:sp>
         <p:nvSpPr>
@@ -2466,7 +2315,7 @@
           <a:bodyPr wrap="square" lIns="0" tIns="0" rIns="0" bIns="0" rtlCol="0" anchor="ctr"/>
           <a:lstStyle/>
           <a:p>
-            <a:pPr algn="ctr" indent="0" marL="0">
+            <a:pPr marL="0" indent="0" algn="ctr">
               <a:buNone/>
             </a:pPr>
             <a:r>
@@ -2505,7 +2354,7 @@
           <a:bodyPr wrap="square" lIns="0" tIns="0" rIns="0" bIns="0" rtlCol="0" anchor="ctr"/>
           <a:lstStyle/>
           <a:p>
-            <a:pPr indent="0" marL="0">
+            <a:pPr marL="0" indent="0">
               <a:buNone/>
             </a:pPr>
             <a:r>
@@ -2547,13 +2396,20 @@
             <a:prstDash val="solid"/>
           </a:ln>
           <a:effectLst>
-            <a:outerShdw sx="100000" sy="100000" kx="0" ky="0" algn="bl" rotWithShape="0" blurRad="101600" dist="38100" dir="8100000">
+            <a:outerShdw blurRad="101600" dist="38100" dir="8100000" algn="bl" rotWithShape="0">
               <a:srgbClr val="000000">
                 <a:alpha val="18000"/>
               </a:srgbClr>
             </a:outerShdw>
           </a:effectLst>
         </p:spPr>
+        <p:txBody>
+          <a:bodyPr/>
+          <a:lstStyle/>
+          <a:p>
+            <a:endParaRPr lang="ko-KR" altLang="en-US"/>
+          </a:p>
+        </p:txBody>
       </p:sp>
       <p:sp>
         <p:nvSpPr>
@@ -2579,6 +2435,13 @@
             <a:prstDash val="solid"/>
           </a:ln>
         </p:spPr>
+        <p:txBody>
+          <a:bodyPr/>
+          <a:lstStyle/>
+          <a:p>
+            <a:endParaRPr lang="ko-KR" altLang="en-US"/>
+          </a:p>
+        </p:txBody>
       </p:sp>
       <p:sp>
         <p:nvSpPr>
@@ -2601,7 +2464,7 @@
           <a:bodyPr wrap="square" lIns="0" tIns="0" rIns="0" bIns="0" rtlCol="0" anchor="ctr"/>
           <a:lstStyle/>
           <a:p>
-            <a:pPr algn="ctr" indent="0" marL="0">
+            <a:pPr marL="0" indent="0" algn="ctr">
               <a:buNone/>
             </a:pPr>
             <a:r>
@@ -2640,7 +2503,7 @@
           <a:bodyPr wrap="square" lIns="0" tIns="0" rIns="0" bIns="0" rtlCol="0" anchor="ctr"/>
           <a:lstStyle/>
           <a:p>
-            <a:pPr indent="0" marL="0">
+            <a:pPr marL="0" indent="0">
               <a:buNone/>
             </a:pPr>
             <a:r>
@@ -2682,13 +2545,20 @@
             <a:prstDash val="solid"/>
           </a:ln>
           <a:effectLst>
-            <a:outerShdw sx="100000" sy="100000" kx="0" ky="0" algn="bl" rotWithShape="0" blurRad="101600" dist="38100" dir="8100000">
+            <a:outerShdw blurRad="101600" dist="38100" dir="8100000" algn="bl" rotWithShape="0">
               <a:srgbClr val="000000">
                 <a:alpha val="18000"/>
               </a:srgbClr>
             </a:outerShdw>
           </a:effectLst>
         </p:spPr>
+        <p:txBody>
+          <a:bodyPr/>
+          <a:lstStyle/>
+          <a:p>
+            <a:endParaRPr lang="ko-KR" altLang="en-US"/>
+          </a:p>
+        </p:txBody>
       </p:sp>
       <p:sp>
         <p:nvSpPr>
@@ -2714,6 +2584,13 @@
             <a:prstDash val="solid"/>
           </a:ln>
         </p:spPr>
+        <p:txBody>
+          <a:bodyPr/>
+          <a:lstStyle/>
+          <a:p>
+            <a:endParaRPr lang="ko-KR" altLang="en-US"/>
+          </a:p>
+        </p:txBody>
       </p:sp>
       <p:sp>
         <p:nvSpPr>
@@ -2736,7 +2613,7 @@
           <a:bodyPr wrap="square" lIns="0" tIns="0" rIns="0" bIns="0" rtlCol="0" anchor="ctr"/>
           <a:lstStyle/>
           <a:p>
-            <a:pPr algn="ctr" indent="0" marL="0">
+            <a:pPr marL="0" indent="0" algn="ctr">
               <a:buNone/>
             </a:pPr>
             <a:r>
@@ -2775,7 +2652,7 @@
           <a:bodyPr wrap="square" lIns="0" tIns="0" rIns="0" bIns="0" rtlCol="0" anchor="ctr"/>
           <a:lstStyle/>
           <a:p>
-            <a:pPr indent="0" marL="0">
+            <a:pPr marL="0" indent="0">
               <a:buNone/>
             </a:pPr>
             <a:r>
@@ -2817,13 +2694,20 @@
             <a:prstDash val="solid"/>
           </a:ln>
           <a:effectLst>
-            <a:outerShdw sx="100000" sy="100000" kx="0" ky="0" algn="bl" rotWithShape="0" blurRad="101600" dist="38100" dir="8100000">
+            <a:outerShdw blurRad="101600" dist="38100" dir="8100000" algn="bl" rotWithShape="0">
               <a:srgbClr val="000000">
                 <a:alpha val="18000"/>
               </a:srgbClr>
             </a:outerShdw>
           </a:effectLst>
         </p:spPr>
+        <p:txBody>
+          <a:bodyPr/>
+          <a:lstStyle/>
+          <a:p>
+            <a:endParaRPr lang="ko-KR" altLang="en-US"/>
+          </a:p>
+        </p:txBody>
       </p:sp>
       <p:sp>
         <p:nvSpPr>
@@ -2849,6 +2733,13 @@
             <a:prstDash val="solid"/>
           </a:ln>
         </p:spPr>
+        <p:txBody>
+          <a:bodyPr/>
+          <a:lstStyle/>
+          <a:p>
+            <a:endParaRPr lang="ko-KR" altLang="en-US"/>
+          </a:p>
+        </p:txBody>
       </p:sp>
       <p:sp>
         <p:nvSpPr>
@@ -2871,7 +2762,7 @@
           <a:bodyPr wrap="square" lIns="0" tIns="0" rIns="0" bIns="0" rtlCol="0" anchor="ctr"/>
           <a:lstStyle/>
           <a:p>
-            <a:pPr algn="ctr" indent="0" marL="0">
+            <a:pPr marL="0" indent="0" algn="ctr">
               <a:buNone/>
             </a:pPr>
             <a:r>
@@ -2910,7 +2801,7 @@
           <a:bodyPr wrap="square" lIns="0" tIns="0" rIns="0" bIns="0" rtlCol="0" anchor="ctr"/>
           <a:lstStyle/>
           <a:p>
-            <a:pPr indent="0" marL="0">
+            <a:pPr marL="0" indent="0">
               <a:buNone/>
             </a:pPr>
             <a:r>
@@ -2952,13 +2843,20 @@
             <a:prstDash val="solid"/>
           </a:ln>
           <a:effectLst>
-            <a:outerShdw sx="100000" sy="100000" kx="0" ky="0" algn="bl" rotWithShape="0" blurRad="101600" dist="38100" dir="8100000">
+            <a:outerShdw blurRad="101600" dist="38100" dir="8100000" algn="bl" rotWithShape="0">
               <a:srgbClr val="000000">
                 <a:alpha val="18000"/>
               </a:srgbClr>
             </a:outerShdw>
           </a:effectLst>
         </p:spPr>
+        <p:txBody>
+          <a:bodyPr/>
+          <a:lstStyle/>
+          <a:p>
+            <a:endParaRPr lang="ko-KR" altLang="en-US"/>
+          </a:p>
+        </p:txBody>
       </p:sp>
       <p:sp>
         <p:nvSpPr>
@@ -2984,6 +2882,13 @@
             <a:prstDash val="solid"/>
           </a:ln>
         </p:spPr>
+        <p:txBody>
+          <a:bodyPr/>
+          <a:lstStyle/>
+          <a:p>
+            <a:endParaRPr lang="ko-KR" altLang="en-US"/>
+          </a:p>
+        </p:txBody>
       </p:sp>
       <p:sp>
         <p:nvSpPr>
@@ -3006,7 +2911,7 @@
           <a:bodyPr wrap="square" lIns="0" tIns="0" rIns="0" bIns="0" rtlCol="0" anchor="ctr"/>
           <a:lstStyle/>
           <a:p>
-            <a:pPr algn="ctr" indent="0" marL="0">
+            <a:pPr marL="0" indent="0" algn="ctr">
               <a:buNone/>
             </a:pPr>
             <a:r>
@@ -3045,7 +2950,7 @@
           <a:bodyPr wrap="square" lIns="0" tIns="0" rIns="0" bIns="0" rtlCol="0" anchor="ctr"/>
           <a:lstStyle/>
           <a:p>
-            <a:pPr indent="0" marL="0">
+            <a:pPr marL="0" indent="0">
               <a:buNone/>
             </a:pPr>
             <a:r>
@@ -3087,13 +2992,20 @@
             <a:prstDash val="solid"/>
           </a:ln>
           <a:effectLst>
-            <a:outerShdw sx="100000" sy="100000" kx="0" ky="0" algn="bl" rotWithShape="0" blurRad="101600" dist="38100" dir="8100000">
+            <a:outerShdw blurRad="101600" dist="38100" dir="8100000" algn="bl" rotWithShape="0">
               <a:srgbClr val="000000">
                 <a:alpha val="18000"/>
               </a:srgbClr>
             </a:outerShdw>
           </a:effectLst>
         </p:spPr>
+        <p:txBody>
+          <a:bodyPr/>
+          <a:lstStyle/>
+          <a:p>
+            <a:endParaRPr lang="ko-KR" altLang="en-US"/>
+          </a:p>
+        </p:txBody>
       </p:sp>
       <p:sp>
         <p:nvSpPr>
@@ -3119,6 +3031,13 @@
             <a:prstDash val="solid"/>
           </a:ln>
         </p:spPr>
+        <p:txBody>
+          <a:bodyPr/>
+          <a:lstStyle/>
+          <a:p>
+            <a:endParaRPr lang="ko-KR" altLang="en-US"/>
+          </a:p>
+        </p:txBody>
       </p:sp>
       <p:sp>
         <p:nvSpPr>
@@ -3141,7 +3060,7 @@
           <a:bodyPr wrap="square" lIns="0" tIns="0" rIns="0" bIns="0" rtlCol="0" anchor="ctr"/>
           <a:lstStyle/>
           <a:p>
-            <a:pPr algn="ctr" indent="0" marL="0">
+            <a:pPr marL="0" indent="0" algn="ctr">
               <a:buNone/>
             </a:pPr>
             <a:r>
@@ -3180,7 +3099,7 @@
           <a:bodyPr wrap="square" lIns="0" tIns="0" rIns="0" bIns="0" rtlCol="0" anchor="ctr"/>
           <a:lstStyle/>
           <a:p>
-            <a:pPr indent="0" marL="0">
+            <a:pPr marL="0" indent="0">
               <a:buNone/>
             </a:pPr>
             <a:r>
@@ -3222,13 +3141,20 @@
             <a:prstDash val="solid"/>
           </a:ln>
           <a:effectLst>
-            <a:outerShdw sx="100000" sy="100000" kx="0" ky="0" algn="bl" rotWithShape="0" blurRad="101600" dist="38100" dir="8100000">
+            <a:outerShdw blurRad="101600" dist="38100" dir="8100000" algn="bl" rotWithShape="0">
               <a:srgbClr val="000000">
                 <a:alpha val="18000"/>
               </a:srgbClr>
             </a:outerShdw>
           </a:effectLst>
         </p:spPr>
+        <p:txBody>
+          <a:bodyPr/>
+          <a:lstStyle/>
+          <a:p>
+            <a:endParaRPr lang="ko-KR" altLang="en-US" dirty="0"/>
+          </a:p>
+        </p:txBody>
       </p:sp>
       <p:sp>
         <p:nvSpPr>
@@ -3254,6 +3180,13 @@
             <a:prstDash val="solid"/>
           </a:ln>
         </p:spPr>
+        <p:txBody>
+          <a:bodyPr/>
+          <a:lstStyle/>
+          <a:p>
+            <a:endParaRPr lang="ko-KR" altLang="en-US"/>
+          </a:p>
+        </p:txBody>
       </p:sp>
       <p:sp>
         <p:nvSpPr>
@@ -3276,7 +3209,7 @@
           <a:bodyPr wrap="square" lIns="0" tIns="0" rIns="0" bIns="0" rtlCol="0" anchor="ctr"/>
           <a:lstStyle/>
           <a:p>
-            <a:pPr algn="ctr" indent="0" marL="0">
+            <a:pPr marL="0" indent="0" algn="ctr">
               <a:buNone/>
             </a:pPr>
             <a:r>
@@ -3315,7 +3248,7 @@
           <a:bodyPr wrap="square" lIns="0" tIns="0" rIns="0" bIns="0" rtlCol="0" anchor="ctr"/>
           <a:lstStyle/>
           <a:p>
-            <a:pPr indent="0" marL="0">
+            <a:pPr marL="0" indent="0">
               <a:buNone/>
             </a:pPr>
             <a:r>
@@ -3357,6 +3290,13 @@
             <a:prstDash val="solid"/>
           </a:ln>
         </p:spPr>
+        <p:txBody>
+          <a:bodyPr/>
+          <a:lstStyle/>
+          <a:p>
+            <a:endParaRPr lang="ko-KR" altLang="en-US"/>
+          </a:p>
+        </p:txBody>
       </p:sp>
       <p:sp>
         <p:nvSpPr>
@@ -3379,7 +3319,7 @@
           <a:bodyPr wrap="square" lIns="0" tIns="0" rIns="0" bIns="0" rtlCol="0" anchor="ctr"/>
           <a:lstStyle/>
           <a:p>
-            <a:pPr algn="ctr" indent="0" marL="0">
+            <a:pPr marL="0" indent="0" algn="ctr">
               <a:buNone/>
             </a:pPr>
             <a:r>
@@ -3413,6 +3353,7 @@
         <a:solidFill>
           <a:srgbClr val="F8FAFC"/>
         </a:solidFill>
+        <a:effectLst/>
       </p:bgPr>
     </p:bg>
     <p:spTree>
@@ -3453,6 +3394,13 @@
             <a:prstDash val="solid"/>
           </a:ln>
         </p:spPr>
+        <p:txBody>
+          <a:bodyPr/>
+          <a:lstStyle/>
+          <a:p>
+            <a:endParaRPr lang="ko-KR" altLang="en-US"/>
+          </a:p>
+        </p:txBody>
       </p:sp>
       <p:sp>
         <p:nvSpPr>
@@ -3475,7 +3423,7 @@
           <a:bodyPr wrap="square" lIns="0" tIns="0" rIns="0" bIns="0" rtlCol="0" anchor="ctr"/>
           <a:lstStyle/>
           <a:p>
-            <a:pPr indent="0" marL="0">
+            <a:pPr marL="0" indent="0">
               <a:buNone/>
             </a:pPr>
             <a:r>
@@ -3514,7 +3462,7 @@
           <a:bodyPr wrap="square" lIns="0" tIns="0" rIns="0" bIns="0" rtlCol="0" anchor="ctr"/>
           <a:lstStyle/>
           <a:p>
-            <a:pPr indent="0" marL="0">
+            <a:pPr marL="0" indent="0">
               <a:buNone/>
             </a:pPr>
             <a:r>
@@ -3556,13 +3504,20 @@
             <a:prstDash val="solid"/>
           </a:ln>
           <a:effectLst>
-            <a:outerShdw sx="100000" sy="100000" kx="0" ky="0" algn="bl" rotWithShape="0" blurRad="101600" dist="38100" dir="8100000">
+            <a:outerShdw blurRad="101600" dist="38100" dir="8100000" algn="bl" rotWithShape="0">
               <a:srgbClr val="000000">
                 <a:alpha val="18000"/>
               </a:srgbClr>
             </a:outerShdw>
           </a:effectLst>
         </p:spPr>
+        <p:txBody>
+          <a:bodyPr/>
+          <a:lstStyle/>
+          <a:p>
+            <a:endParaRPr lang="ko-KR" altLang="en-US" dirty="0"/>
+          </a:p>
+        </p:txBody>
       </p:sp>
       <p:sp>
         <p:nvSpPr>
@@ -3588,6 +3543,13 @@
             <a:prstDash val="solid"/>
           </a:ln>
         </p:spPr>
+        <p:txBody>
+          <a:bodyPr/>
+          <a:lstStyle/>
+          <a:p>
+            <a:endParaRPr lang="ko-KR" altLang="en-US"/>
+          </a:p>
+        </p:txBody>
       </p:sp>
       <p:sp>
         <p:nvSpPr>
@@ -3610,7 +3572,7 @@
           <a:bodyPr wrap="square" lIns="0" tIns="0" rIns="0" bIns="0" rtlCol="0" anchor="ctr"/>
           <a:lstStyle/>
           <a:p>
-            <a:pPr indent="0" marL="0">
+            <a:pPr marL="0" indent="0">
               <a:buNone/>
             </a:pPr>
             <a:r>
@@ -3652,6 +3614,13 @@
             <a:prstDash val="solid"/>
           </a:ln>
         </p:spPr>
+        <p:txBody>
+          <a:bodyPr/>
+          <a:lstStyle/>
+          <a:p>
+            <a:endParaRPr lang="ko-KR" altLang="en-US"/>
+          </a:p>
+        </p:txBody>
       </p:sp>
       <p:sp>
         <p:nvSpPr>
@@ -3674,7 +3643,7 @@
           <a:bodyPr wrap="square" lIns="0" tIns="0" rIns="0" bIns="0" rtlCol="0" anchor="ctr"/>
           <a:lstStyle/>
           <a:p>
-            <a:pPr indent="0" marL="0">
+            <a:pPr marL="0" indent="0">
               <a:buNone/>
             </a:pPr>
             <a:r>
@@ -3716,6 +3685,13 @@
             <a:prstDash val="solid"/>
           </a:ln>
         </p:spPr>
+        <p:txBody>
+          <a:bodyPr/>
+          <a:lstStyle/>
+          <a:p>
+            <a:endParaRPr lang="ko-KR" altLang="en-US"/>
+          </a:p>
+        </p:txBody>
       </p:sp>
       <p:sp>
         <p:nvSpPr>
@@ -3738,7 +3714,7 @@
           <a:bodyPr wrap="square" lIns="0" tIns="0" rIns="0" bIns="0" rtlCol="0" anchor="ctr"/>
           <a:lstStyle/>
           <a:p>
-            <a:pPr indent="0" marL="0">
+            <a:pPr marL="0" indent="0">
               <a:buNone/>
             </a:pPr>
             <a:r>
@@ -3780,6 +3756,13 @@
             <a:prstDash val="solid"/>
           </a:ln>
         </p:spPr>
+        <p:txBody>
+          <a:bodyPr/>
+          <a:lstStyle/>
+          <a:p>
+            <a:endParaRPr lang="ko-KR" altLang="en-US"/>
+          </a:p>
+        </p:txBody>
       </p:sp>
       <p:sp>
         <p:nvSpPr>
@@ -3802,7 +3785,7 @@
           <a:bodyPr wrap="square" lIns="0" tIns="0" rIns="0" bIns="0" rtlCol="0" anchor="ctr"/>
           <a:lstStyle/>
           <a:p>
-            <a:pPr indent="0" marL="0">
+            <a:pPr marL="0" indent="0">
               <a:buNone/>
             </a:pPr>
             <a:r>
@@ -3844,6 +3827,13 @@
             <a:prstDash val="solid"/>
           </a:ln>
         </p:spPr>
+        <p:txBody>
+          <a:bodyPr/>
+          <a:lstStyle/>
+          <a:p>
+            <a:endParaRPr lang="ko-KR" altLang="en-US"/>
+          </a:p>
+        </p:txBody>
       </p:sp>
       <p:sp>
         <p:nvSpPr>
@@ -3866,7 +3856,7 @@
           <a:bodyPr wrap="square" lIns="0" tIns="0" rIns="0" bIns="0" rtlCol="0" anchor="ctr"/>
           <a:lstStyle/>
           <a:p>
-            <a:pPr indent="0" marL="0">
+            <a:pPr marL="0" indent="0">
               <a:buNone/>
             </a:pPr>
             <a:r>
@@ -3908,6 +3898,13 @@
             <a:prstDash val="solid"/>
           </a:ln>
         </p:spPr>
+        <p:txBody>
+          <a:bodyPr/>
+          <a:lstStyle/>
+          <a:p>
+            <a:endParaRPr lang="ko-KR" altLang="en-US"/>
+          </a:p>
+        </p:txBody>
       </p:sp>
       <p:sp>
         <p:nvSpPr>
@@ -3930,7 +3927,7 @@
           <a:bodyPr wrap="square" lIns="0" tIns="0" rIns="0" bIns="0" rtlCol="0" anchor="ctr"/>
           <a:lstStyle/>
           <a:p>
-            <a:pPr indent="0" marL="0">
+            <a:pPr marL="0" indent="0">
               <a:buNone/>
             </a:pPr>
             <a:r>
@@ -3972,13 +3969,20 @@
             <a:prstDash val="solid"/>
           </a:ln>
           <a:effectLst>
-            <a:outerShdw sx="100000" sy="100000" kx="0" ky="0" algn="bl" rotWithShape="0" blurRad="101600" dist="38100" dir="8100000">
+            <a:outerShdw blurRad="101600" dist="38100" dir="8100000" algn="bl" rotWithShape="0">
               <a:srgbClr val="000000">
                 <a:alpha val="18000"/>
               </a:srgbClr>
             </a:outerShdw>
           </a:effectLst>
         </p:spPr>
+        <p:txBody>
+          <a:bodyPr/>
+          <a:lstStyle/>
+          <a:p>
+            <a:endParaRPr lang="ko-KR" altLang="en-US"/>
+          </a:p>
+        </p:txBody>
       </p:sp>
       <p:sp>
         <p:nvSpPr>
@@ -4004,6 +4008,13 @@
             <a:prstDash val="solid"/>
           </a:ln>
         </p:spPr>
+        <p:txBody>
+          <a:bodyPr/>
+          <a:lstStyle/>
+          <a:p>
+            <a:endParaRPr lang="ko-KR" altLang="en-US"/>
+          </a:p>
+        </p:txBody>
       </p:sp>
       <p:sp>
         <p:nvSpPr>
@@ -4026,7 +4037,7 @@
           <a:bodyPr wrap="square" lIns="0" tIns="0" rIns="0" bIns="0" rtlCol="0" anchor="ctr"/>
           <a:lstStyle/>
           <a:p>
-            <a:pPr indent="0" marL="0">
+            <a:pPr marL="0" indent="0">
               <a:buNone/>
             </a:pPr>
             <a:r>
@@ -4068,6 +4079,13 @@
             <a:prstDash val="solid"/>
           </a:ln>
         </p:spPr>
+        <p:txBody>
+          <a:bodyPr/>
+          <a:lstStyle/>
+          <a:p>
+            <a:endParaRPr lang="ko-KR" altLang="en-US"/>
+          </a:p>
+        </p:txBody>
       </p:sp>
       <p:sp>
         <p:nvSpPr>
@@ -4090,7 +4108,7 @@
           <a:bodyPr wrap="square" lIns="0" tIns="0" rIns="0" bIns="0" rtlCol="0" anchor="ctr"/>
           <a:lstStyle/>
           <a:p>
-            <a:pPr algn="ctr" indent="0" marL="0">
+            <a:pPr marL="0" indent="0" algn="ctr">
               <a:buNone/>
             </a:pPr>
             <a:r>
@@ -4129,7 +4147,7 @@
           <a:bodyPr wrap="square" lIns="0" tIns="0" rIns="0" bIns="0" rtlCol="0" anchor="ctr"/>
           <a:lstStyle/>
           <a:p>
-            <a:pPr indent="0" marL="0">
+            <a:pPr marL="0" indent="0">
               <a:buNone/>
             </a:pPr>
             <a:r>
@@ -4168,7 +4186,7 @@
           <a:bodyPr wrap="square" lIns="0" tIns="0" rIns="0" bIns="0" rtlCol="0" anchor="ctr"/>
           <a:lstStyle/>
           <a:p>
-            <a:pPr indent="0" marL="0">
+            <a:pPr marL="0" indent="0">
               <a:buNone/>
             </a:pPr>
             <a:r>
@@ -4210,6 +4228,13 @@
             <a:prstDash val="solid"/>
           </a:ln>
         </p:spPr>
+        <p:txBody>
+          <a:bodyPr/>
+          <a:lstStyle/>
+          <a:p>
+            <a:endParaRPr lang="ko-KR" altLang="en-US"/>
+          </a:p>
+        </p:txBody>
       </p:sp>
       <p:sp>
         <p:nvSpPr>
@@ -4232,7 +4257,7 @@
           <a:bodyPr wrap="square" lIns="0" tIns="0" rIns="0" bIns="0" rtlCol="0" anchor="ctr"/>
           <a:lstStyle/>
           <a:p>
-            <a:pPr algn="ctr" indent="0" marL="0">
+            <a:pPr marL="0" indent="0" algn="ctr">
               <a:buNone/>
             </a:pPr>
             <a:r>
@@ -4271,7 +4296,7 @@
           <a:bodyPr wrap="square" lIns="0" tIns="0" rIns="0" bIns="0" rtlCol="0" anchor="ctr"/>
           <a:lstStyle/>
           <a:p>
-            <a:pPr indent="0" marL="0">
+            <a:pPr marL="0" indent="0">
               <a:buNone/>
             </a:pPr>
             <a:r>
@@ -4310,7 +4335,7 @@
           <a:bodyPr wrap="square" lIns="0" tIns="0" rIns="0" bIns="0" rtlCol="0" anchor="ctr"/>
           <a:lstStyle/>
           <a:p>
-            <a:pPr indent="0" marL="0">
+            <a:pPr marL="0" indent="0">
               <a:buNone/>
             </a:pPr>
             <a:r>
@@ -4352,6 +4377,13 @@
             <a:prstDash val="solid"/>
           </a:ln>
         </p:spPr>
+        <p:txBody>
+          <a:bodyPr/>
+          <a:lstStyle/>
+          <a:p>
+            <a:endParaRPr lang="ko-KR" altLang="en-US"/>
+          </a:p>
+        </p:txBody>
       </p:sp>
       <p:sp>
         <p:nvSpPr>
@@ -4374,7 +4406,7 @@
           <a:bodyPr wrap="square" lIns="0" tIns="0" rIns="0" bIns="0" rtlCol="0" anchor="ctr"/>
           <a:lstStyle/>
           <a:p>
-            <a:pPr algn="ctr" indent="0" marL="0">
+            <a:pPr marL="0" indent="0" algn="ctr">
               <a:buNone/>
             </a:pPr>
             <a:r>
@@ -4413,7 +4445,7 @@
           <a:bodyPr wrap="square" lIns="0" tIns="0" rIns="0" bIns="0" rtlCol="0" anchor="ctr"/>
           <a:lstStyle/>
           <a:p>
-            <a:pPr indent="0" marL="0">
+            <a:pPr marL="0" indent="0">
               <a:buNone/>
             </a:pPr>
             <a:r>
@@ -4452,7 +4484,7 @@
           <a:bodyPr wrap="square" lIns="0" tIns="0" rIns="0" bIns="0" rtlCol="0" anchor="ctr"/>
           <a:lstStyle/>
           <a:p>
-            <a:pPr indent="0" marL="0">
+            <a:pPr marL="0" indent="0">
               <a:buNone/>
             </a:pPr>
             <a:r>
@@ -4494,6 +4526,13 @@
             <a:prstDash val="solid"/>
           </a:ln>
         </p:spPr>
+        <p:txBody>
+          <a:bodyPr/>
+          <a:lstStyle/>
+          <a:p>
+            <a:endParaRPr lang="ko-KR" altLang="en-US"/>
+          </a:p>
+        </p:txBody>
       </p:sp>
       <p:sp>
         <p:nvSpPr>
@@ -4519,6 +4558,13 @@
             <a:prstDash val="solid"/>
           </a:ln>
         </p:spPr>
+        <p:txBody>
+          <a:bodyPr/>
+          <a:lstStyle/>
+          <a:p>
+            <a:endParaRPr lang="ko-KR" altLang="en-US"/>
+          </a:p>
+        </p:txBody>
       </p:sp>
       <p:sp>
         <p:nvSpPr>
@@ -4541,7 +4587,7 @@
           <a:bodyPr wrap="square" lIns="0" tIns="0" rIns="0" bIns="0" rtlCol="0" anchor="ctr"/>
           <a:lstStyle/>
           <a:p>
-            <a:pPr indent="0" marL="0">
+            <a:pPr marL="0" indent="0">
               <a:buNone/>
             </a:pPr>
             <a:r>
@@ -4575,6 +4621,7 @@
         <a:solidFill>
           <a:srgbClr val="1A2B4A"/>
         </a:solidFill>
+        <a:effectLst/>
       </p:bgPr>
     </p:bg>
     <p:spTree>
@@ -4619,6 +4666,13 @@
             <a:prstDash val="solid"/>
           </a:ln>
         </p:spPr>
+        <p:txBody>
+          <a:bodyPr/>
+          <a:lstStyle/>
+          <a:p>
+            <a:endParaRPr lang="ko-KR" altLang="en-US"/>
+          </a:p>
+        </p:txBody>
       </p:sp>
       <p:sp>
         <p:nvSpPr>
@@ -4644,6 +4698,13 @@
             <a:prstDash val="solid"/>
           </a:ln>
         </p:spPr>
+        <p:txBody>
+          <a:bodyPr/>
+          <a:lstStyle/>
+          <a:p>
+            <a:endParaRPr lang="ko-KR" altLang="en-US"/>
+          </a:p>
+        </p:txBody>
       </p:sp>
       <p:sp>
         <p:nvSpPr>
@@ -4666,7 +4727,7 @@
           <a:bodyPr wrap="square" lIns="0" tIns="0" rIns="0" bIns="0" rtlCol="0" anchor="ctr"/>
           <a:lstStyle/>
           <a:p>
-            <a:pPr indent="0" marL="0">
+            <a:pPr marL="0" indent="0">
               <a:buNone/>
             </a:pPr>
             <a:r>
@@ -4705,7 +4766,7 @@
           <a:bodyPr wrap="square" lIns="0" tIns="0" rIns="0" bIns="0" rtlCol="0" anchor="ctr"/>
           <a:lstStyle/>
           <a:p>
-            <a:pPr indent="0" marL="0">
+            <a:pPr marL="0" indent="0">
               <a:buNone/>
             </a:pPr>
             <a:r>
@@ -4745,6 +4806,13 @@
             <a:prstDash val="solid"/>
           </a:ln>
         </p:spPr>
+        <p:txBody>
+          <a:bodyPr/>
+          <a:lstStyle/>
+          <a:p>
+            <a:endParaRPr lang="ko-KR" altLang="en-US"/>
+          </a:p>
+        </p:txBody>
       </p:sp>
       <p:sp>
         <p:nvSpPr>
@@ -4767,7 +4835,7 @@
           <a:bodyPr wrap="square" lIns="0" tIns="0" rIns="0" bIns="0" rtlCol="0" anchor="ctr"/>
           <a:lstStyle/>
           <a:p>
-            <a:pPr indent="0" marL="0">
+            <a:pPr marL="0" indent="0">
               <a:buNone/>
             </a:pPr>
             <a:r>
@@ -4806,7 +4874,7 @@
           <a:bodyPr wrap="square" lIns="0" tIns="0" rIns="0" bIns="0" rtlCol="0" anchor="ctr"/>
           <a:lstStyle/>
           <a:p>
-            <a:pPr indent="0" marL="0">
+            <a:pPr marL="0" indent="0">
               <a:buNone/>
             </a:pPr>
             <a:r>
@@ -4845,7 +4913,7 @@
           <a:bodyPr wrap="square" lIns="0" tIns="0" rIns="0" bIns="0" rtlCol="0" anchor="ctr"/>
           <a:lstStyle/>
           <a:p>
-            <a:pPr indent="0" marL="0">
+            <a:pPr marL="0" indent="0">
               <a:buNone/>
             </a:pPr>
             <a:r>
@@ -4884,7 +4952,7 @@
           <a:bodyPr wrap="square" lIns="0" tIns="0" rIns="0" bIns="0" rtlCol="0" anchor="ctr"/>
           <a:lstStyle/>
           <a:p>
-            <a:pPr indent="0" marL="0">
+            <a:pPr marL="0" indent="0">
               <a:buNone/>
             </a:pPr>
             <a:r>
@@ -4918,6 +4986,7 @@
         <a:solidFill>
           <a:srgbClr val="F8FAFC"/>
         </a:solidFill>
+        <a:effectLst/>
       </p:bgPr>
     </p:bg>
     <p:spTree>
@@ -4958,6 +5027,13 @@
             <a:prstDash val="solid"/>
           </a:ln>
         </p:spPr>
+        <p:txBody>
+          <a:bodyPr/>
+          <a:lstStyle/>
+          <a:p>
+            <a:endParaRPr lang="ko-KR" altLang="en-US"/>
+          </a:p>
+        </p:txBody>
       </p:sp>
       <p:sp>
         <p:nvSpPr>
@@ -4980,7 +5056,7 @@
           <a:bodyPr wrap="square" lIns="0" tIns="0" rIns="0" bIns="0" rtlCol="0" anchor="ctr"/>
           <a:lstStyle/>
           <a:p>
-            <a:pPr indent="0" marL="0">
+            <a:pPr marL="0" indent="0">
               <a:buNone/>
             </a:pPr>
             <a:r>
@@ -5022,13 +5098,20 @@
             <a:prstDash val="solid"/>
           </a:ln>
           <a:effectLst>
-            <a:outerShdw sx="100000" sy="100000" kx="0" ky="0" algn="bl" rotWithShape="0" blurRad="101600" dist="38100" dir="8100000">
+            <a:outerShdw blurRad="101600" dist="38100" dir="8100000" algn="bl" rotWithShape="0">
               <a:srgbClr val="000000">
                 <a:alpha val="18000"/>
               </a:srgbClr>
             </a:outerShdw>
           </a:effectLst>
         </p:spPr>
+        <p:txBody>
+          <a:bodyPr/>
+          <a:lstStyle/>
+          <a:p>
+            <a:endParaRPr lang="ko-KR" altLang="en-US"/>
+          </a:p>
+        </p:txBody>
       </p:sp>
       <p:sp>
         <p:nvSpPr>
@@ -5051,7 +5134,7 @@
           <a:bodyPr wrap="square" lIns="0" tIns="0" rIns="0" bIns="0" rtlCol="0" anchor="ctr"/>
           <a:lstStyle/>
           <a:p>
-            <a:pPr algn="ctr" indent="0" marL="0">
+            <a:pPr marL="0" indent="0" algn="ctr">
               <a:buNone/>
             </a:pPr>
             <a:r>
@@ -5093,6 +5176,13 @@
             <a:prstDash val="solid"/>
           </a:ln>
         </p:spPr>
+        <p:txBody>
+          <a:bodyPr/>
+          <a:lstStyle/>
+          <a:p>
+            <a:endParaRPr lang="ko-KR" altLang="en-US"/>
+          </a:p>
+        </p:txBody>
       </p:sp>
       <p:sp>
         <p:nvSpPr>
@@ -5115,7 +5205,7 @@
           <a:bodyPr wrap="square" lIns="0" tIns="0" rIns="0" bIns="0" rtlCol="0" anchor="ctr"/>
           <a:lstStyle/>
           <a:p>
-            <a:pPr indent="0" marL="0">
+            <a:pPr marL="0" indent="0">
               <a:buNone/>
             </a:pPr>
             <a:r>
@@ -5154,7 +5244,7 @@
           <a:bodyPr wrap="square" lIns="0" tIns="0" rIns="0" bIns="0" rtlCol="0" anchor="ctr"/>
           <a:lstStyle/>
           <a:p>
-            <a:pPr indent="0" marL="0">
+            <a:pPr marL="0" indent="0">
               <a:buNone/>
             </a:pPr>
             <a:r>
@@ -5196,13 +5286,20 @@
             <a:prstDash val="solid"/>
           </a:ln>
           <a:effectLst>
-            <a:outerShdw sx="100000" sy="100000" kx="0" ky="0" algn="bl" rotWithShape="0" blurRad="101600" dist="38100" dir="8100000">
+            <a:outerShdw blurRad="101600" dist="38100" dir="8100000" algn="bl" rotWithShape="0">
               <a:srgbClr val="000000">
                 <a:alpha val="18000"/>
               </a:srgbClr>
             </a:outerShdw>
           </a:effectLst>
         </p:spPr>
+        <p:txBody>
+          <a:bodyPr/>
+          <a:lstStyle/>
+          <a:p>
+            <a:endParaRPr lang="ko-KR" altLang="en-US"/>
+          </a:p>
+        </p:txBody>
       </p:sp>
       <p:sp>
         <p:nvSpPr>
@@ -5225,7 +5322,7 @@
           <a:bodyPr wrap="square" lIns="0" tIns="0" rIns="0" bIns="0" rtlCol="0" anchor="ctr"/>
           <a:lstStyle/>
           <a:p>
-            <a:pPr algn="ctr" indent="0" marL="0">
+            <a:pPr marL="0" indent="0" algn="ctr">
               <a:buNone/>
             </a:pPr>
             <a:r>
@@ -5267,6 +5364,13 @@
             <a:prstDash val="solid"/>
           </a:ln>
         </p:spPr>
+        <p:txBody>
+          <a:bodyPr/>
+          <a:lstStyle/>
+          <a:p>
+            <a:endParaRPr lang="ko-KR" altLang="en-US"/>
+          </a:p>
+        </p:txBody>
       </p:sp>
       <p:sp>
         <p:nvSpPr>
@@ -5289,7 +5393,7 @@
           <a:bodyPr wrap="square" lIns="0" tIns="0" rIns="0" bIns="0" rtlCol="0" anchor="ctr"/>
           <a:lstStyle/>
           <a:p>
-            <a:pPr indent="0" marL="0">
+            <a:pPr marL="0" indent="0">
               <a:buNone/>
             </a:pPr>
             <a:r>
@@ -5328,7 +5432,7 @@
           <a:bodyPr wrap="square" lIns="0" tIns="0" rIns="0" bIns="0" rtlCol="0" anchor="ctr"/>
           <a:lstStyle/>
           <a:p>
-            <a:pPr indent="0" marL="0">
+            <a:pPr marL="0" indent="0">
               <a:buNone/>
             </a:pPr>
             <a:r>
@@ -5370,13 +5474,20 @@
             <a:prstDash val="solid"/>
           </a:ln>
           <a:effectLst>
-            <a:outerShdw sx="100000" sy="100000" kx="0" ky="0" algn="bl" rotWithShape="0" blurRad="101600" dist="38100" dir="8100000">
+            <a:outerShdw blurRad="101600" dist="38100" dir="8100000" algn="bl" rotWithShape="0">
               <a:srgbClr val="000000">
                 <a:alpha val="18000"/>
               </a:srgbClr>
             </a:outerShdw>
           </a:effectLst>
         </p:spPr>
+        <p:txBody>
+          <a:bodyPr/>
+          <a:lstStyle/>
+          <a:p>
+            <a:endParaRPr lang="ko-KR" altLang="en-US"/>
+          </a:p>
+        </p:txBody>
       </p:sp>
       <p:sp>
         <p:nvSpPr>
@@ -5399,7 +5510,7 @@
           <a:bodyPr wrap="square" lIns="0" tIns="0" rIns="0" bIns="0" rtlCol="0" anchor="ctr"/>
           <a:lstStyle/>
           <a:p>
-            <a:pPr algn="ctr" indent="0" marL="0">
+            <a:pPr marL="0" indent="0" algn="ctr">
               <a:buNone/>
             </a:pPr>
             <a:r>
@@ -5441,6 +5552,13 @@
             <a:prstDash val="solid"/>
           </a:ln>
         </p:spPr>
+        <p:txBody>
+          <a:bodyPr/>
+          <a:lstStyle/>
+          <a:p>
+            <a:endParaRPr lang="ko-KR" altLang="en-US"/>
+          </a:p>
+        </p:txBody>
       </p:sp>
       <p:sp>
         <p:nvSpPr>
@@ -5463,7 +5581,7 @@
           <a:bodyPr wrap="square" lIns="0" tIns="0" rIns="0" bIns="0" rtlCol="0" anchor="ctr"/>
           <a:lstStyle/>
           <a:p>
-            <a:pPr indent="0" marL="0">
+            <a:pPr marL="0" indent="0">
               <a:buNone/>
             </a:pPr>
             <a:r>
@@ -5502,7 +5620,7 @@
           <a:bodyPr wrap="square" lIns="0" tIns="0" rIns="0" bIns="0" rtlCol="0" anchor="ctr"/>
           <a:lstStyle/>
           <a:p>
-            <a:pPr indent="0" marL="0">
+            <a:pPr marL="0" indent="0">
               <a:buNone/>
             </a:pPr>
             <a:r>
@@ -5544,13 +5662,20 @@
             <a:prstDash val="solid"/>
           </a:ln>
           <a:effectLst>
-            <a:outerShdw sx="100000" sy="100000" kx="0" ky="0" algn="bl" rotWithShape="0" blurRad="101600" dist="38100" dir="8100000">
+            <a:outerShdw blurRad="101600" dist="38100" dir="8100000" algn="bl" rotWithShape="0">
               <a:srgbClr val="000000">
                 <a:alpha val="18000"/>
               </a:srgbClr>
             </a:outerShdw>
           </a:effectLst>
         </p:spPr>
+        <p:txBody>
+          <a:bodyPr/>
+          <a:lstStyle/>
+          <a:p>
+            <a:endParaRPr lang="ko-KR" altLang="en-US"/>
+          </a:p>
+        </p:txBody>
       </p:sp>
       <p:sp>
         <p:nvSpPr>
@@ -5573,7 +5698,7 @@
           <a:bodyPr wrap="square" lIns="0" tIns="0" rIns="0" bIns="0" rtlCol="0" anchor="ctr"/>
           <a:lstStyle/>
           <a:p>
-            <a:pPr algn="ctr" indent="0" marL="0">
+            <a:pPr marL="0" indent="0" algn="ctr">
               <a:buNone/>
             </a:pPr>
             <a:r>
@@ -5615,6 +5740,13 @@
             <a:prstDash val="solid"/>
           </a:ln>
         </p:spPr>
+        <p:txBody>
+          <a:bodyPr/>
+          <a:lstStyle/>
+          <a:p>
+            <a:endParaRPr lang="ko-KR" altLang="en-US"/>
+          </a:p>
+        </p:txBody>
       </p:sp>
       <p:sp>
         <p:nvSpPr>
@@ -5637,7 +5769,7 @@
           <a:bodyPr wrap="square" lIns="0" tIns="0" rIns="0" bIns="0" rtlCol="0" anchor="ctr"/>
           <a:lstStyle/>
           <a:p>
-            <a:pPr indent="0" marL="0">
+            <a:pPr marL="0" indent="0">
               <a:buNone/>
             </a:pPr>
             <a:r>
@@ -5676,7 +5808,7 @@
           <a:bodyPr wrap="square" lIns="0" tIns="0" rIns="0" bIns="0" rtlCol="0" anchor="ctr"/>
           <a:lstStyle/>
           <a:p>
-            <a:pPr indent="0" marL="0">
+            <a:pPr marL="0" indent="0">
               <a:buNone/>
             </a:pPr>
             <a:r>
@@ -5718,13 +5850,20 @@
             <a:prstDash val="solid"/>
           </a:ln>
           <a:effectLst>
-            <a:outerShdw sx="100000" sy="100000" kx="0" ky="0" algn="bl" rotWithShape="0" blurRad="101600" dist="38100" dir="8100000">
+            <a:outerShdw blurRad="101600" dist="38100" dir="8100000" algn="bl" rotWithShape="0">
               <a:srgbClr val="000000">
                 <a:alpha val="18000"/>
               </a:srgbClr>
             </a:outerShdw>
           </a:effectLst>
         </p:spPr>
+        <p:txBody>
+          <a:bodyPr/>
+          <a:lstStyle/>
+          <a:p>
+            <a:endParaRPr lang="ko-KR" altLang="en-US"/>
+          </a:p>
+        </p:txBody>
       </p:sp>
       <p:sp>
         <p:nvSpPr>
@@ -5747,7 +5886,7 @@
           <a:bodyPr wrap="square" lIns="0" tIns="0" rIns="0" bIns="0" rtlCol="0" anchor="ctr"/>
           <a:lstStyle/>
           <a:p>
-            <a:pPr algn="ctr" indent="0" marL="0">
+            <a:pPr marL="0" indent="0" algn="ctr">
               <a:buNone/>
             </a:pPr>
             <a:r>
@@ -5789,6 +5928,13 @@
             <a:prstDash val="solid"/>
           </a:ln>
         </p:spPr>
+        <p:txBody>
+          <a:bodyPr/>
+          <a:lstStyle/>
+          <a:p>
+            <a:endParaRPr lang="ko-KR" altLang="en-US"/>
+          </a:p>
+        </p:txBody>
       </p:sp>
       <p:sp>
         <p:nvSpPr>
@@ -5811,7 +5957,7 @@
           <a:bodyPr wrap="square" lIns="0" tIns="0" rIns="0" bIns="0" rtlCol="0" anchor="ctr"/>
           <a:lstStyle/>
           <a:p>
-            <a:pPr indent="0" marL="0">
+            <a:pPr marL="0" indent="0">
               <a:buNone/>
             </a:pPr>
             <a:r>
@@ -5850,7 +5996,7 @@
           <a:bodyPr wrap="square" lIns="0" tIns="0" rIns="0" bIns="0" rtlCol="0" anchor="ctr"/>
           <a:lstStyle/>
           <a:p>
-            <a:pPr indent="0" marL="0">
+            <a:pPr marL="0" indent="0">
               <a:buNone/>
             </a:pPr>
             <a:r>
@@ -5892,13 +6038,20 @@
             <a:prstDash val="solid"/>
           </a:ln>
           <a:effectLst>
-            <a:outerShdw sx="100000" sy="100000" kx="0" ky="0" algn="bl" rotWithShape="0" blurRad="101600" dist="38100" dir="8100000">
+            <a:outerShdw blurRad="101600" dist="38100" dir="8100000" algn="bl" rotWithShape="0">
               <a:srgbClr val="000000">
                 <a:alpha val="18000"/>
               </a:srgbClr>
             </a:outerShdw>
           </a:effectLst>
         </p:spPr>
+        <p:txBody>
+          <a:bodyPr/>
+          <a:lstStyle/>
+          <a:p>
+            <a:endParaRPr lang="ko-KR" altLang="en-US"/>
+          </a:p>
+        </p:txBody>
       </p:sp>
       <p:sp>
         <p:nvSpPr>
@@ -5921,7 +6074,7 @@
           <a:bodyPr wrap="square" lIns="0" tIns="0" rIns="0" bIns="0" rtlCol="0" anchor="ctr"/>
           <a:lstStyle/>
           <a:p>
-            <a:pPr algn="ctr" indent="0" marL="0">
+            <a:pPr marL="0" indent="0" algn="ctr">
               <a:buNone/>
             </a:pPr>
             <a:r>
@@ -5963,6 +6116,13 @@
             <a:prstDash val="solid"/>
           </a:ln>
         </p:spPr>
+        <p:txBody>
+          <a:bodyPr/>
+          <a:lstStyle/>
+          <a:p>
+            <a:endParaRPr lang="ko-KR" altLang="en-US"/>
+          </a:p>
+        </p:txBody>
       </p:sp>
       <p:sp>
         <p:nvSpPr>
@@ -5985,7 +6145,7 @@
           <a:bodyPr wrap="square" lIns="0" tIns="0" rIns="0" bIns="0" rtlCol="0" anchor="ctr"/>
           <a:lstStyle/>
           <a:p>
-            <a:pPr indent="0" marL="0">
+            <a:pPr marL="0" indent="0">
               <a:buNone/>
             </a:pPr>
             <a:r>
@@ -6024,7 +6184,7 @@
           <a:bodyPr wrap="square" lIns="0" tIns="0" rIns="0" bIns="0" rtlCol="0" anchor="ctr"/>
           <a:lstStyle/>
           <a:p>
-            <a:pPr indent="0" marL="0">
+            <a:pPr marL="0" indent="0">
               <a:buNone/>
             </a:pPr>
             <a:r>
@@ -6066,13 +6226,20 @@
             <a:prstDash val="solid"/>
           </a:ln>
           <a:effectLst>
-            <a:outerShdw sx="100000" sy="100000" kx="0" ky="0" algn="bl" rotWithShape="0" blurRad="101600" dist="38100" dir="8100000">
+            <a:outerShdw blurRad="101600" dist="38100" dir="8100000" algn="bl" rotWithShape="0">
               <a:srgbClr val="000000">
                 <a:alpha val="18000"/>
               </a:srgbClr>
             </a:outerShdw>
           </a:effectLst>
         </p:spPr>
+        <p:txBody>
+          <a:bodyPr/>
+          <a:lstStyle/>
+          <a:p>
+            <a:endParaRPr lang="ko-KR" altLang="en-US"/>
+          </a:p>
+        </p:txBody>
       </p:sp>
       <p:sp>
         <p:nvSpPr>
@@ -6095,7 +6262,7 @@
           <a:bodyPr wrap="square" lIns="0" tIns="0" rIns="0" bIns="0" rtlCol="0" anchor="ctr"/>
           <a:lstStyle/>
           <a:p>
-            <a:pPr algn="ctr" indent="0" marL="0">
+            <a:pPr marL="0" indent="0" algn="ctr">
               <a:buNone/>
             </a:pPr>
             <a:r>
@@ -6137,6 +6304,13 @@
             <a:prstDash val="solid"/>
           </a:ln>
         </p:spPr>
+        <p:txBody>
+          <a:bodyPr/>
+          <a:lstStyle/>
+          <a:p>
+            <a:endParaRPr lang="ko-KR" altLang="en-US"/>
+          </a:p>
+        </p:txBody>
       </p:sp>
       <p:sp>
         <p:nvSpPr>
@@ -6159,7 +6333,7 @@
           <a:bodyPr wrap="square" lIns="0" tIns="0" rIns="0" bIns="0" rtlCol="0" anchor="ctr"/>
           <a:lstStyle/>
           <a:p>
-            <a:pPr indent="0" marL="0">
+            <a:pPr marL="0" indent="0">
               <a:buNone/>
             </a:pPr>
             <a:r>
@@ -6198,7 +6372,7 @@
           <a:bodyPr wrap="square" lIns="0" tIns="0" rIns="0" bIns="0" rtlCol="0" anchor="ctr"/>
           <a:lstStyle/>
           <a:p>
-            <a:pPr indent="0" marL="0">
+            <a:pPr marL="0" indent="0">
               <a:buNone/>
             </a:pPr>
             <a:r>
@@ -6232,6 +6406,7 @@
         <a:solidFill>
           <a:srgbClr val="F8FAFC"/>
         </a:solidFill>
+        <a:effectLst/>
       </p:bgPr>
     </p:bg>
     <p:spTree>
@@ -6272,6 +6447,13 @@
             <a:prstDash val="solid"/>
           </a:ln>
         </p:spPr>
+        <p:txBody>
+          <a:bodyPr/>
+          <a:lstStyle/>
+          <a:p>
+            <a:endParaRPr lang="ko-KR" altLang="en-US"/>
+          </a:p>
+        </p:txBody>
       </p:sp>
       <p:sp>
         <p:nvSpPr>
@@ -6294,7 +6476,7 @@
           <a:bodyPr wrap="square" lIns="0" tIns="0" rIns="0" bIns="0" rtlCol="0" anchor="ctr"/>
           <a:lstStyle/>
           <a:p>
-            <a:pPr indent="0" marL="0">
+            <a:pPr marL="0" indent="0">
               <a:buNone/>
             </a:pPr>
             <a:r>
@@ -6333,7 +6515,7 @@
           <a:bodyPr wrap="square" lIns="0" tIns="0" rIns="0" bIns="0" rtlCol="0" anchor="ctr"/>
           <a:lstStyle/>
           <a:p>
-            <a:pPr indent="0" marL="0">
+            <a:pPr marL="0" indent="0">
               <a:buNone/>
             </a:pPr>
             <a:r>
@@ -6375,13 +6557,20 @@
             <a:prstDash val="solid"/>
           </a:ln>
           <a:effectLst>
-            <a:outerShdw sx="100000" sy="100000" kx="0" ky="0" algn="bl" rotWithShape="0" blurRad="101600" dist="38100" dir="8100000">
+            <a:outerShdw blurRad="101600" dist="38100" dir="8100000" algn="bl" rotWithShape="0">
               <a:srgbClr val="000000">
                 <a:alpha val="18000"/>
               </a:srgbClr>
             </a:outerShdw>
           </a:effectLst>
         </p:spPr>
+        <p:txBody>
+          <a:bodyPr/>
+          <a:lstStyle/>
+          <a:p>
+            <a:endParaRPr lang="ko-KR" altLang="en-US"/>
+          </a:p>
+        </p:txBody>
       </p:sp>
       <p:sp>
         <p:nvSpPr>
@@ -6407,6 +6596,13 @@
             <a:prstDash val="solid"/>
           </a:ln>
         </p:spPr>
+        <p:txBody>
+          <a:bodyPr/>
+          <a:lstStyle/>
+          <a:p>
+            <a:endParaRPr lang="ko-KR" altLang="en-US"/>
+          </a:p>
+        </p:txBody>
       </p:sp>
       <p:sp>
         <p:nvSpPr>
@@ -6429,7 +6625,7 @@
           <a:bodyPr wrap="square" lIns="0" tIns="0" rIns="0" bIns="0" rtlCol="0" anchor="ctr"/>
           <a:lstStyle/>
           <a:p>
-            <a:pPr indent="0" marL="0">
+            <a:pPr marL="0" indent="0">
               <a:buNone/>
             </a:pPr>
             <a:r>
@@ -6468,7 +6664,7 @@
           <a:bodyPr wrap="square" lIns="0" tIns="0" rIns="0" bIns="0" rtlCol="0" anchor="t"/>
           <a:lstStyle/>
           <a:p>
-            <a:pPr indent="0" marL="0">
+            <a:pPr marL="0" indent="0">
               <a:buNone/>
             </a:pPr>
             <a:r>
@@ -6480,11 +6676,30 @@
                 <a:ea typeface="Calibri" pitchFamily="34" charset="-122"/>
                 <a:cs typeface="Calibri" pitchFamily="34" charset="-120"/>
               </a:rPr>
-              <a:t>계명대학교 행소박물관</a:t>
-            </a:r>
-            <a:pPr indent="0" marL="0">
-              <a:buNone/>
-            </a:pPr>
+              <a:t>계명대학교 </a:t>
+            </a:r>
+            <a:r>
+              <a:rPr lang="en-US" sz="1150" b="1" dirty="0" err="1">
+                <a:solidFill>
+                  <a:srgbClr val="0D9488"/>
+                </a:solidFill>
+                <a:latin typeface="Calibri" pitchFamily="34" charset="0"/>
+                <a:ea typeface="Calibri" pitchFamily="34" charset="-122"/>
+                <a:cs typeface="Calibri" pitchFamily="34" charset="-120"/>
+              </a:rPr>
+              <a:t>행소박물관</a:t>
+            </a:r>
+            <a:r>
+              <a:rPr lang="en-US" sz="1150" dirty="0" err="1">
+                <a:solidFill>
+                  <a:srgbClr val="0F172A"/>
+                </a:solidFill>
+                <a:latin typeface="Calibri" pitchFamily="34" charset="0"/>
+                <a:ea typeface="Calibri" pitchFamily="34" charset="-122"/>
+                <a:cs typeface="Calibri" pitchFamily="34" charset="-120"/>
+              </a:rPr>
+              <a:t>의</a:t>
+            </a:r>
             <a:r>
               <a:rPr lang="en-US" sz="1150" dirty="0">
                 <a:solidFill>
@@ -6494,12 +6709,31 @@
                 <a:ea typeface="Calibri" pitchFamily="34" charset="-122"/>
                 <a:cs typeface="Calibri" pitchFamily="34" charset="-120"/>
               </a:rPr>
-              <a:t>의 실제 소장 유물을 게임 소재로 활용
+              <a:t> </a:t>
+            </a:r>
+            <a:r>
+              <a:rPr lang="en-US" sz="1150" dirty="0" err="1">
+                <a:solidFill>
+                  <a:srgbClr val="0F172A"/>
+                </a:solidFill>
+                <a:latin typeface="Calibri" pitchFamily="34" charset="0"/>
+                <a:ea typeface="Calibri" pitchFamily="34" charset="-122"/>
+                <a:cs typeface="Calibri" pitchFamily="34" charset="-120"/>
+              </a:rPr>
+              <a:t>소장</a:t>
+            </a:r>
+            <a:r>
+              <a:rPr lang="en-US" sz="1150" dirty="0">
+                <a:solidFill>
+                  <a:srgbClr val="0F172A"/>
+                </a:solidFill>
+                <a:latin typeface="Calibri" pitchFamily="34" charset="0"/>
+                <a:ea typeface="Calibri" pitchFamily="34" charset="-122"/>
+                <a:cs typeface="Calibri" pitchFamily="34" charset="-120"/>
+              </a:rPr>
+              <a:t> 유물을 게임 소재로 활용
 </a:t>
             </a:r>
-            <a:pPr indent="0" marL="0">
-              <a:buNone/>
-            </a:pPr>
             <a:r>
               <a:rPr lang="en-US" sz="1150" b="1" dirty="0">
                 <a:solidFill>
@@ -6511,9 +6745,6 @@
               </a:rPr>
               <a:t>유물 3종</a:t>
             </a:r>
-            <a:pPr indent="0" marL="0">
-              <a:buNone/>
-            </a:pPr>
             <a:r>
               <a:rPr lang="en-US" sz="1150" dirty="0">
                 <a:solidFill>
@@ -6526,9 +6757,6 @@
               <a:t>  청동검 · 금동관 · 노리개
 </a:t>
             </a:r>
-            <a:pPr indent="0" marL="0">
-              <a:buNone/>
-            </a:pPr>
             <a:r>
               <a:rPr lang="en-US" sz="1150" b="1" dirty="0">
                 <a:solidFill>
@@ -6540,9 +6768,6 @@
               </a:rPr>
               <a:t>교육적 효과</a:t>
             </a:r>
-            <a:pPr indent="0" marL="0">
-              <a:buNone/>
-            </a:pPr>
             <a:r>
               <a:rPr lang="en-US" sz="1150" dirty="0">
                 <a:solidFill>
@@ -6556,9 +6781,6 @@
 역사적·문화적 정보 자연스럽게 습득
 </a:t>
             </a:r>
-            <a:pPr indent="0" marL="0">
-              <a:buNone/>
-            </a:pPr>
             <a:r>
               <a:rPr lang="en-US" sz="1150" b="1" dirty="0">
                 <a:solidFill>
@@ -6570,13 +6792,10 @@
               </a:rPr>
               <a:t>유물 획득 → 고유 능력 해금</a:t>
             </a:r>
-            <a:pPr indent="0" marL="0">
-              <a:buNone/>
-            </a:pPr>
             <a:endParaRPr lang="en-US" sz="1150" dirty="0"/>
           </a:p>
           <a:p>
-            <a:pPr indent="0" marL="0">
+            <a:pPr marL="0" indent="0">
               <a:buNone/>
             </a:pPr>
             <a:r>
@@ -6618,13 +6837,20 @@
             <a:prstDash val="solid"/>
           </a:ln>
           <a:effectLst>
-            <a:outerShdw sx="100000" sy="100000" kx="0" ky="0" algn="bl" rotWithShape="0" blurRad="101600" dist="38100" dir="8100000">
+            <a:outerShdw blurRad="101600" dist="38100" dir="8100000" algn="bl" rotWithShape="0">
               <a:srgbClr val="000000">
                 <a:alpha val="18000"/>
               </a:srgbClr>
             </a:outerShdw>
           </a:effectLst>
         </p:spPr>
+        <p:txBody>
+          <a:bodyPr/>
+          <a:lstStyle/>
+          <a:p>
+            <a:endParaRPr lang="ko-KR" altLang="en-US"/>
+          </a:p>
+        </p:txBody>
       </p:sp>
       <p:sp>
         <p:nvSpPr>
@@ -6650,6 +6876,13 @@
             <a:prstDash val="solid"/>
           </a:ln>
         </p:spPr>
+        <p:txBody>
+          <a:bodyPr/>
+          <a:lstStyle/>
+          <a:p>
+            <a:endParaRPr lang="ko-KR" altLang="en-US"/>
+          </a:p>
+        </p:txBody>
       </p:sp>
       <p:sp>
         <p:nvSpPr>
@@ -6672,7 +6905,7 @@
           <a:bodyPr wrap="square" lIns="0" tIns="0" rIns="0" bIns="0" rtlCol="0" anchor="ctr"/>
           <a:lstStyle/>
           <a:p>
-            <a:pPr indent="0" marL="0">
+            <a:pPr marL="0" indent="0">
               <a:buNone/>
             </a:pPr>
             <a:r>
@@ -6692,29 +6925,41 @@
       </p:sp>
       <p:graphicFrame>
         <p:nvGraphicFramePr>
-          <p:cNvPr id="4" name="Table 0"/>
+          <p:cNvPr id="12" name="Table 0"/>
           <p:cNvGraphicFramePr>
             <a:graphicFrameLocks noGrp="1"/>
           </p:cNvGraphicFramePr>
           <p:nvPr>
             <p:extLst>
               <p:ext uri="{D42A27DB-BD31-4B8C-83A1-F6EECF244321}">
-                <p14:modId xmlns:p14="http://schemas.microsoft.com/office/powerpoint/2010/main" val="1579011935"/>
+                <p14:modId xmlns:p14="http://schemas.microsoft.com/office/powerpoint/2010/main" val="3986585866"/>
               </p:ext>
             </p:extLst>
           </p:nvPr>
         </p:nvGraphicFramePr>
         <p:xfrm>
           <a:off x="4800600" y="1536192"/>
-          <a:ext cx="3931920" cy="2834640"/>
+          <a:ext cx="3931920" cy="2584135"/>
         </p:xfrm>
         <a:graphic>
           <a:graphicData uri="http://schemas.openxmlformats.org/drawingml/2006/table">
             <a:tbl>
               <a:tblPr/>
               <a:tblGrid>
-                <a:gridCol w="1371600"/>
-                <a:gridCol w="2560320"/>
+                <a:gridCol w="1371600">
+                  <a:extLst>
+                    <a:ext uri="{9D8B030D-6E8A-4147-A177-3AD203B41FA5}">
+                      <a16:colId xmlns:a16="http://schemas.microsoft.com/office/drawing/2014/main" val="20000"/>
+                    </a:ext>
+                  </a:extLst>
+                </a:gridCol>
+                <a:gridCol w="2560320">
+                  <a:extLst>
+                    <a:ext uri="{9D8B030D-6E8A-4147-A177-3AD203B41FA5}">
+                      <a16:colId xmlns:a16="http://schemas.microsoft.com/office/drawing/2014/main" val="20001"/>
+                    </a:ext>
+                  </a:extLst>
+                </a:gridCol>
               </a:tblGrid>
               <a:tr h="502920">
                 <a:tc>
@@ -6722,7 +6967,7 @@
                     <a:bodyPr/>
                     <a:lstStyle/>
                     <a:p>
-                      <a:pPr algn="l" indent="0" marL="0">
+                      <a:pPr marL="0" indent="0" algn="l">
                         <a:buNone/>
                       </a:pPr>
                       <a:r>
@@ -6743,7 +6988,7 @@
                       </a:endParaRPr>
                     </a:p>
                   </a:txBody>
-                  <a:tcPr marL="91440" marR="91440" marT="45720" marB="45720" anchor="ctr">
+                  <a:tcPr anchor="ctr">
                     <a:lnL w="6350" cap="flat" cmpd="sng" algn="ctr">
                       <a:solidFill>
                         <a:srgbClr val="E2E8F0"/>
@@ -6790,7 +7035,7 @@
                     <a:bodyPr/>
                     <a:lstStyle/>
                     <a:p>
-                      <a:pPr algn="l" indent="0" marL="0">
+                      <a:pPr marL="0" indent="0" algn="l">
                         <a:buNone/>
                       </a:pPr>
                       <a:r>
@@ -6811,7 +7056,7 @@
                       </a:endParaRPr>
                     </a:p>
                   </a:txBody>
-                  <a:tcPr marL="91440" marR="91440" marT="45720" marB="45720" anchor="ctr">
+                  <a:tcPr anchor="ctr">
                     <a:lnL w="6350" cap="flat" cmpd="sng" algn="ctr">
                       <a:solidFill>
                         <a:srgbClr val="E2E8F0"/>
@@ -6853,18 +7098,23 @@
                     </a:solidFill>
                   </a:tcPr>
                 </a:tc>
+                <a:extLst>
+                  <a:ext uri="{0D108BD9-81ED-4DB2-BD59-A6C34878D82A}">
+                    <a16:rowId xmlns:a16="http://schemas.microsoft.com/office/drawing/2014/main" val="10000"/>
+                  </a:ext>
+                </a:extLst>
               </a:tr>
-              <a:tr h="502920">
+              <a:tr h="1005840">
                 <a:tc>
                   <a:txBody>
                     <a:bodyPr/>
                     <a:lstStyle/>
                     <a:p>
-                      <a:pPr algn="l" indent="0" marL="0">
+                      <a:pPr marL="0" indent="0" algn="l">
                         <a:buNone/>
                       </a:pPr>
                       <a:r>
-                        <a:rPr lang="en-US" sz="1000" dirty="0">
+                        <a:rPr lang="en-US" sz="1600" dirty="0" err="1">
                           <a:solidFill>
                             <a:srgbClr val="000000"/>
                           </a:solidFill>
@@ -6872,16 +7122,41 @@
                           <a:ea typeface="Calibri" pitchFamily="34" charset="-122"/>
                           <a:cs typeface="Calibri" pitchFamily="34" charset="-120"/>
                         </a:rPr>
-                        <a:t>슈퍼 마리오</a:t>
+                        <a:t>슈퍼</a:t>
                       </a:r>
-                      <a:endParaRPr lang="en-US" sz="1000" dirty="0">
-                        <a:latin typeface="Calibri" charset="0"/>
-                        <a:ea typeface="Calibri" charset="0"/>
-                        <a:cs typeface="Calibri" charset="0"/>
+                      <a:r>
+                        <a:rPr lang="en-US" sz="1600" dirty="0">
+                          <a:solidFill>
+                            <a:srgbClr val="000000"/>
+                          </a:solidFill>
+                          <a:latin typeface="Calibri" pitchFamily="34" charset="0"/>
+                          <a:ea typeface="Calibri" pitchFamily="34" charset="-122"/>
+                          <a:cs typeface="Calibri" pitchFamily="34" charset="-120"/>
+                        </a:rPr>
+                        <a:t> </a:t>
+                      </a:r>
+                      <a:r>
+                        <a:rPr lang="en-US" sz="1600" dirty="0" err="1">
+                          <a:solidFill>
+                            <a:srgbClr val="000000"/>
+                          </a:solidFill>
+                          <a:latin typeface="Calibri" pitchFamily="34" charset="0"/>
+                          <a:ea typeface="Calibri" pitchFamily="34" charset="-122"/>
+                          <a:cs typeface="Calibri" pitchFamily="34" charset="-120"/>
+                        </a:rPr>
+                        <a:t>마리오</a:t>
+                      </a:r>
+                      <a:endParaRPr lang="en-US" sz="1600" dirty="0">
+                        <a:solidFill>
+                          <a:srgbClr val="000000"/>
+                        </a:solidFill>
+                        <a:latin typeface="Calibri" pitchFamily="34" charset="0"/>
+                        <a:ea typeface="Calibri" pitchFamily="34" charset="-122"/>
+                        <a:cs typeface="Calibri" pitchFamily="34" charset="-120"/>
                       </a:endParaRPr>
                     </a:p>
                   </a:txBody>
-                  <a:tcPr marL="91440" marR="91440" marT="45720" marB="45720" anchor="ctr">
+                  <a:tcPr anchor="ctr">
                     <a:lnL w="6350" cap="flat" cmpd="sng" algn="ctr">
                       <a:solidFill>
                         <a:srgbClr val="E2E8F0"/>
@@ -6925,11 +7200,11 @@
                     <a:bodyPr/>
                     <a:lstStyle/>
                     <a:p>
-                      <a:pPr algn="l" indent="0" marL="0">
+                      <a:pPr marL="0" indent="0" algn="l">
                         <a:buNone/>
                       </a:pPr>
                       <a:r>
-                        <a:rPr lang="en-US" sz="1000" dirty="0">
+                        <a:rPr lang="en-US" sz="1400" dirty="0">
                           <a:solidFill>
                             <a:srgbClr val="000000"/>
                           </a:solidFill>
@@ -6937,16 +7212,59 @@
                           <a:ea typeface="Calibri" pitchFamily="34" charset="-122"/>
                           <a:cs typeface="Calibri" pitchFamily="34" charset="-120"/>
                         </a:rPr>
-                        <a:t>플랫포머 구조, 맵 설계, 아이템 능력</a:t>
+                        <a:t>플랫포머 구조, 맵 설계, </a:t>
                       </a:r>
-                      <a:endParaRPr lang="en-US" sz="1000" dirty="0">
+                      <a:br>
+                        <a:rPr lang="en-US" sz="1400" dirty="0">
+                          <a:solidFill>
+                            <a:srgbClr val="000000"/>
+                          </a:solidFill>
+                          <a:latin typeface="Calibri" pitchFamily="34" charset="0"/>
+                          <a:ea typeface="Calibri" pitchFamily="34" charset="-122"/>
+                          <a:cs typeface="Calibri" pitchFamily="34" charset="-120"/>
+                        </a:rPr>
+                      </a:br>
+                      <a:r>
+                        <a:rPr lang="en-US" sz="1400" dirty="0" err="1">
+                          <a:solidFill>
+                            <a:srgbClr val="000000"/>
+                          </a:solidFill>
+                          <a:latin typeface="Calibri" pitchFamily="34" charset="0"/>
+                          <a:ea typeface="Calibri" pitchFamily="34" charset="-122"/>
+                          <a:cs typeface="Calibri" pitchFamily="34" charset="-120"/>
+                        </a:rPr>
+                        <a:t>아이템</a:t>
+                      </a:r>
+                      <a:r>
+                        <a:rPr lang="en-US" sz="1400" dirty="0">
+                          <a:solidFill>
+                            <a:srgbClr val="000000"/>
+                          </a:solidFill>
+                          <a:latin typeface="Calibri" pitchFamily="34" charset="0"/>
+                          <a:ea typeface="Calibri" pitchFamily="34" charset="-122"/>
+                          <a:cs typeface="Calibri" pitchFamily="34" charset="-120"/>
+                        </a:rPr>
+                        <a:t> </a:t>
+                      </a:r>
+                      <a:r>
+                        <a:rPr lang="ko-KR" altLang="en-US" sz="1400" dirty="0">
+                          <a:solidFill>
+                            <a:srgbClr val="000000"/>
+                          </a:solidFill>
+                          <a:latin typeface="Calibri" pitchFamily="34" charset="0"/>
+                          <a:ea typeface="Calibri" pitchFamily="34" charset="-122"/>
+                          <a:cs typeface="Calibri" pitchFamily="34" charset="-120"/>
+                        </a:rPr>
+                        <a:t>획득</a:t>
+                      </a:r>
+                      <a:endParaRPr lang="en-US" sz="1400" dirty="0">
                         <a:latin typeface="Calibri" charset="0"/>
                         <a:ea typeface="Calibri" charset="0"/>
                         <a:cs typeface="Calibri" charset="0"/>
                       </a:endParaRPr>
                     </a:p>
                   </a:txBody>
-                  <a:tcPr marL="91440" marR="91440" marT="45720" marB="45720" anchor="ctr">
+                  <a:tcPr anchor="ctr">
                     <a:lnL w="6350" cap="flat" cmpd="sng" algn="ctr">
                       <a:solidFill>
                         <a:srgbClr val="E2E8F0"/>
@@ -6985,18 +7303,37 @@
                     </a:lnB>
                   </a:tcPr>
                 </a:tc>
+                <a:extLst>
+                  <a:ext uri="{0D108BD9-81ED-4DB2-BD59-A6C34878D82A}">
+                    <a16:rowId xmlns:a16="http://schemas.microsoft.com/office/drawing/2014/main" val="10001"/>
+                  </a:ext>
+                </a:extLst>
               </a:tr>
-              <a:tr h="502920">
+              <a:tr h="1075375">
                 <a:tc>
                   <a:txBody>
                     <a:bodyPr/>
                     <a:lstStyle/>
                     <a:p>
-                      <a:pPr algn="l" indent="0" marL="0">
+                      <a:pPr marL="0" marR="0" lvl="0" indent="0" algn="l" defTabSz="914400" rtl="0" eaLnBrk="1" fontAlgn="auto" latinLnBrk="0" hangingPunct="1">
+                        <a:lnSpc>
+                          <a:spcPct val="100000"/>
+                        </a:lnSpc>
+                        <a:spcBef>
+                          <a:spcPts val="0"/>
+                        </a:spcBef>
+                        <a:spcAft>
+                          <a:spcPts val="0"/>
+                        </a:spcAft>
+                        <a:buClrTx/>
+                        <a:buSzTx/>
+                        <a:buFontTx/>
                         <a:buNone/>
+                        <a:tabLst/>
+                        <a:defRPr/>
                       </a:pPr>
                       <a:r>
-                        <a:rPr lang="en-US" sz="1000" dirty="0">
+                        <a:rPr lang="en-US" altLang="ko-KR" sz="1600" dirty="0">
                           <a:solidFill>
                             <a:srgbClr val="000000"/>
                           </a:solidFill>
@@ -7006,6 +7343,16 @@
                         </a:rPr>
                         <a:t>Celeste</a:t>
                       </a:r>
+                      <a:endParaRPr lang="en-US" altLang="ko-KR" sz="1600" dirty="0">
+                        <a:latin typeface="Calibri" charset="0"/>
+                        <a:ea typeface="Calibri" charset="0"/>
+                        <a:cs typeface="Calibri" charset="0"/>
+                      </a:endParaRPr>
+                    </a:p>
+                    <a:p>
+                      <a:pPr marL="0" indent="0" algn="l">
+                        <a:buNone/>
+                      </a:pPr>
                       <a:endParaRPr lang="en-US" sz="1000" dirty="0">
                         <a:latin typeface="Calibri" charset="0"/>
                         <a:ea typeface="Calibri" charset="0"/>
@@ -7013,7 +7360,7 @@
                       </a:endParaRPr>
                     </a:p>
                   </a:txBody>
-                  <a:tcPr marL="91440" marR="91440" marT="45720" marB="45720" anchor="ctr">
+                  <a:tcPr anchor="ctr">
                     <a:lnL w="6350" cap="flat" cmpd="sng" algn="ctr">
                       <a:solidFill>
                         <a:srgbClr val="E2E8F0"/>
@@ -7057,11 +7404,25 @@
                     <a:bodyPr/>
                     <a:lstStyle/>
                     <a:p>
-                      <a:pPr algn="l" indent="0" marL="0">
+                      <a:pPr marL="0" marR="0" lvl="0" indent="0" algn="l" defTabSz="914400" rtl="0" eaLnBrk="1" fontAlgn="auto" latinLnBrk="0" hangingPunct="1">
+                        <a:lnSpc>
+                          <a:spcPct val="100000"/>
+                        </a:lnSpc>
+                        <a:spcBef>
+                          <a:spcPts val="0"/>
+                        </a:spcBef>
+                        <a:spcAft>
+                          <a:spcPts val="0"/>
+                        </a:spcAft>
+                        <a:buClrTx/>
+                        <a:buSzTx/>
+                        <a:buFontTx/>
                         <a:buNone/>
+                        <a:tabLst/>
+                        <a:defRPr/>
                       </a:pPr>
                       <a:r>
-                        <a:rPr lang="en-US" sz="1000" dirty="0">
+                        <a:rPr lang="en-US" altLang="ko-KR" sz="1400" dirty="0">
                           <a:solidFill>
                             <a:srgbClr val="000000"/>
                           </a:solidFill>
@@ -7071,6 +7432,16 @@
                         </a:rPr>
                         <a:t>Coyote Time / Jump Buffer</a:t>
                       </a:r>
+                      <a:endParaRPr lang="en-US" altLang="ko-KR" sz="1400" dirty="0">
+                        <a:latin typeface="Calibri" charset="0"/>
+                        <a:ea typeface="Calibri" charset="0"/>
+                        <a:cs typeface="Calibri" charset="0"/>
+                      </a:endParaRPr>
+                    </a:p>
+                    <a:p>
+                      <a:pPr marL="0" indent="0" algn="l">
+                        <a:buNone/>
+                      </a:pPr>
                       <a:endParaRPr lang="en-US" sz="1000" dirty="0">
                         <a:latin typeface="Calibri" charset="0"/>
                         <a:ea typeface="Calibri" charset="0"/>
@@ -7078,7 +7449,7 @@
                       </a:endParaRPr>
                     </a:p>
                   </a:txBody>
-                  <a:tcPr marL="91440" marR="91440" marT="45720" marB="45720" anchor="ctr">
+                  <a:tcPr anchor="ctr">
                     <a:lnL w="6350" cap="flat" cmpd="sng" algn="ctr">
                       <a:solidFill>
                         <a:srgbClr val="E2E8F0"/>
@@ -7117,270 +7488,11 @@
                     </a:lnB>
                   </a:tcPr>
                 </a:tc>
-              </a:tr>
-              <a:tr h="502920">
-                <a:tc>
-                  <a:txBody>
-                    <a:bodyPr/>
-                    <a:lstStyle/>
-                    <a:p>
-                      <a:pPr algn="l" indent="0" marL="0">
-                        <a:buNone/>
-                      </a:pPr>
-                      <a:r>
-                        <a:rPr lang="en-US" sz="1000" dirty="0">
-                          <a:solidFill>
-                            <a:srgbClr val="000000"/>
-                          </a:solidFill>
-                          <a:latin typeface="Calibri" pitchFamily="34" charset="0"/>
-                          <a:ea typeface="Calibri" pitchFamily="34" charset="-122"/>
-                          <a:cs typeface="Calibri" pitchFamily="34" charset="-120"/>
-                        </a:rPr>
-                        <a:t>Hollow Knight</a:t>
-                      </a:r>
-                      <a:endParaRPr lang="en-US" sz="1000" dirty="0">
-                        <a:latin typeface="Calibri" charset="0"/>
-                        <a:ea typeface="Calibri" charset="0"/>
-                        <a:cs typeface="Calibri" charset="0"/>
-                      </a:endParaRPr>
-                    </a:p>
-                  </a:txBody>
-                  <a:tcPr marL="91440" marR="91440" marT="45720" marB="45720" anchor="ctr">
-                    <a:lnL w="6350" cap="flat" cmpd="sng" algn="ctr">
-                      <a:solidFill>
-                        <a:srgbClr val="E2E8F0"/>
-                      </a:solidFill>
-                      <a:prstDash val="solid"/>
-                      <a:round/>
-                      <a:headEnd type="none" w="med" len="med"/>
-                      <a:tailEnd type="none" w="med" len="med"/>
-                    </a:lnL>
-                    <a:lnR w="6350" cap="flat" cmpd="sng" algn="ctr">
-                      <a:solidFill>
-                        <a:srgbClr val="E2E8F0"/>
-                      </a:solidFill>
-                      <a:prstDash val="solid"/>
-                      <a:round/>
-                      <a:headEnd type="none" w="med" len="med"/>
-                      <a:tailEnd type="none" w="med" len="med"/>
-                    </a:lnR>
-                    <a:lnT w="6350" cap="flat" cmpd="sng" algn="ctr">
-                      <a:solidFill>
-                        <a:srgbClr val="E2E8F0"/>
-                      </a:solidFill>
-                      <a:prstDash val="solid"/>
-                      <a:round/>
-                      <a:headEnd type="none" w="med" len="med"/>
-                      <a:tailEnd type="none" w="med" len="med"/>
-                    </a:lnT>
-                    <a:lnB w="6350" cap="flat" cmpd="sng" algn="ctr">
-                      <a:solidFill>
-                        <a:srgbClr val="E2E8F0"/>
-                      </a:solidFill>
-                      <a:prstDash val="solid"/>
-                      <a:round/>
-                      <a:headEnd type="none" w="med" len="med"/>
-                      <a:tailEnd type="none" w="med" len="med"/>
-                    </a:lnB>
-                  </a:tcPr>
-                </a:tc>
-                <a:tc>
-                  <a:txBody>
-                    <a:bodyPr/>
-                    <a:lstStyle/>
-                    <a:p>
-                      <a:pPr algn="l" indent="0" marL="0">
-                        <a:buNone/>
-                      </a:pPr>
-                      <a:r>
-                        <a:rPr lang="en-US" sz="1000" dirty="0">
-                          <a:solidFill>
-                            <a:srgbClr val="000000"/>
-                          </a:solidFill>
-                          <a:latin typeface="Calibri" pitchFamily="34" charset="0"/>
-                          <a:ea typeface="Calibri" pitchFamily="34" charset="-122"/>
-                          <a:cs typeface="Calibri" pitchFamily="34" charset="-120"/>
-                        </a:rPr>
-                        <a:t>에너미 패턴, 스테이지 분위기</a:t>
-                      </a:r>
-                      <a:endParaRPr lang="en-US" sz="1000" dirty="0">
-                        <a:latin typeface="Calibri" charset="0"/>
-                        <a:ea typeface="Calibri" charset="0"/>
-                        <a:cs typeface="Calibri" charset="0"/>
-                      </a:endParaRPr>
-                    </a:p>
-                  </a:txBody>
-                  <a:tcPr marL="91440" marR="91440" marT="45720" marB="45720" anchor="ctr">
-                    <a:lnL w="6350" cap="flat" cmpd="sng" algn="ctr">
-                      <a:solidFill>
-                        <a:srgbClr val="E2E8F0"/>
-                      </a:solidFill>
-                      <a:prstDash val="solid"/>
-                      <a:round/>
-                      <a:headEnd type="none" w="med" len="med"/>
-                      <a:tailEnd type="none" w="med" len="med"/>
-                    </a:lnL>
-                    <a:lnR w="6350" cap="flat" cmpd="sng" algn="ctr">
-                      <a:solidFill>
-                        <a:srgbClr val="E2E8F0"/>
-                      </a:solidFill>
-                      <a:prstDash val="solid"/>
-                      <a:round/>
-                      <a:headEnd type="none" w="med" len="med"/>
-                      <a:tailEnd type="none" w="med" len="med"/>
-                    </a:lnR>
-                    <a:lnT w="6350" cap="flat" cmpd="sng" algn="ctr">
-                      <a:solidFill>
-                        <a:srgbClr val="E2E8F0"/>
-                      </a:solidFill>
-                      <a:prstDash val="solid"/>
-                      <a:round/>
-                      <a:headEnd type="none" w="med" len="med"/>
-                      <a:tailEnd type="none" w="med" len="med"/>
-                    </a:lnT>
-                    <a:lnB w="6350" cap="flat" cmpd="sng" algn="ctr">
-                      <a:solidFill>
-                        <a:srgbClr val="E2E8F0"/>
-                      </a:solidFill>
-                      <a:prstDash val="solid"/>
-                      <a:round/>
-                      <a:headEnd type="none" w="med" len="med"/>
-                      <a:tailEnd type="none" w="med" len="med"/>
-                    </a:lnB>
-                  </a:tcPr>
-                </a:tc>
-              </a:tr>
-              <a:tr h="502920">
-                <a:tc>
-                  <a:txBody>
-                    <a:bodyPr/>
-                    <a:lstStyle/>
-                    <a:p>
-                      <a:pPr algn="l" indent="0" marL="0">
-                        <a:buNone/>
-                      </a:pPr>
-                      <a:r>
-                        <a:rPr lang="en-US" sz="1000" dirty="0">
-                          <a:solidFill>
-                            <a:srgbClr val="000000"/>
-                          </a:solidFill>
-                          <a:latin typeface="Calibri" pitchFamily="34" charset="0"/>
-                          <a:ea typeface="Calibri" pitchFamily="34" charset="-122"/>
-                          <a:cs typeface="Calibri" pitchFamily="34" charset="-120"/>
-                        </a:rPr>
-                        <a:t>Godot 공식 문서</a:t>
-                      </a:r>
-                      <a:endParaRPr lang="en-US" sz="1000" dirty="0">
-                        <a:latin typeface="Calibri" charset="0"/>
-                        <a:ea typeface="Calibri" charset="0"/>
-                        <a:cs typeface="Calibri" charset="0"/>
-                      </a:endParaRPr>
-                    </a:p>
-                  </a:txBody>
-                  <a:tcPr marL="91440" marR="91440" marT="45720" marB="45720" anchor="ctr">
-                    <a:lnL w="6350" cap="flat" cmpd="sng" algn="ctr">
-                      <a:solidFill>
-                        <a:srgbClr val="E2E8F0"/>
-                      </a:solidFill>
-                      <a:prstDash val="solid"/>
-                      <a:round/>
-                      <a:headEnd type="none" w="med" len="med"/>
-                      <a:tailEnd type="none" w="med" len="med"/>
-                    </a:lnL>
-                    <a:lnR w="6350" cap="flat" cmpd="sng" algn="ctr">
-                      <a:solidFill>
-                        <a:srgbClr val="E2E8F0"/>
-                      </a:solidFill>
-                      <a:prstDash val="solid"/>
-                      <a:round/>
-                      <a:headEnd type="none" w="med" len="med"/>
-                      <a:tailEnd type="none" w="med" len="med"/>
-                    </a:lnR>
-                    <a:lnT w="6350" cap="flat" cmpd="sng" algn="ctr">
-                      <a:solidFill>
-                        <a:srgbClr val="E2E8F0"/>
-                      </a:solidFill>
-                      <a:prstDash val="solid"/>
-                      <a:round/>
-                      <a:headEnd type="none" w="med" len="med"/>
-                      <a:tailEnd type="none" w="med" len="med"/>
-                    </a:lnT>
-                    <a:lnB w="6350" cap="flat" cmpd="sng" algn="ctr">
-                      <a:solidFill>
-                        <a:srgbClr val="E2E8F0"/>
-                      </a:solidFill>
-                      <a:prstDash val="solid"/>
-                      <a:round/>
-                      <a:headEnd type="none" w="med" len="med"/>
-                      <a:tailEnd type="none" w="med" len="med"/>
-                    </a:lnB>
-                  </a:tcPr>
-                </a:tc>
-                <a:tc>
-                  <a:txBody>
-                    <a:bodyPr/>
-                    <a:lstStyle/>
-                    <a:p>
-                      <a:pPr algn="l" indent="0" marL="0">
-                        <a:buNone/>
-                      </a:pPr>
-                      <a:r>
-                        <a:rPr lang="en-US" sz="1000" dirty="0">
-                          <a:solidFill>
-                            <a:srgbClr val="000000"/>
-                          </a:solidFill>
-                          <a:latin typeface="Calibri" pitchFamily="34" charset="0"/>
-                          <a:ea typeface="Calibri" pitchFamily="34" charset="-122"/>
-                          <a:cs typeface="Calibri" pitchFamily="34" charset="-120"/>
-                        </a:rPr>
-                        <a:t>CharacterBody2D, TileMap</a:t>
-                      </a:r>
-                      <a:endParaRPr lang="en-US" sz="1000" dirty="0">
-                        <a:latin typeface="Calibri" charset="0"/>
-                        <a:ea typeface="Calibri" charset="0"/>
-                        <a:cs typeface="Calibri" charset="0"/>
-                      </a:endParaRPr>
-                    </a:p>
-                  </a:txBody>
-                  <a:tcPr marL="91440" marR="91440" marT="45720" marB="45720" anchor="ctr">
-                    <a:lnL w="6350" cap="flat" cmpd="sng" algn="ctr">
-                      <a:solidFill>
-                        <a:srgbClr val="E2E8F0"/>
-                      </a:solidFill>
-                      <a:prstDash val="solid"/>
-                      <a:round/>
-                      <a:headEnd type="none" w="med" len="med"/>
-                      <a:tailEnd type="none" w="med" len="med"/>
-                    </a:lnL>
-                    <a:lnR w="6350" cap="flat" cmpd="sng" algn="ctr">
-                      <a:solidFill>
-                        <a:srgbClr val="E2E8F0"/>
-                      </a:solidFill>
-                      <a:prstDash val="solid"/>
-                      <a:round/>
-                      <a:headEnd type="none" w="med" len="med"/>
-                      <a:tailEnd type="none" w="med" len="med"/>
-                    </a:lnR>
-                    <a:lnT w="6350" cap="flat" cmpd="sng" algn="ctr">
-                      <a:solidFill>
-                        <a:srgbClr val="E2E8F0"/>
-                      </a:solidFill>
-                      <a:prstDash val="solid"/>
-                      <a:round/>
-                      <a:headEnd type="none" w="med" len="med"/>
-                      <a:tailEnd type="none" w="med" len="med"/>
-                    </a:lnT>
-                    <a:lnB w="6350" cap="flat" cmpd="sng" algn="ctr">
-                      <a:solidFill>
-                        <a:srgbClr val="E2E8F0"/>
-                      </a:solidFill>
-                      <a:prstDash val="solid"/>
-                      <a:round/>
-                      <a:headEnd type="none" w="med" len="med"/>
-                      <a:tailEnd type="none" w="med" len="med"/>
-                    </a:lnB>
-                  </a:tcPr>
-                </a:tc>
+                <a:extLst>
+                  <a:ext uri="{0D108BD9-81ED-4DB2-BD59-A6C34878D82A}">
+                    <a16:rowId xmlns:a16="http://schemas.microsoft.com/office/drawing/2014/main" val="10003"/>
+                  </a:ext>
+                </a:extLst>
               </a:tr>
             </a:tbl>
           </a:graphicData>
@@ -7402,6 +7514,7 @@
         <a:solidFill>
           <a:srgbClr val="1A2B4A"/>
         </a:solidFill>
+        <a:effectLst/>
       </p:bgPr>
     </p:bg>
     <p:spTree>
@@ -7442,6 +7555,13 @@
             <a:prstDash val="solid"/>
           </a:ln>
         </p:spPr>
+        <p:txBody>
+          <a:bodyPr/>
+          <a:lstStyle/>
+          <a:p>
+            <a:endParaRPr lang="ko-KR" altLang="en-US"/>
+          </a:p>
+        </p:txBody>
       </p:sp>
       <p:sp>
         <p:nvSpPr>
@@ -7464,7 +7584,7 @@
           <a:bodyPr wrap="square" lIns="0" tIns="0" rIns="0" bIns="0" rtlCol="0" anchor="ctr"/>
           <a:lstStyle/>
           <a:p>
-            <a:pPr indent="0" marL="0">
+            <a:pPr marL="0" indent="0">
               <a:buNone/>
             </a:pPr>
             <a:r>
@@ -7503,7 +7623,7 @@
           <a:bodyPr wrap="square" lIns="0" tIns="0" rIns="0" bIns="0" rtlCol="0" anchor="ctr"/>
           <a:lstStyle/>
           <a:p>
-            <a:pPr indent="0" marL="0">
+            <a:pPr marL="0" indent="0">
               <a:buNone/>
             </a:pPr>
             <a:r>
@@ -7545,13 +7665,20 @@
             <a:prstDash val="solid"/>
           </a:ln>
           <a:effectLst>
-            <a:outerShdw sx="100000" sy="100000" kx="0" ky="0" algn="bl" rotWithShape="0" blurRad="101600" dist="38100" dir="8100000">
+            <a:outerShdw blurRad="101600" dist="38100" dir="8100000" algn="bl" rotWithShape="0">
               <a:srgbClr val="000000">
                 <a:alpha val="18000"/>
               </a:srgbClr>
             </a:outerShdw>
           </a:effectLst>
         </p:spPr>
+        <p:txBody>
+          <a:bodyPr/>
+          <a:lstStyle/>
+          <a:p>
+            <a:endParaRPr lang="ko-KR" altLang="en-US"/>
+          </a:p>
+        </p:txBody>
       </p:sp>
       <p:sp>
         <p:nvSpPr>
@@ -7577,6 +7704,13 @@
             <a:prstDash val="solid"/>
           </a:ln>
         </p:spPr>
+        <p:txBody>
+          <a:bodyPr/>
+          <a:lstStyle/>
+          <a:p>
+            <a:endParaRPr lang="ko-KR" altLang="en-US"/>
+          </a:p>
+        </p:txBody>
       </p:sp>
       <p:sp>
         <p:nvSpPr>
@@ -7599,7 +7733,7 @@
           <a:bodyPr wrap="square" lIns="0" tIns="0" rIns="0" bIns="0" rtlCol="0" anchor="ctr"/>
           <a:lstStyle/>
           <a:p>
-            <a:pPr indent="0" marL="0">
+            <a:pPr marL="0" indent="0">
               <a:buNone/>
             </a:pPr>
             <a:r>
@@ -7638,7 +7772,7 @@
           <a:bodyPr wrap="square" lIns="0" tIns="0" rIns="0" bIns="0" rtlCol="0" anchor="t"/>
           <a:lstStyle/>
           <a:p>
-            <a:pPr indent="0" marL="0">
+            <a:pPr marL="0" indent="0">
               <a:buNone/>
             </a:pPr>
             <a:r>
@@ -7680,13 +7814,20 @@
             <a:prstDash val="solid"/>
           </a:ln>
           <a:effectLst>
-            <a:outerShdw sx="100000" sy="100000" kx="0" ky="0" algn="bl" rotWithShape="0" blurRad="101600" dist="38100" dir="8100000">
+            <a:outerShdw blurRad="101600" dist="38100" dir="8100000" algn="bl" rotWithShape="0">
               <a:srgbClr val="000000">
                 <a:alpha val="18000"/>
               </a:srgbClr>
             </a:outerShdw>
           </a:effectLst>
         </p:spPr>
+        <p:txBody>
+          <a:bodyPr/>
+          <a:lstStyle/>
+          <a:p>
+            <a:endParaRPr lang="ko-KR" altLang="en-US"/>
+          </a:p>
+        </p:txBody>
       </p:sp>
       <p:sp>
         <p:nvSpPr>
@@ -7709,7 +7850,7 @@
           <a:bodyPr wrap="square" lIns="0" tIns="0" rIns="0" bIns="0" rtlCol="0" anchor="ctr"/>
           <a:lstStyle/>
           <a:p>
-            <a:pPr algn="ctr" indent="0" marL="0">
+            <a:pPr marL="0" indent="0" algn="ctr">
               <a:buNone/>
             </a:pPr>
             <a:r>
@@ -7748,7 +7889,7 @@
           <a:bodyPr wrap="square" lIns="0" tIns="0" rIns="0" bIns="0" rtlCol="0" anchor="ctr"/>
           <a:lstStyle/>
           <a:p>
-            <a:pPr algn="ctr" indent="0" marL="0">
+            <a:pPr marL="0" indent="0" algn="ctr">
               <a:buNone/>
             </a:pPr>
             <a:r>
@@ -7788,6 +7929,13 @@
             <a:prstDash val="solid"/>
           </a:ln>
         </p:spPr>
+        <p:txBody>
+          <a:bodyPr/>
+          <a:lstStyle/>
+          <a:p>
+            <a:endParaRPr lang="ko-KR" altLang="en-US"/>
+          </a:p>
+        </p:txBody>
       </p:sp>
       <p:sp>
         <p:nvSpPr>
@@ -7810,7 +7958,7 @@
           <a:bodyPr wrap="square" lIns="0" tIns="0" rIns="0" bIns="0" rtlCol="0" anchor="ctr"/>
           <a:lstStyle/>
           <a:p>
-            <a:pPr algn="ctr" indent="0" marL="0">
+            <a:pPr marL="0" indent="0" algn="ctr">
               <a:buNone/>
             </a:pPr>
             <a:r>
@@ -7852,13 +8000,20 @@
             <a:prstDash val="solid"/>
           </a:ln>
           <a:effectLst>
-            <a:outerShdw sx="100000" sy="100000" kx="0" ky="0" algn="bl" rotWithShape="0" blurRad="101600" dist="38100" dir="8100000">
+            <a:outerShdw blurRad="101600" dist="38100" dir="8100000" algn="bl" rotWithShape="0">
               <a:srgbClr val="000000">
                 <a:alpha val="18000"/>
               </a:srgbClr>
             </a:outerShdw>
           </a:effectLst>
         </p:spPr>
+        <p:txBody>
+          <a:bodyPr/>
+          <a:lstStyle/>
+          <a:p>
+            <a:endParaRPr lang="ko-KR" altLang="en-US"/>
+          </a:p>
+        </p:txBody>
       </p:sp>
       <p:sp>
         <p:nvSpPr>
@@ -7881,7 +8036,7 @@
           <a:bodyPr wrap="square" lIns="0" tIns="0" rIns="0" bIns="0" rtlCol="0" anchor="ctr"/>
           <a:lstStyle/>
           <a:p>
-            <a:pPr algn="ctr" indent="0" marL="0">
+            <a:pPr marL="0" indent="0" algn="ctr">
               <a:buNone/>
             </a:pPr>
             <a:r>
@@ -7920,7 +8075,7 @@
           <a:bodyPr wrap="square" lIns="0" tIns="0" rIns="0" bIns="0" rtlCol="0" anchor="ctr"/>
           <a:lstStyle/>
           <a:p>
-            <a:pPr algn="ctr" indent="0" marL="0">
+            <a:pPr marL="0" indent="0" algn="ctr">
               <a:buNone/>
             </a:pPr>
             <a:r>
@@ -7960,6 +8115,13 @@
             <a:prstDash val="solid"/>
           </a:ln>
         </p:spPr>
+        <p:txBody>
+          <a:bodyPr/>
+          <a:lstStyle/>
+          <a:p>
+            <a:endParaRPr lang="ko-KR" altLang="en-US"/>
+          </a:p>
+        </p:txBody>
       </p:sp>
       <p:sp>
         <p:nvSpPr>
@@ -7982,7 +8144,7 @@
           <a:bodyPr wrap="square" lIns="0" tIns="0" rIns="0" bIns="0" rtlCol="0" anchor="ctr"/>
           <a:lstStyle/>
           <a:p>
-            <a:pPr algn="ctr" indent="0" marL="0">
+            <a:pPr marL="0" indent="0" algn="ctr">
               <a:buNone/>
             </a:pPr>
             <a:r>
@@ -8024,13 +8186,20 @@
             <a:prstDash val="solid"/>
           </a:ln>
           <a:effectLst>
-            <a:outerShdw sx="100000" sy="100000" kx="0" ky="0" algn="bl" rotWithShape="0" blurRad="101600" dist="38100" dir="8100000">
+            <a:outerShdw blurRad="101600" dist="38100" dir="8100000" algn="bl" rotWithShape="0">
               <a:srgbClr val="000000">
                 <a:alpha val="18000"/>
               </a:srgbClr>
             </a:outerShdw>
           </a:effectLst>
         </p:spPr>
+        <p:txBody>
+          <a:bodyPr/>
+          <a:lstStyle/>
+          <a:p>
+            <a:endParaRPr lang="ko-KR" altLang="en-US"/>
+          </a:p>
+        </p:txBody>
       </p:sp>
       <p:sp>
         <p:nvSpPr>
@@ -8053,7 +8222,7 @@
           <a:bodyPr wrap="square" lIns="0" tIns="0" rIns="0" bIns="0" rtlCol="0" anchor="ctr"/>
           <a:lstStyle/>
           <a:p>
-            <a:pPr algn="ctr" indent="0" marL="0">
+            <a:pPr marL="0" indent="0" algn="ctr">
               <a:buNone/>
             </a:pPr>
             <a:r>
@@ -8092,7 +8261,7 @@
           <a:bodyPr wrap="square" lIns="0" tIns="0" rIns="0" bIns="0" rtlCol="0" anchor="ctr"/>
           <a:lstStyle/>
           <a:p>
-            <a:pPr algn="ctr" indent="0" marL="0">
+            <a:pPr marL="0" indent="0" algn="ctr">
               <a:buNone/>
             </a:pPr>
             <a:r>
@@ -8132,6 +8301,13 @@
             <a:prstDash val="solid"/>
           </a:ln>
         </p:spPr>
+        <p:txBody>
+          <a:bodyPr/>
+          <a:lstStyle/>
+          <a:p>
+            <a:endParaRPr lang="ko-KR" altLang="en-US"/>
+          </a:p>
+        </p:txBody>
       </p:sp>
       <p:sp>
         <p:nvSpPr>
@@ -8154,7 +8330,7 @@
           <a:bodyPr wrap="square" lIns="0" tIns="0" rIns="0" bIns="0" rtlCol="0" anchor="ctr"/>
           <a:lstStyle/>
           <a:p>
-            <a:pPr algn="ctr" indent="0" marL="0">
+            <a:pPr marL="0" indent="0" algn="ctr">
               <a:buNone/>
             </a:pPr>
             <a:r>
@@ -8196,13 +8372,20 @@
             <a:prstDash val="solid"/>
           </a:ln>
           <a:effectLst>
-            <a:outerShdw sx="100000" sy="100000" kx="0" ky="0" algn="bl" rotWithShape="0" blurRad="101600" dist="38100" dir="8100000">
+            <a:outerShdw blurRad="101600" dist="38100" dir="8100000" algn="bl" rotWithShape="0">
               <a:srgbClr val="000000">
                 <a:alpha val="18000"/>
               </a:srgbClr>
             </a:outerShdw>
           </a:effectLst>
         </p:spPr>
+        <p:txBody>
+          <a:bodyPr/>
+          <a:lstStyle/>
+          <a:p>
+            <a:endParaRPr lang="ko-KR" altLang="en-US"/>
+          </a:p>
+        </p:txBody>
       </p:sp>
       <p:sp>
         <p:nvSpPr>
@@ -8225,7 +8408,7 @@
           <a:bodyPr wrap="square" lIns="0" tIns="0" rIns="0" bIns="0" rtlCol="0" anchor="ctr"/>
           <a:lstStyle/>
           <a:p>
-            <a:pPr algn="ctr" indent="0" marL="0">
+            <a:pPr marL="0" indent="0" algn="ctr">
               <a:buNone/>
             </a:pPr>
             <a:r>
@@ -8264,7 +8447,7 @@
           <a:bodyPr wrap="square" lIns="0" tIns="0" rIns="0" bIns="0" rtlCol="0" anchor="ctr"/>
           <a:lstStyle/>
           <a:p>
-            <a:pPr algn="ctr" indent="0" marL="0">
+            <a:pPr marL="0" indent="0" algn="ctr">
               <a:buNone/>
             </a:pPr>
             <a:r>
@@ -8304,6 +8487,13 @@
             <a:prstDash val="solid"/>
           </a:ln>
         </p:spPr>
+        <p:txBody>
+          <a:bodyPr/>
+          <a:lstStyle/>
+          <a:p>
+            <a:endParaRPr lang="ko-KR" altLang="en-US"/>
+          </a:p>
+        </p:txBody>
       </p:sp>
       <p:sp>
         <p:nvSpPr>
@@ -8326,7 +8516,7 @@
           <a:bodyPr wrap="square" lIns="0" tIns="0" rIns="0" bIns="0" rtlCol="0" anchor="ctr"/>
           <a:lstStyle/>
           <a:p>
-            <a:pPr algn="ctr" indent="0" marL="0">
+            <a:pPr marL="0" indent="0" algn="ctr">
               <a:buNone/>
             </a:pPr>
             <a:r>
@@ -8368,13 +8558,20 @@
             <a:prstDash val="solid"/>
           </a:ln>
           <a:effectLst>
-            <a:outerShdw sx="100000" sy="100000" kx="0" ky="0" algn="bl" rotWithShape="0" blurRad="101600" dist="38100" dir="8100000">
+            <a:outerShdw blurRad="101600" dist="38100" dir="8100000" algn="bl" rotWithShape="0">
               <a:srgbClr val="000000">
                 <a:alpha val="18000"/>
               </a:srgbClr>
             </a:outerShdw>
           </a:effectLst>
         </p:spPr>
+        <p:txBody>
+          <a:bodyPr/>
+          <a:lstStyle/>
+          <a:p>
+            <a:endParaRPr lang="ko-KR" altLang="en-US"/>
+          </a:p>
+        </p:txBody>
       </p:sp>
       <p:sp>
         <p:nvSpPr>
@@ -8397,7 +8594,7 @@
           <a:bodyPr wrap="square" lIns="0" tIns="0" rIns="0" bIns="0" rtlCol="0" anchor="ctr"/>
           <a:lstStyle/>
           <a:p>
-            <a:pPr algn="ctr" indent="0" marL="0">
+            <a:pPr marL="0" indent="0" algn="ctr">
               <a:buNone/>
             </a:pPr>
             <a:r>
@@ -8436,7 +8633,7 @@
           <a:bodyPr wrap="square" lIns="0" tIns="0" rIns="0" bIns="0" rtlCol="0" anchor="ctr"/>
           <a:lstStyle/>
           <a:p>
-            <a:pPr algn="ctr" indent="0" marL="0">
+            <a:pPr marL="0" indent="0" algn="ctr">
               <a:buNone/>
             </a:pPr>
             <a:r>
@@ -8476,6 +8673,13 @@
             <a:prstDash val="solid"/>
           </a:ln>
         </p:spPr>
+        <p:txBody>
+          <a:bodyPr/>
+          <a:lstStyle/>
+          <a:p>
+            <a:endParaRPr lang="ko-KR" altLang="en-US"/>
+          </a:p>
+        </p:txBody>
       </p:sp>
       <p:sp>
         <p:nvSpPr>
@@ -8498,7 +8702,7 @@
           <a:bodyPr wrap="square" lIns="0" tIns="0" rIns="0" bIns="0" rtlCol="0" anchor="ctr"/>
           <a:lstStyle/>
           <a:p>
-            <a:pPr algn="ctr" indent="0" marL="0">
+            <a:pPr marL="0" indent="0" algn="ctr">
               <a:buNone/>
             </a:pPr>
             <a:r>
@@ -8540,13 +8744,20 @@
             <a:prstDash val="solid"/>
           </a:ln>
           <a:effectLst>
-            <a:outerShdw sx="100000" sy="100000" kx="0" ky="0" algn="bl" rotWithShape="0" blurRad="101600" dist="38100" dir="8100000">
+            <a:outerShdw blurRad="101600" dist="38100" dir="8100000" algn="bl" rotWithShape="0">
               <a:srgbClr val="000000">
                 <a:alpha val="18000"/>
               </a:srgbClr>
             </a:outerShdw>
           </a:effectLst>
         </p:spPr>
+        <p:txBody>
+          <a:bodyPr/>
+          <a:lstStyle/>
+          <a:p>
+            <a:endParaRPr lang="ko-KR" altLang="en-US"/>
+          </a:p>
+        </p:txBody>
       </p:sp>
       <p:sp>
         <p:nvSpPr>
@@ -8569,7 +8780,7 @@
           <a:bodyPr wrap="square" lIns="0" tIns="0" rIns="0" bIns="0" rtlCol="0" anchor="ctr"/>
           <a:lstStyle/>
           <a:p>
-            <a:pPr algn="ctr" indent="0" marL="0">
+            <a:pPr marL="0" indent="0" algn="ctr">
               <a:buNone/>
             </a:pPr>
             <a:r>
@@ -8608,7 +8819,7 @@
           <a:bodyPr wrap="square" lIns="0" tIns="0" rIns="0" bIns="0" rtlCol="0" anchor="ctr"/>
           <a:lstStyle/>
           <a:p>
-            <a:pPr algn="ctr" indent="0" marL="0">
+            <a:pPr marL="0" indent="0" algn="ctr">
               <a:buNone/>
             </a:pPr>
             <a:r>
@@ -8628,13 +8839,19 @@
       </p:sp>
       <p:sp>
         <p:nvSpPr>
-          <p:cNvPr id="37" name="Shape 35"/>
-          <p:cNvSpPr/>
-          <p:nvPr/>
-        </p:nvSpPr>
-        <p:spPr>
-          <a:xfrm>
-            <a:off x="274320" y="3291840"/>
+          <p:cNvPr id="45" name="Shape 35">
+            <a:extLst>
+              <a:ext uri="{FF2B5EF4-FFF2-40B4-BE49-F238E27FC236}">
+                <a16:creationId xmlns:a16="http://schemas.microsoft.com/office/drawing/2014/main" id="{E878B227-D79E-A329-27EB-8C180E0DD63F}"/>
+              </a:ext>
+            </a:extLst>
+          </p:cNvPr>
+          <p:cNvSpPr/>
+          <p:nvPr/>
+        </p:nvSpPr>
+        <p:spPr>
+          <a:xfrm>
+            <a:off x="274320" y="4549140"/>
             <a:ext cx="1920240" cy="347472"/>
           </a:xfrm>
           <a:prstGeom prst="roundRect">
@@ -8652,16 +8869,29 @@
             <a:prstDash val="solid"/>
           </a:ln>
         </p:spPr>
-      </p:sp>
-      <p:sp>
-        <p:nvSpPr>
-          <p:cNvPr id="38" name="Text 36"/>
-          <p:cNvSpPr/>
-          <p:nvPr/>
-        </p:nvSpPr>
-        <p:spPr>
-          <a:xfrm>
-            <a:off x="274320" y="3291840"/>
+        <p:txBody>
+          <a:bodyPr/>
+          <a:lstStyle/>
+          <a:p>
+            <a:endParaRPr lang="ko-KR" altLang="en-US"/>
+          </a:p>
+        </p:txBody>
+      </p:sp>
+      <p:sp>
+        <p:nvSpPr>
+          <p:cNvPr id="46" name="Text 36">
+            <a:extLst>
+              <a:ext uri="{FF2B5EF4-FFF2-40B4-BE49-F238E27FC236}">
+                <a16:creationId xmlns:a16="http://schemas.microsoft.com/office/drawing/2014/main" id="{82D933DD-A5BD-33F3-51C0-76F1259F1ED9}"/>
+              </a:ext>
+            </a:extLst>
+          </p:cNvPr>
+          <p:cNvSpPr/>
+          <p:nvPr/>
+        </p:nvSpPr>
+        <p:spPr>
+          <a:xfrm>
+            <a:off x="274320" y="4549140"/>
             <a:ext cx="1920240" cy="347472"/>
           </a:xfrm>
           <a:prstGeom prst="rect">
@@ -8674,7 +8904,7 @@
           <a:bodyPr wrap="square" lIns="0" tIns="0" rIns="0" bIns="0" rtlCol="0" anchor="ctr"/>
           <a:lstStyle/>
           <a:p>
-            <a:pPr algn="ctr" indent="0" marL="0">
+            <a:pPr marL="0" indent="0" algn="ctr">
               <a:buNone/>
             </a:pPr>
             <a:r>
@@ -8694,13 +8924,19 @@
       </p:sp>
       <p:sp>
         <p:nvSpPr>
-          <p:cNvPr id="39" name="Shape 37"/>
-          <p:cNvSpPr/>
-          <p:nvPr/>
-        </p:nvSpPr>
-        <p:spPr>
-          <a:xfrm>
-            <a:off x="2423160" y="3291840"/>
+          <p:cNvPr id="47" name="Shape 37">
+            <a:extLst>
+              <a:ext uri="{FF2B5EF4-FFF2-40B4-BE49-F238E27FC236}">
+                <a16:creationId xmlns:a16="http://schemas.microsoft.com/office/drawing/2014/main" id="{2B1525C1-BAA4-4A44-8499-3C4F8C4A0A8A}"/>
+              </a:ext>
+            </a:extLst>
+          </p:cNvPr>
+          <p:cNvSpPr/>
+          <p:nvPr/>
+        </p:nvSpPr>
+        <p:spPr>
+          <a:xfrm>
+            <a:off x="2423160" y="4549140"/>
             <a:ext cx="1920240" cy="347472"/>
           </a:xfrm>
           <a:prstGeom prst="roundRect">
@@ -8718,16 +8954,29 @@
             <a:prstDash val="solid"/>
           </a:ln>
         </p:spPr>
-      </p:sp>
-      <p:sp>
-        <p:nvSpPr>
-          <p:cNvPr id="40" name="Text 38"/>
-          <p:cNvSpPr/>
-          <p:nvPr/>
-        </p:nvSpPr>
-        <p:spPr>
-          <a:xfrm>
-            <a:off x="2423160" y="3291840"/>
+        <p:txBody>
+          <a:bodyPr/>
+          <a:lstStyle/>
+          <a:p>
+            <a:endParaRPr lang="ko-KR" altLang="en-US"/>
+          </a:p>
+        </p:txBody>
+      </p:sp>
+      <p:sp>
+        <p:nvSpPr>
+          <p:cNvPr id="48" name="Text 38">
+            <a:extLst>
+              <a:ext uri="{FF2B5EF4-FFF2-40B4-BE49-F238E27FC236}">
+                <a16:creationId xmlns:a16="http://schemas.microsoft.com/office/drawing/2014/main" id="{D2BEBBE1-B361-6A8A-4D27-B3C0DB95BF84}"/>
+              </a:ext>
+            </a:extLst>
+          </p:cNvPr>
+          <p:cNvSpPr/>
+          <p:nvPr/>
+        </p:nvSpPr>
+        <p:spPr>
+          <a:xfrm>
+            <a:off x="2423160" y="4549140"/>
             <a:ext cx="1920240" cy="347472"/>
           </a:xfrm>
           <a:prstGeom prst="rect">
@@ -8740,7 +8989,7 @@
           <a:bodyPr wrap="square" lIns="0" tIns="0" rIns="0" bIns="0" rtlCol="0" anchor="ctr"/>
           <a:lstStyle/>
           <a:p>
-            <a:pPr algn="ctr" indent="0" marL="0">
+            <a:pPr marL="0" indent="0" algn="ctr">
               <a:buNone/>
             </a:pPr>
             <a:r>
@@ -8760,13 +9009,19 @@
       </p:sp>
       <p:sp>
         <p:nvSpPr>
-          <p:cNvPr id="41" name="Shape 39"/>
-          <p:cNvSpPr/>
-          <p:nvPr/>
-        </p:nvSpPr>
-        <p:spPr>
-          <a:xfrm>
-            <a:off x="4572000" y="3291840"/>
+          <p:cNvPr id="49" name="Shape 39">
+            <a:extLst>
+              <a:ext uri="{FF2B5EF4-FFF2-40B4-BE49-F238E27FC236}">
+                <a16:creationId xmlns:a16="http://schemas.microsoft.com/office/drawing/2014/main" id="{A2188E09-C1DA-126E-0B6B-D44D7A133527}"/>
+              </a:ext>
+            </a:extLst>
+          </p:cNvPr>
+          <p:cNvSpPr/>
+          <p:nvPr/>
+        </p:nvSpPr>
+        <p:spPr>
+          <a:xfrm>
+            <a:off x="4572000" y="4549140"/>
             <a:ext cx="1920240" cy="347472"/>
           </a:xfrm>
           <a:prstGeom prst="roundRect">
@@ -8784,16 +9039,29 @@
             <a:prstDash val="solid"/>
           </a:ln>
         </p:spPr>
-      </p:sp>
-      <p:sp>
-        <p:nvSpPr>
-          <p:cNvPr id="42" name="Text 40"/>
-          <p:cNvSpPr/>
-          <p:nvPr/>
-        </p:nvSpPr>
-        <p:spPr>
-          <a:xfrm>
-            <a:off x="4572000" y="3291840"/>
+        <p:txBody>
+          <a:bodyPr/>
+          <a:lstStyle/>
+          <a:p>
+            <a:endParaRPr lang="ko-KR" altLang="en-US"/>
+          </a:p>
+        </p:txBody>
+      </p:sp>
+      <p:sp>
+        <p:nvSpPr>
+          <p:cNvPr id="50" name="Text 40">
+            <a:extLst>
+              <a:ext uri="{FF2B5EF4-FFF2-40B4-BE49-F238E27FC236}">
+                <a16:creationId xmlns:a16="http://schemas.microsoft.com/office/drawing/2014/main" id="{71B77A66-12D2-ECEF-DA0D-A65CDB0405F8}"/>
+              </a:ext>
+            </a:extLst>
+          </p:cNvPr>
+          <p:cNvSpPr/>
+          <p:nvPr/>
+        </p:nvSpPr>
+        <p:spPr>
+          <a:xfrm>
+            <a:off x="4572000" y="4549140"/>
             <a:ext cx="1920240" cy="347472"/>
           </a:xfrm>
           <a:prstGeom prst="rect">
@@ -8806,7 +9074,7 @@
           <a:bodyPr wrap="square" lIns="0" tIns="0" rIns="0" bIns="0" rtlCol="0" anchor="ctr"/>
           <a:lstStyle/>
           <a:p>
-            <a:pPr algn="ctr" indent="0" marL="0">
+            <a:pPr marL="0" indent="0" algn="ctr">
               <a:buNone/>
             </a:pPr>
             <a:r>
@@ -8826,13 +9094,19 @@
       </p:sp>
       <p:sp>
         <p:nvSpPr>
-          <p:cNvPr id="43" name="Shape 41"/>
-          <p:cNvSpPr/>
-          <p:nvPr/>
-        </p:nvSpPr>
-        <p:spPr>
-          <a:xfrm>
-            <a:off x="6720840" y="3291840"/>
+          <p:cNvPr id="51" name="Shape 41">
+            <a:extLst>
+              <a:ext uri="{FF2B5EF4-FFF2-40B4-BE49-F238E27FC236}">
+                <a16:creationId xmlns:a16="http://schemas.microsoft.com/office/drawing/2014/main" id="{10A06DC1-9125-9AB7-12E2-5B381EC18B29}"/>
+              </a:ext>
+            </a:extLst>
+          </p:cNvPr>
+          <p:cNvSpPr/>
+          <p:nvPr/>
+        </p:nvSpPr>
+        <p:spPr>
+          <a:xfrm>
+            <a:off x="6720840" y="4549140"/>
             <a:ext cx="1920240" cy="347472"/>
           </a:xfrm>
           <a:prstGeom prst="roundRect">
@@ -8850,16 +9124,29 @@
             <a:prstDash val="solid"/>
           </a:ln>
         </p:spPr>
-      </p:sp>
-      <p:sp>
-        <p:nvSpPr>
-          <p:cNvPr id="44" name="Text 42"/>
-          <p:cNvSpPr/>
-          <p:nvPr/>
-        </p:nvSpPr>
-        <p:spPr>
-          <a:xfrm>
-            <a:off x="6720840" y="3291840"/>
+        <p:txBody>
+          <a:bodyPr/>
+          <a:lstStyle/>
+          <a:p>
+            <a:endParaRPr lang="ko-KR" altLang="en-US"/>
+          </a:p>
+        </p:txBody>
+      </p:sp>
+      <p:sp>
+        <p:nvSpPr>
+          <p:cNvPr id="52" name="Text 42">
+            <a:extLst>
+              <a:ext uri="{FF2B5EF4-FFF2-40B4-BE49-F238E27FC236}">
+                <a16:creationId xmlns:a16="http://schemas.microsoft.com/office/drawing/2014/main" id="{95E90FA1-5496-7ABB-E4C0-4B3BCD2C498F}"/>
+              </a:ext>
+            </a:extLst>
+          </p:cNvPr>
+          <p:cNvSpPr/>
+          <p:nvPr/>
+        </p:nvSpPr>
+        <p:spPr>
+          <a:xfrm>
+            <a:off x="6720840" y="4549140"/>
             <a:ext cx="1920240" cy="347472"/>
           </a:xfrm>
           <a:prstGeom prst="rect">
@@ -8872,7 +9159,7 @@
           <a:bodyPr wrap="square" lIns="0" tIns="0" rIns="0" bIns="0" rtlCol="0" anchor="ctr"/>
           <a:lstStyle/>
           <a:p>
-            <a:pPr algn="ctr" indent="0" marL="0">
+            <a:pPr marL="0" indent="0" algn="ctr">
               <a:buNone/>
             </a:pPr>
             <a:r>
@@ -8906,6 +9193,7 @@
         <a:solidFill>
           <a:srgbClr val="F8FAFC"/>
         </a:solidFill>
+        <a:effectLst/>
       </p:bgPr>
     </p:bg>
     <p:spTree>
@@ -8946,6 +9234,13 @@
             <a:prstDash val="solid"/>
           </a:ln>
         </p:spPr>
+        <p:txBody>
+          <a:bodyPr/>
+          <a:lstStyle/>
+          <a:p>
+            <a:endParaRPr lang="ko-KR" altLang="en-US"/>
+          </a:p>
+        </p:txBody>
       </p:sp>
       <p:sp>
         <p:nvSpPr>
@@ -8968,7 +9263,7 @@
           <a:bodyPr wrap="square" lIns="0" tIns="0" rIns="0" bIns="0" rtlCol="0" anchor="ctr"/>
           <a:lstStyle/>
           <a:p>
-            <a:pPr indent="0" marL="0">
+            <a:pPr marL="0" indent="0">
               <a:buNone/>
             </a:pPr>
             <a:r>
@@ -9007,7 +9302,7 @@
           <a:bodyPr wrap="square" lIns="0" tIns="0" rIns="0" bIns="0" rtlCol="0" anchor="ctr"/>
           <a:lstStyle/>
           <a:p>
-            <a:pPr indent="0" marL="0">
+            <a:pPr marL="0" indent="0">
               <a:buNone/>
             </a:pPr>
             <a:r>
@@ -9049,13 +9344,20 @@
             <a:prstDash val="solid"/>
           </a:ln>
           <a:effectLst>
-            <a:outerShdw sx="100000" sy="100000" kx="0" ky="0" algn="bl" rotWithShape="0" blurRad="101600" dist="38100" dir="8100000">
+            <a:outerShdw blurRad="101600" dist="38100" dir="8100000" algn="bl" rotWithShape="0">
               <a:srgbClr val="000000">
                 <a:alpha val="18000"/>
               </a:srgbClr>
             </a:outerShdw>
           </a:effectLst>
         </p:spPr>
+        <p:txBody>
+          <a:bodyPr/>
+          <a:lstStyle/>
+          <a:p>
+            <a:endParaRPr lang="ko-KR" altLang="en-US"/>
+          </a:p>
+        </p:txBody>
       </p:sp>
       <p:sp>
         <p:nvSpPr>
@@ -9081,6 +9383,13 @@
             <a:prstDash val="solid"/>
           </a:ln>
         </p:spPr>
+        <p:txBody>
+          <a:bodyPr/>
+          <a:lstStyle/>
+          <a:p>
+            <a:endParaRPr lang="ko-KR" altLang="en-US"/>
+          </a:p>
+        </p:txBody>
       </p:sp>
       <p:sp>
         <p:nvSpPr>
@@ -9103,7 +9412,7 @@
           <a:bodyPr wrap="square" lIns="0" tIns="0" rIns="0" bIns="0" rtlCol="0" anchor="ctr"/>
           <a:lstStyle/>
           <a:p>
-            <a:pPr indent="0" marL="0">
+            <a:pPr marL="0" indent="0">
               <a:buNone/>
             </a:pPr>
             <a:r>
@@ -9145,6 +9454,13 @@
             <a:prstDash val="solid"/>
           </a:ln>
         </p:spPr>
+        <p:txBody>
+          <a:bodyPr/>
+          <a:lstStyle/>
+          <a:p>
+            <a:endParaRPr lang="ko-KR" altLang="en-US"/>
+          </a:p>
+        </p:txBody>
       </p:sp>
       <p:sp>
         <p:nvSpPr>
@@ -9167,7 +9483,7 @@
           <a:bodyPr wrap="square" lIns="0" tIns="0" rIns="0" bIns="0" rtlCol="0" anchor="ctr"/>
           <a:lstStyle/>
           <a:p>
-            <a:pPr indent="0" marL="0">
+            <a:pPr marL="0" indent="0">
               <a:buNone/>
             </a:pPr>
             <a:r>
@@ -9207,6 +9523,13 @@
             <a:prstDash val="solid"/>
           </a:ln>
         </p:spPr>
+        <p:txBody>
+          <a:bodyPr/>
+          <a:lstStyle/>
+          <a:p>
+            <a:endParaRPr lang="ko-KR" altLang="en-US"/>
+          </a:p>
+        </p:txBody>
       </p:sp>
       <p:sp>
         <p:nvSpPr>
@@ -9232,6 +9555,13 @@
             <a:prstDash val="solid"/>
           </a:ln>
         </p:spPr>
+        <p:txBody>
+          <a:bodyPr/>
+          <a:lstStyle/>
+          <a:p>
+            <a:endParaRPr lang="ko-KR" altLang="en-US"/>
+          </a:p>
+        </p:txBody>
       </p:sp>
       <p:sp>
         <p:nvSpPr>
@@ -9254,7 +9584,7 @@
           <a:bodyPr wrap="square" lIns="0" tIns="0" rIns="0" bIns="0" rtlCol="0" anchor="ctr"/>
           <a:lstStyle/>
           <a:p>
-            <a:pPr indent="0" marL="0">
+            <a:pPr marL="0" indent="0">
               <a:buNone/>
             </a:pPr>
             <a:r>
@@ -9296,6 +9626,13 @@
             <a:prstDash val="solid"/>
           </a:ln>
         </p:spPr>
+        <p:txBody>
+          <a:bodyPr/>
+          <a:lstStyle/>
+          <a:p>
+            <a:endParaRPr lang="ko-KR" altLang="en-US"/>
+          </a:p>
+        </p:txBody>
       </p:sp>
       <p:sp>
         <p:nvSpPr>
@@ -9318,7 +9655,7 @@
           <a:bodyPr wrap="square" lIns="0" tIns="0" rIns="0" bIns="0" rtlCol="0" anchor="ctr"/>
           <a:lstStyle/>
           <a:p>
-            <a:pPr indent="0" marL="0">
+            <a:pPr marL="0" indent="0">
               <a:buNone/>
             </a:pPr>
             <a:r>
@@ -9358,6 +9695,13 @@
             <a:prstDash val="solid"/>
           </a:ln>
         </p:spPr>
+        <p:txBody>
+          <a:bodyPr/>
+          <a:lstStyle/>
+          <a:p>
+            <a:endParaRPr lang="ko-KR" altLang="en-US"/>
+          </a:p>
+        </p:txBody>
       </p:sp>
       <p:sp>
         <p:nvSpPr>
@@ -9383,6 +9727,13 @@
             <a:prstDash val="solid"/>
           </a:ln>
         </p:spPr>
+        <p:txBody>
+          <a:bodyPr/>
+          <a:lstStyle/>
+          <a:p>
+            <a:endParaRPr lang="ko-KR" altLang="en-US"/>
+          </a:p>
+        </p:txBody>
       </p:sp>
       <p:sp>
         <p:nvSpPr>
@@ -9405,7 +9756,7 @@
           <a:bodyPr wrap="square" lIns="0" tIns="0" rIns="0" bIns="0" rtlCol="0" anchor="ctr"/>
           <a:lstStyle/>
           <a:p>
-            <a:pPr indent="0" marL="0">
+            <a:pPr marL="0" indent="0">
               <a:buNone/>
             </a:pPr>
             <a:r>
@@ -9445,6 +9796,13 @@
             <a:prstDash val="solid"/>
           </a:ln>
         </p:spPr>
+        <p:txBody>
+          <a:bodyPr/>
+          <a:lstStyle/>
+          <a:p>
+            <a:endParaRPr lang="ko-KR" altLang="en-US"/>
+          </a:p>
+        </p:txBody>
       </p:sp>
       <p:sp>
         <p:nvSpPr>
@@ -9470,6 +9828,13 @@
             <a:prstDash val="solid"/>
           </a:ln>
         </p:spPr>
+        <p:txBody>
+          <a:bodyPr/>
+          <a:lstStyle/>
+          <a:p>
+            <a:endParaRPr lang="ko-KR" altLang="en-US"/>
+          </a:p>
+        </p:txBody>
       </p:sp>
       <p:sp>
         <p:nvSpPr>
@@ -9492,7 +9857,7 @@
           <a:bodyPr wrap="square" lIns="0" tIns="0" rIns="0" bIns="0" rtlCol="0" anchor="ctr"/>
           <a:lstStyle/>
           <a:p>
-            <a:pPr indent="0" marL="0">
+            <a:pPr marL="0" indent="0">
               <a:buNone/>
             </a:pPr>
             <a:r>
@@ -9532,6 +9897,13 @@
             <a:prstDash val="solid"/>
           </a:ln>
         </p:spPr>
+        <p:txBody>
+          <a:bodyPr/>
+          <a:lstStyle/>
+          <a:p>
+            <a:endParaRPr lang="ko-KR" altLang="en-US"/>
+          </a:p>
+        </p:txBody>
       </p:sp>
       <p:sp>
         <p:nvSpPr>
@@ -9557,6 +9929,13 @@
             <a:prstDash val="solid"/>
           </a:ln>
         </p:spPr>
+        <p:txBody>
+          <a:bodyPr/>
+          <a:lstStyle/>
+          <a:p>
+            <a:endParaRPr lang="ko-KR" altLang="en-US" dirty="0"/>
+          </a:p>
+        </p:txBody>
       </p:sp>
       <p:sp>
         <p:nvSpPr>
@@ -9579,7 +9958,7 @@
           <a:bodyPr wrap="square" lIns="0" tIns="0" rIns="0" bIns="0" rtlCol="0" anchor="ctr"/>
           <a:lstStyle/>
           <a:p>
-            <a:pPr indent="0" marL="0">
+            <a:pPr marL="0" indent="0">
               <a:buNone/>
             </a:pPr>
             <a:r>
@@ -9619,6 +9998,13 @@
             <a:prstDash val="solid"/>
           </a:ln>
         </p:spPr>
+        <p:txBody>
+          <a:bodyPr/>
+          <a:lstStyle/>
+          <a:p>
+            <a:endParaRPr lang="ko-KR" altLang="en-US"/>
+          </a:p>
+        </p:txBody>
       </p:sp>
       <p:sp>
         <p:nvSpPr>
@@ -9644,6 +10030,13 @@
             <a:prstDash val="solid"/>
           </a:ln>
         </p:spPr>
+        <p:txBody>
+          <a:bodyPr/>
+          <a:lstStyle/>
+          <a:p>
+            <a:endParaRPr lang="ko-KR" altLang="en-US" dirty="0"/>
+          </a:p>
+        </p:txBody>
       </p:sp>
       <p:sp>
         <p:nvSpPr>
@@ -9666,7 +10059,7 @@
           <a:bodyPr wrap="square" lIns="0" tIns="0" rIns="0" bIns="0" rtlCol="0" anchor="ctr"/>
           <a:lstStyle/>
           <a:p>
-            <a:pPr indent="0" marL="0">
+            <a:pPr marL="0" indent="0">
               <a:buNone/>
             </a:pPr>
             <a:r>
@@ -9708,6 +10101,13 @@
             <a:prstDash val="solid"/>
           </a:ln>
         </p:spPr>
+        <p:txBody>
+          <a:bodyPr/>
+          <a:lstStyle/>
+          <a:p>
+            <a:endParaRPr lang="ko-KR" altLang="en-US"/>
+          </a:p>
+        </p:txBody>
       </p:sp>
       <p:sp>
         <p:nvSpPr>
@@ -9730,7 +10130,7 @@
           <a:bodyPr wrap="square" lIns="0" tIns="0" rIns="0" bIns="0" rtlCol="0" anchor="ctr"/>
           <a:lstStyle/>
           <a:p>
-            <a:pPr indent="0" marL="0">
+            <a:pPr marL="0" indent="0">
               <a:buNone/>
             </a:pPr>
             <a:r>
@@ -9770,6 +10170,13 @@
             <a:prstDash val="solid"/>
           </a:ln>
         </p:spPr>
+        <p:txBody>
+          <a:bodyPr/>
+          <a:lstStyle/>
+          <a:p>
+            <a:endParaRPr lang="ko-KR" altLang="en-US"/>
+          </a:p>
+        </p:txBody>
       </p:sp>
       <p:sp>
         <p:nvSpPr>
@@ -9795,6 +10202,13 @@
             <a:prstDash val="solid"/>
           </a:ln>
         </p:spPr>
+        <p:txBody>
+          <a:bodyPr/>
+          <a:lstStyle/>
+          <a:p>
+            <a:endParaRPr lang="ko-KR" altLang="en-US"/>
+          </a:p>
+        </p:txBody>
       </p:sp>
       <p:sp>
         <p:nvSpPr>
@@ -9817,7 +10231,7 @@
           <a:bodyPr wrap="square" lIns="0" tIns="0" rIns="0" bIns="0" rtlCol="0" anchor="ctr"/>
           <a:lstStyle/>
           <a:p>
-            <a:pPr indent="0" marL="0">
+            <a:pPr marL="0" indent="0">
               <a:buNone/>
             </a:pPr>
             <a:r>
@@ -9859,13 +10273,20 @@
             <a:prstDash val="solid"/>
           </a:ln>
           <a:effectLst>
-            <a:outerShdw sx="100000" sy="100000" kx="0" ky="0" algn="bl" rotWithShape="0" blurRad="101600" dist="38100" dir="8100000">
+            <a:outerShdw blurRad="101600" dist="38100" dir="8100000" algn="bl" rotWithShape="0">
               <a:srgbClr val="000000">
                 <a:alpha val="18000"/>
               </a:srgbClr>
             </a:outerShdw>
           </a:effectLst>
         </p:spPr>
+        <p:txBody>
+          <a:bodyPr/>
+          <a:lstStyle/>
+          <a:p>
+            <a:endParaRPr lang="ko-KR" altLang="en-US"/>
+          </a:p>
+        </p:txBody>
       </p:sp>
       <p:sp>
         <p:nvSpPr>
@@ -9891,6 +10312,13 @@
             <a:prstDash val="solid"/>
           </a:ln>
         </p:spPr>
+        <p:txBody>
+          <a:bodyPr/>
+          <a:lstStyle/>
+          <a:p>
+            <a:endParaRPr lang="ko-KR" altLang="en-US"/>
+          </a:p>
+        </p:txBody>
       </p:sp>
       <p:sp>
         <p:nvSpPr>
@@ -9913,9 +10341,39 @@
           <a:bodyPr wrap="square" lIns="0" tIns="0" rIns="0" bIns="0" rtlCol="0" anchor="ctr"/>
           <a:lstStyle/>
           <a:p>
-            <a:pPr indent="0" marL="0">
-              <a:buNone/>
-            </a:pPr>
+            <a:r>
+              <a:rPr lang="ko-KR" altLang="en-US" sz="1000" b="1" dirty="0">
+                <a:solidFill>
+                  <a:srgbClr val="1A2B4A"/>
+                </a:solidFill>
+                <a:latin typeface="Calibri" pitchFamily="34" charset="0"/>
+                <a:ea typeface="Calibri" pitchFamily="34" charset="-122"/>
+                <a:cs typeface="Calibri" pitchFamily="34" charset="-120"/>
+              </a:rPr>
+              <a:t>전역 </a:t>
+            </a:r>
+            <a:r>
+              <a:rPr lang="ko-KR" altLang="en-US" sz="1000" b="1" dirty="0" err="1">
+                <a:solidFill>
+                  <a:srgbClr val="1A2B4A"/>
+                </a:solidFill>
+                <a:latin typeface="Calibri" pitchFamily="34" charset="0"/>
+                <a:ea typeface="Calibri" pitchFamily="34" charset="-122"/>
+                <a:cs typeface="Calibri" pitchFamily="34" charset="-120"/>
+              </a:rPr>
+              <a:t>싱글톤</a:t>
+            </a:r>
+            <a:r>
+              <a:rPr lang="en-US" altLang="ko-KR" sz="1000" b="1" dirty="0">
+                <a:solidFill>
+                  <a:srgbClr val="1A2B4A"/>
+                </a:solidFill>
+                <a:latin typeface="Calibri" pitchFamily="34" charset="0"/>
+                <a:ea typeface="Calibri" pitchFamily="34" charset="-122"/>
+                <a:cs typeface="Calibri" pitchFamily="34" charset="-120"/>
+              </a:rPr>
+              <a:t>  </a:t>
+            </a:r>
             <a:r>
               <a:rPr lang="en-US" sz="1000" dirty="0">
                 <a:solidFill>
@@ -9925,7 +10383,18 @@
                 <a:ea typeface="Calibri" pitchFamily="34" charset="-122"/>
                 <a:cs typeface="Calibri" pitchFamily="34" charset="-120"/>
               </a:rPr>
-              <a:t>Autoload  →  SoundManager  |  PlayerData  (전역 싱글톤)</a:t>
+              <a:t>Autoload  →  SoundManager  |  </a:t>
+            </a:r>
+            <a:r>
+              <a:rPr lang="en-US" sz="1000" dirty="0" err="1">
+                <a:solidFill>
+                  <a:srgbClr val="0F172A"/>
+                </a:solidFill>
+                <a:latin typeface="Calibri" pitchFamily="34" charset="0"/>
+                <a:ea typeface="Calibri" pitchFamily="34" charset="-122"/>
+                <a:cs typeface="Calibri" pitchFamily="34" charset="-120"/>
+              </a:rPr>
+              <a:t>PlayerData</a:t>
             </a:r>
             <a:endParaRPr lang="en-US" sz="1000" dirty="0"/>
           </a:p>
@@ -9955,13 +10424,20 @@
             <a:prstDash val="solid"/>
           </a:ln>
           <a:effectLst>
-            <a:outerShdw sx="100000" sy="100000" kx="0" ky="0" algn="bl" rotWithShape="0" blurRad="101600" dist="38100" dir="8100000">
+            <a:outerShdw blurRad="101600" dist="38100" dir="8100000" algn="bl" rotWithShape="0">
               <a:srgbClr val="000000">
                 <a:alpha val="18000"/>
               </a:srgbClr>
             </a:outerShdw>
           </a:effectLst>
         </p:spPr>
+        <p:txBody>
+          <a:bodyPr/>
+          <a:lstStyle/>
+          <a:p>
+            <a:endParaRPr lang="ko-KR" altLang="en-US" dirty="0"/>
+          </a:p>
+        </p:txBody>
       </p:sp>
       <p:sp>
         <p:nvSpPr>
@@ -9987,6 +10463,13 @@
             <a:prstDash val="solid"/>
           </a:ln>
         </p:spPr>
+        <p:txBody>
+          <a:bodyPr/>
+          <a:lstStyle/>
+          <a:p>
+            <a:endParaRPr lang="ko-KR" altLang="en-US"/>
+          </a:p>
+        </p:txBody>
       </p:sp>
       <p:sp>
         <p:nvSpPr>
@@ -10009,7 +10492,7 @@
           <a:bodyPr wrap="square" lIns="0" tIns="0" rIns="0" bIns="0" rtlCol="0" anchor="ctr"/>
           <a:lstStyle/>
           <a:p>
-            <a:pPr indent="0" marL="0">
+            <a:pPr marL="0" indent="0">
               <a:buNone/>
             </a:pPr>
             <a:r>
@@ -10048,7 +10531,7 @@
           <a:bodyPr wrap="square" lIns="0" tIns="0" rIns="0" bIns="0" rtlCol="0" anchor="ctr"/>
           <a:lstStyle/>
           <a:p>
-            <a:pPr indent="0" marL="0">
+            <a:pPr marL="0" indent="0">
               <a:buNone/>
             </a:pPr>
             <a:r>
@@ -10088,6 +10571,13 @@
             <a:prstDash val="solid"/>
           </a:ln>
         </p:spPr>
+        <p:txBody>
+          <a:bodyPr/>
+          <a:lstStyle/>
+          <a:p>
+            <a:endParaRPr lang="ko-KR" altLang="en-US"/>
+          </a:p>
+        </p:txBody>
       </p:sp>
       <p:sp>
         <p:nvSpPr>
@@ -10110,7 +10600,7 @@
           <a:bodyPr wrap="square" lIns="0" tIns="0" rIns="0" bIns="0" rtlCol="0" anchor="ctr"/>
           <a:lstStyle/>
           <a:p>
-            <a:pPr indent="0" marL="0">
+            <a:pPr marL="0" indent="0">
               <a:buNone/>
             </a:pPr>
             <a:r>
@@ -10150,6 +10640,13 @@
             <a:prstDash val="solid"/>
           </a:ln>
         </p:spPr>
+        <p:txBody>
+          <a:bodyPr/>
+          <a:lstStyle/>
+          <a:p>
+            <a:endParaRPr lang="ko-KR" altLang="en-US"/>
+          </a:p>
+        </p:txBody>
       </p:sp>
       <p:sp>
         <p:nvSpPr>
@@ -10172,7 +10669,7 @@
           <a:bodyPr wrap="square" lIns="0" tIns="0" rIns="0" bIns="0" rtlCol="0" anchor="ctr"/>
           <a:lstStyle/>
           <a:p>
-            <a:pPr indent="0" marL="0">
+            <a:pPr marL="0" indent="0">
               <a:buNone/>
             </a:pPr>
             <a:r>
@@ -10212,6 +10709,13 @@
             <a:prstDash val="solid"/>
           </a:ln>
         </p:spPr>
+        <p:txBody>
+          <a:bodyPr/>
+          <a:lstStyle/>
+          <a:p>
+            <a:endParaRPr lang="ko-KR" altLang="en-US"/>
+          </a:p>
+        </p:txBody>
       </p:sp>
       <p:sp>
         <p:nvSpPr>
@@ -10234,7 +10738,7 @@
           <a:bodyPr wrap="square" lIns="0" tIns="0" rIns="0" bIns="0" rtlCol="0" anchor="ctr"/>
           <a:lstStyle/>
           <a:p>
-            <a:pPr indent="0" marL="0">
+            <a:pPr marL="0" indent="0">
               <a:buNone/>
             </a:pPr>
             <a:r>
@@ -10274,6 +10778,13 @@
             <a:prstDash val="solid"/>
           </a:ln>
         </p:spPr>
+        <p:txBody>
+          <a:bodyPr/>
+          <a:lstStyle/>
+          <a:p>
+            <a:endParaRPr lang="ko-KR" altLang="en-US"/>
+          </a:p>
+        </p:txBody>
       </p:sp>
       <p:sp>
         <p:nvSpPr>
@@ -10296,7 +10807,7 @@
           <a:bodyPr wrap="square" lIns="0" tIns="0" rIns="0" bIns="0" rtlCol="0" anchor="ctr"/>
           <a:lstStyle/>
           <a:p>
-            <a:pPr indent="0" marL="0">
+            <a:pPr marL="0" indent="0">
               <a:buNone/>
             </a:pPr>
             <a:r>
@@ -10336,6 +10847,13 @@
             <a:prstDash val="solid"/>
           </a:ln>
         </p:spPr>
+        <p:txBody>
+          <a:bodyPr/>
+          <a:lstStyle/>
+          <a:p>
+            <a:endParaRPr lang="ko-KR" altLang="en-US"/>
+          </a:p>
+        </p:txBody>
       </p:sp>
       <p:sp>
         <p:nvSpPr>
@@ -10358,7 +10876,7 @@
           <a:bodyPr wrap="square" lIns="0" tIns="0" rIns="0" bIns="0" rtlCol="0" anchor="ctr"/>
           <a:lstStyle/>
           <a:p>
-            <a:pPr indent="0" marL="0">
+            <a:pPr marL="0" indent="0">
               <a:buNone/>
             </a:pPr>
             <a:r>
@@ -10398,6 +10916,13 @@
             <a:prstDash val="solid"/>
           </a:ln>
         </p:spPr>
+        <p:txBody>
+          <a:bodyPr/>
+          <a:lstStyle/>
+          <a:p>
+            <a:endParaRPr lang="ko-KR" altLang="en-US"/>
+          </a:p>
+        </p:txBody>
       </p:sp>
       <p:sp>
         <p:nvSpPr>
@@ -10420,7 +10945,7 @@
           <a:bodyPr wrap="square" lIns="0" tIns="0" rIns="0" bIns="0" rtlCol="0" anchor="ctr"/>
           <a:lstStyle/>
           <a:p>
-            <a:pPr indent="0" marL="0">
+            <a:pPr marL="0" indent="0">
               <a:buNone/>
             </a:pPr>
             <a:r>
@@ -10460,6 +10985,13 @@
             <a:prstDash val="solid"/>
           </a:ln>
         </p:spPr>
+        <p:txBody>
+          <a:bodyPr/>
+          <a:lstStyle/>
+          <a:p>
+            <a:endParaRPr lang="ko-KR" altLang="en-US"/>
+          </a:p>
+        </p:txBody>
       </p:sp>
       <p:sp>
         <p:nvSpPr>
@@ -10482,7 +11014,7 @@
           <a:bodyPr wrap="square" lIns="0" tIns="0" rIns="0" bIns="0" rtlCol="0" anchor="ctr"/>
           <a:lstStyle/>
           <a:p>
-            <a:pPr indent="0" marL="0">
+            <a:pPr marL="0" indent="0">
               <a:buNone/>
             </a:pPr>
             <a:r>
@@ -10499,7 +11031,7 @@
             <a:endParaRPr lang="en-US" sz="850" dirty="0"/>
           </a:p>
           <a:p>
-            <a:pPr indent="0" marL="0">
+            <a:pPr marL="0" indent="0">
               <a:buNone/>
             </a:pPr>
             <a:r>
@@ -10539,6 +11071,13 @@
             <a:prstDash val="solid"/>
           </a:ln>
         </p:spPr>
+        <p:txBody>
+          <a:bodyPr/>
+          <a:lstStyle/>
+          <a:p>
+            <a:endParaRPr lang="ko-KR" altLang="en-US"/>
+          </a:p>
+        </p:txBody>
       </p:sp>
       <p:sp>
         <p:nvSpPr>
@@ -10561,7 +11100,7 @@
           <a:bodyPr wrap="square" lIns="0" tIns="0" rIns="0" bIns="0" rtlCol="0" anchor="ctr"/>
           <a:lstStyle/>
           <a:p>
-            <a:pPr indent="0" marL="0">
+            <a:pPr marL="0" indent="0">
               <a:buNone/>
             </a:pPr>
             <a:r>
@@ -10601,6 +11140,13 @@
             <a:prstDash val="solid"/>
           </a:ln>
         </p:spPr>
+        <p:txBody>
+          <a:bodyPr/>
+          <a:lstStyle/>
+          <a:p>
+            <a:endParaRPr lang="ko-KR" altLang="en-US"/>
+          </a:p>
+        </p:txBody>
       </p:sp>
       <p:sp>
         <p:nvSpPr>
@@ -10623,7 +11169,7 @@
           <a:bodyPr wrap="square" lIns="0" tIns="0" rIns="0" bIns="0" rtlCol="0" anchor="ctr"/>
           <a:lstStyle/>
           <a:p>
-            <a:pPr indent="0" marL="0">
+            <a:pPr marL="0" indent="0">
               <a:buNone/>
             </a:pPr>
             <a:r>
@@ -10663,6 +11209,13 @@
             <a:prstDash val="solid"/>
           </a:ln>
         </p:spPr>
+        <p:txBody>
+          <a:bodyPr/>
+          <a:lstStyle/>
+          <a:p>
+            <a:endParaRPr lang="ko-KR" altLang="en-US"/>
+          </a:p>
+        </p:txBody>
       </p:sp>
       <p:sp>
         <p:nvSpPr>
@@ -10685,7 +11238,7 @@
           <a:bodyPr wrap="square" lIns="0" tIns="0" rIns="0" bIns="0" rtlCol="0" anchor="ctr"/>
           <a:lstStyle/>
           <a:p>
-            <a:pPr indent="0" marL="0">
+            <a:pPr marL="0" indent="0">
               <a:buNone/>
             </a:pPr>
             <a:r>
@@ -10725,6 +11278,13 @@
             <a:prstDash val="solid"/>
           </a:ln>
         </p:spPr>
+        <p:txBody>
+          <a:bodyPr/>
+          <a:lstStyle/>
+          <a:p>
+            <a:endParaRPr lang="ko-KR" altLang="en-US"/>
+          </a:p>
+        </p:txBody>
       </p:sp>
       <p:sp>
         <p:nvSpPr>
@@ -10747,7 +11307,7 @@
           <a:bodyPr wrap="square" lIns="0" tIns="0" rIns="0" bIns="0" rtlCol="0" anchor="ctr"/>
           <a:lstStyle/>
           <a:p>
-            <a:pPr indent="0" marL="0">
+            <a:pPr marL="0" indent="0">
               <a:buNone/>
             </a:pPr>
             <a:r>
@@ -10787,6 +11347,13 @@
             <a:prstDash val="solid"/>
           </a:ln>
         </p:spPr>
+        <p:txBody>
+          <a:bodyPr/>
+          <a:lstStyle/>
+          <a:p>
+            <a:endParaRPr lang="ko-KR" altLang="en-US"/>
+          </a:p>
+        </p:txBody>
       </p:sp>
       <p:sp>
         <p:nvSpPr>
@@ -10809,7 +11376,7 @@
           <a:bodyPr wrap="square" lIns="0" tIns="0" rIns="0" bIns="0" rtlCol="0" anchor="ctr"/>
           <a:lstStyle/>
           <a:p>
-            <a:pPr indent="0" marL="0">
+            <a:pPr marL="0" indent="0">
               <a:buNone/>
             </a:pPr>
             <a:r>
@@ -10849,6 +11416,13 @@
             <a:prstDash val="solid"/>
           </a:ln>
         </p:spPr>
+        <p:txBody>
+          <a:bodyPr/>
+          <a:lstStyle/>
+          <a:p>
+            <a:endParaRPr lang="ko-KR" altLang="en-US"/>
+          </a:p>
+        </p:txBody>
       </p:sp>
       <p:sp>
         <p:nvSpPr>
@@ -10871,7 +11445,7 @@
           <a:bodyPr wrap="square" lIns="0" tIns="0" rIns="0" bIns="0" rtlCol="0" anchor="ctr"/>
           <a:lstStyle/>
           <a:p>
-            <a:pPr indent="0" marL="0">
+            <a:pPr marL="0" indent="0">
               <a:buNone/>
             </a:pPr>
             <a:r>
@@ -10911,6 +11485,13 @@
             <a:prstDash val="solid"/>
           </a:ln>
         </p:spPr>
+        <p:txBody>
+          <a:bodyPr/>
+          <a:lstStyle/>
+          <a:p>
+            <a:endParaRPr lang="ko-KR" altLang="en-US"/>
+          </a:p>
+        </p:txBody>
       </p:sp>
     </p:spTree>
   </p:cSld>
@@ -10928,6 +11509,7 @@
         <a:solidFill>
           <a:srgbClr val="1A2B4A"/>
         </a:solidFill>
+        <a:effectLst/>
       </p:bgPr>
     </p:bg>
     <p:spTree>
@@ -10968,6 +11550,13 @@
             <a:prstDash val="solid"/>
           </a:ln>
         </p:spPr>
+        <p:txBody>
+          <a:bodyPr/>
+          <a:lstStyle/>
+          <a:p>
+            <a:endParaRPr lang="ko-KR" altLang="en-US"/>
+          </a:p>
+        </p:txBody>
       </p:sp>
       <p:sp>
         <p:nvSpPr>
@@ -10990,7 +11579,7 @@
           <a:bodyPr wrap="square" lIns="0" tIns="0" rIns="0" bIns="0" rtlCol="0" anchor="ctr"/>
           <a:lstStyle/>
           <a:p>
-            <a:pPr indent="0" marL="0">
+            <a:pPr marL="0" indent="0">
               <a:buNone/>
             </a:pPr>
             <a:r>
@@ -11029,7 +11618,7 @@
           <a:bodyPr wrap="square" lIns="0" tIns="0" rIns="0" bIns="0" rtlCol="0" anchor="ctr"/>
           <a:lstStyle/>
           <a:p>
-            <a:pPr indent="0" marL="0">
+            <a:pPr marL="0" indent="0">
               <a:buNone/>
             </a:pPr>
             <a:r>
@@ -11071,13 +11660,20 @@
             <a:prstDash val="solid"/>
           </a:ln>
           <a:effectLst>
-            <a:outerShdw sx="100000" sy="100000" kx="0" ky="0" algn="bl" rotWithShape="0" blurRad="101600" dist="38100" dir="8100000">
+            <a:outerShdw blurRad="101600" dist="38100" dir="8100000" algn="bl" rotWithShape="0">
               <a:srgbClr val="000000">
                 <a:alpha val="18000"/>
               </a:srgbClr>
             </a:outerShdw>
           </a:effectLst>
         </p:spPr>
+        <p:txBody>
+          <a:bodyPr/>
+          <a:lstStyle/>
+          <a:p>
+            <a:endParaRPr lang="ko-KR" altLang="en-US"/>
+          </a:p>
+        </p:txBody>
       </p:sp>
       <p:sp>
         <p:nvSpPr>
@@ -11103,6 +11699,13 @@
             <a:prstDash val="solid"/>
           </a:ln>
         </p:spPr>
+        <p:txBody>
+          <a:bodyPr/>
+          <a:lstStyle/>
+          <a:p>
+            <a:endParaRPr lang="ko-KR" altLang="en-US"/>
+          </a:p>
+        </p:txBody>
       </p:sp>
       <p:sp>
         <p:nvSpPr>
@@ -11125,7 +11728,7 @@
           <a:bodyPr wrap="square" lIns="0" tIns="0" rIns="0" bIns="0" rtlCol="0" anchor="ctr"/>
           <a:lstStyle/>
           <a:p>
-            <a:pPr algn="ctr" indent="0" marL="0">
+            <a:pPr marL="0" indent="0" algn="ctr">
               <a:buNone/>
             </a:pPr>
             <a:r>
@@ -11164,7 +11767,7 @@
           <a:bodyPr wrap="square" lIns="0" tIns="0" rIns="0" bIns="0" rtlCol="0" anchor="ctr"/>
           <a:lstStyle/>
           <a:p>
-            <a:pPr indent="0" marL="0">
+            <a:pPr marL="0" indent="0">
               <a:buNone/>
             </a:pPr>
             <a:r>
@@ -11203,7 +11806,7 @@
           <a:bodyPr wrap="square" lIns="0" tIns="0" rIns="0" bIns="0" rtlCol="0" anchor="t"/>
           <a:lstStyle/>
           <a:p>
-            <a:pPr indent="0" marL="0">
+            <a:pPr marL="0" indent="0">
               <a:buNone/>
             </a:pPr>
             <a:r>
@@ -11220,7 +11823,7 @@
             <a:endParaRPr lang="en-US" sz="1000" dirty="0"/>
           </a:p>
           <a:p>
-            <a:pPr indent="0" marL="0">
+            <a:pPr marL="0" indent="0">
               <a:buNone/>
             </a:pPr>
             <a:r>
@@ -11262,13 +11865,20 @@
             <a:prstDash val="solid"/>
           </a:ln>
           <a:effectLst>
-            <a:outerShdw sx="100000" sy="100000" kx="0" ky="0" algn="bl" rotWithShape="0" blurRad="101600" dist="38100" dir="8100000">
+            <a:outerShdw blurRad="101600" dist="38100" dir="8100000" algn="bl" rotWithShape="0">
               <a:srgbClr val="000000">
                 <a:alpha val="18000"/>
               </a:srgbClr>
             </a:outerShdw>
           </a:effectLst>
         </p:spPr>
+        <p:txBody>
+          <a:bodyPr/>
+          <a:lstStyle/>
+          <a:p>
+            <a:endParaRPr lang="ko-KR" altLang="en-US"/>
+          </a:p>
+        </p:txBody>
       </p:sp>
       <p:sp>
         <p:nvSpPr>
@@ -11294,6 +11904,13 @@
             <a:prstDash val="solid"/>
           </a:ln>
         </p:spPr>
+        <p:txBody>
+          <a:bodyPr/>
+          <a:lstStyle/>
+          <a:p>
+            <a:endParaRPr lang="ko-KR" altLang="en-US" dirty="0"/>
+          </a:p>
+        </p:txBody>
       </p:sp>
       <p:sp>
         <p:nvSpPr>
@@ -11316,21 +11933,17 @@
           <a:bodyPr wrap="square" lIns="0" tIns="0" rIns="0" bIns="0" rtlCol="0" anchor="ctr"/>
           <a:lstStyle/>
           <a:p>
-            <a:pPr algn="ctr" indent="0" marL="0">
-              <a:buNone/>
-            </a:pPr>
-            <a:r>
-              <a:rPr lang="en-US" sz="1400" b="1" dirty="0">
-                <a:solidFill>
-                  <a:srgbClr val="FFFFFF"/>
-                </a:solidFill>
-                <a:latin typeface="Calibri" pitchFamily="34" charset="0"/>
-                <a:ea typeface="Calibri" pitchFamily="34" charset="-122"/>
-                <a:cs typeface="Calibri" pitchFamily="34" charset="-120"/>
-              </a:rPr>
-              <a:t>↑</a:t>
-            </a:r>
-            <a:endParaRPr lang="en-US" sz="1400" dirty="0"/>
+            <a:pPr marL="0" indent="0" algn="ctr">
+              <a:buNone/>
+            </a:pPr>
+            <a:r>
+              <a:rPr lang="en-US" sz="1600" dirty="0">
+                <a:solidFill>
+                  <a:schemeClr val="bg1"/>
+                </a:solidFill>
+              </a:rPr>
+              <a:t>space</a:t>
+            </a:r>
           </a:p>
         </p:txBody>
       </p:sp>
@@ -11355,7 +11968,7 @@
           <a:bodyPr wrap="square" lIns="0" tIns="0" rIns="0" bIns="0" rtlCol="0" anchor="ctr"/>
           <a:lstStyle/>
           <a:p>
-            <a:pPr indent="0" marL="0">
+            <a:pPr marL="0" indent="0">
               <a:buNone/>
             </a:pPr>
             <a:r>
@@ -11394,7 +12007,7 @@
           <a:bodyPr wrap="square" lIns="0" tIns="0" rIns="0" bIns="0" rtlCol="0" anchor="t"/>
           <a:lstStyle/>
           <a:p>
-            <a:pPr indent="0" marL="0">
+            <a:pPr marL="0" indent="0">
               <a:buNone/>
             </a:pPr>
             <a:r>
@@ -11411,7 +12024,7 @@
             <a:endParaRPr lang="en-US" sz="1000" dirty="0"/>
           </a:p>
           <a:p>
-            <a:pPr indent="0" marL="0">
+            <a:pPr marL="0" indent="0">
               <a:buNone/>
             </a:pPr>
             <a:r>
@@ -11428,7 +12041,7 @@
             <a:endParaRPr lang="en-US" sz="1000" dirty="0"/>
           </a:p>
           <a:p>
-            <a:pPr indent="0" marL="0">
+            <a:pPr marL="0" indent="0">
               <a:buNone/>
             </a:pPr>
             <a:r>
@@ -11470,13 +12083,20 @@
             <a:prstDash val="solid"/>
           </a:ln>
           <a:effectLst>
-            <a:outerShdw sx="100000" sy="100000" kx="0" ky="0" algn="bl" rotWithShape="0" blurRad="101600" dist="38100" dir="8100000">
+            <a:outerShdw blurRad="101600" dist="38100" dir="8100000" algn="bl" rotWithShape="0">
               <a:srgbClr val="000000">
                 <a:alpha val="18000"/>
               </a:srgbClr>
             </a:outerShdw>
           </a:effectLst>
         </p:spPr>
+        <p:txBody>
+          <a:bodyPr/>
+          <a:lstStyle/>
+          <a:p>
+            <a:endParaRPr lang="ko-KR" altLang="en-US"/>
+          </a:p>
+        </p:txBody>
       </p:sp>
       <p:sp>
         <p:nvSpPr>
@@ -11502,6 +12122,13 @@
             <a:prstDash val="solid"/>
           </a:ln>
         </p:spPr>
+        <p:txBody>
+          <a:bodyPr/>
+          <a:lstStyle/>
+          <a:p>
+            <a:endParaRPr lang="ko-KR" altLang="en-US"/>
+          </a:p>
+        </p:txBody>
       </p:sp>
       <p:sp>
         <p:nvSpPr>
@@ -11524,7 +12151,7 @@
           <a:bodyPr wrap="square" lIns="0" tIns="0" rIns="0" bIns="0" rtlCol="0" anchor="ctr"/>
           <a:lstStyle/>
           <a:p>
-            <a:pPr algn="ctr" indent="0" marL="0">
+            <a:pPr marL="0" indent="0" algn="ctr">
               <a:buNone/>
             </a:pPr>
             <a:r>
@@ -11536,7 +12163,28 @@
                 <a:ea typeface="Calibri" pitchFamily="34" charset="-122"/>
                 <a:cs typeface="Calibri" pitchFamily="34" charset="-120"/>
               </a:rPr>
-              <a:t>↑↑</a:t>
+              <a:t>Space</a:t>
+            </a:r>
+            <a:br>
+              <a:rPr lang="en-US" sz="1400" b="1" dirty="0">
+                <a:solidFill>
+                  <a:srgbClr val="FFFFFF"/>
+                </a:solidFill>
+                <a:latin typeface="Calibri" pitchFamily="34" charset="0"/>
+                <a:ea typeface="Calibri" pitchFamily="34" charset="-122"/>
+                <a:cs typeface="Calibri" pitchFamily="34" charset="-120"/>
+              </a:rPr>
+            </a:br>
+            <a:r>
+              <a:rPr lang="en-US" sz="1400" b="1" dirty="0">
+                <a:solidFill>
+                  <a:srgbClr val="FFFFFF"/>
+                </a:solidFill>
+                <a:latin typeface="Calibri" pitchFamily="34" charset="0"/>
+                <a:ea typeface="Calibri" pitchFamily="34" charset="-122"/>
+                <a:cs typeface="Calibri" pitchFamily="34" charset="-120"/>
+              </a:rPr>
+              <a:t>x2</a:t>
             </a:r>
             <a:endParaRPr lang="en-US" sz="1400" dirty="0"/>
           </a:p>
@@ -11563,7 +12211,7 @@
           <a:bodyPr wrap="square" lIns="0" tIns="0" rIns="0" bIns="0" rtlCol="0" anchor="ctr"/>
           <a:lstStyle/>
           <a:p>
-            <a:pPr indent="0" marL="0">
+            <a:pPr marL="0" indent="0">
               <a:buNone/>
             </a:pPr>
             <a:r>
@@ -11602,7 +12250,7 @@
           <a:bodyPr wrap="square" lIns="0" tIns="0" rIns="0" bIns="0" rtlCol="0" anchor="t"/>
           <a:lstStyle/>
           <a:p>
-            <a:pPr indent="0" marL="0">
+            <a:pPr marL="0" indent="0">
               <a:buNone/>
             </a:pPr>
             <a:r>
@@ -11619,7 +12267,7 @@
             <a:endParaRPr lang="en-US" sz="1000" dirty="0"/>
           </a:p>
           <a:p>
-            <a:pPr indent="0" marL="0">
+            <a:pPr marL="0" indent="0">
               <a:buNone/>
             </a:pPr>
             <a:r>
@@ -11636,7 +12284,7 @@
             <a:endParaRPr lang="en-US" sz="1000" dirty="0"/>
           </a:p>
           <a:p>
-            <a:pPr indent="0" marL="0">
+            <a:pPr marL="0" indent="0">
               <a:buNone/>
             </a:pPr>
             <a:r>
@@ -11678,13 +12326,20 @@
             <a:prstDash val="solid"/>
           </a:ln>
           <a:effectLst>
-            <a:outerShdw sx="100000" sy="100000" kx="0" ky="0" algn="bl" rotWithShape="0" blurRad="101600" dist="38100" dir="8100000">
+            <a:outerShdw blurRad="101600" dist="38100" dir="8100000" algn="bl" rotWithShape="0">
               <a:srgbClr val="000000">
                 <a:alpha val="18000"/>
               </a:srgbClr>
             </a:outerShdw>
           </a:effectLst>
         </p:spPr>
+        <p:txBody>
+          <a:bodyPr/>
+          <a:lstStyle/>
+          <a:p>
+            <a:endParaRPr lang="ko-KR" altLang="en-US"/>
+          </a:p>
+        </p:txBody>
       </p:sp>
       <p:sp>
         <p:nvSpPr>
@@ -11710,6 +12365,13 @@
             <a:prstDash val="solid"/>
           </a:ln>
         </p:spPr>
+        <p:txBody>
+          <a:bodyPr/>
+          <a:lstStyle/>
+          <a:p>
+            <a:endParaRPr lang="ko-KR" altLang="en-US"/>
+          </a:p>
+        </p:txBody>
       </p:sp>
       <p:sp>
         <p:nvSpPr>
@@ -11732,7 +12394,7 @@
           <a:bodyPr wrap="square" lIns="0" tIns="0" rIns="0" bIns="0" rtlCol="0" anchor="ctr"/>
           <a:lstStyle/>
           <a:p>
-            <a:pPr algn="ctr" indent="0" marL="0">
+            <a:pPr marL="0" indent="0" algn="ctr">
               <a:buNone/>
             </a:pPr>
             <a:r>
@@ -11771,7 +12433,7 @@
           <a:bodyPr wrap="square" lIns="0" tIns="0" rIns="0" bIns="0" rtlCol="0" anchor="ctr"/>
           <a:lstStyle/>
           <a:p>
-            <a:pPr indent="0" marL="0">
+            <a:pPr marL="0" indent="0">
               <a:buNone/>
             </a:pPr>
             <a:r>
@@ -11810,7 +12472,7 @@
           <a:bodyPr wrap="square" lIns="0" tIns="0" rIns="0" bIns="0" rtlCol="0" anchor="t"/>
           <a:lstStyle/>
           <a:p>
-            <a:pPr indent="0" marL="0">
+            <a:pPr marL="0" indent="0">
               <a:buNone/>
             </a:pPr>
             <a:r>
@@ -11827,7 +12489,7 @@
             <a:endParaRPr lang="en-US" sz="1000" dirty="0"/>
           </a:p>
           <a:p>
-            <a:pPr indent="0" marL="0">
+            <a:pPr marL="0" indent="0">
               <a:buNone/>
             </a:pPr>
             <a:r>
@@ -11844,7 +12506,7 @@
             <a:endParaRPr lang="en-US" sz="1000" dirty="0"/>
           </a:p>
           <a:p>
-            <a:pPr indent="0" marL="0">
+            <a:pPr marL="0" indent="0">
               <a:buNone/>
             </a:pPr>
             <a:r>
@@ -11886,13 +12548,20 @@
             <a:prstDash val="solid"/>
           </a:ln>
           <a:effectLst>
-            <a:outerShdw sx="100000" sy="100000" kx="0" ky="0" algn="bl" rotWithShape="0" blurRad="101600" dist="38100" dir="8100000">
+            <a:outerShdw blurRad="101600" dist="38100" dir="8100000" algn="bl" rotWithShape="0">
               <a:srgbClr val="000000">
                 <a:alpha val="18000"/>
               </a:srgbClr>
             </a:outerShdw>
           </a:effectLst>
         </p:spPr>
+        <p:txBody>
+          <a:bodyPr/>
+          <a:lstStyle/>
+          <a:p>
+            <a:endParaRPr lang="ko-KR" altLang="en-US"/>
+          </a:p>
+        </p:txBody>
       </p:sp>
       <p:sp>
         <p:nvSpPr>
@@ -11918,6 +12587,13 @@
             <a:prstDash val="solid"/>
           </a:ln>
         </p:spPr>
+        <p:txBody>
+          <a:bodyPr/>
+          <a:lstStyle/>
+          <a:p>
+            <a:endParaRPr lang="ko-KR" altLang="en-US"/>
+          </a:p>
+        </p:txBody>
       </p:sp>
       <p:sp>
         <p:nvSpPr>
@@ -11940,7 +12616,7 @@
           <a:bodyPr wrap="square" lIns="0" tIns="0" rIns="0" bIns="0" rtlCol="0" anchor="ctr"/>
           <a:lstStyle/>
           <a:p>
-            <a:pPr algn="ctr" indent="0" marL="0">
+            <a:pPr marL="0" indent="0" algn="ctr">
               <a:buNone/>
             </a:pPr>
             <a:r>
@@ -11979,7 +12655,7 @@
           <a:bodyPr wrap="square" lIns="0" tIns="0" rIns="0" bIns="0" rtlCol="0" anchor="ctr"/>
           <a:lstStyle/>
           <a:p>
-            <a:pPr indent="0" marL="0">
+            <a:pPr marL="0" indent="0">
               <a:buNone/>
             </a:pPr>
             <a:r>
@@ -12018,7 +12694,7 @@
           <a:bodyPr wrap="square" lIns="0" tIns="0" rIns="0" bIns="0" rtlCol="0" anchor="t"/>
           <a:lstStyle/>
           <a:p>
-            <a:pPr indent="0" marL="0">
+            <a:pPr marL="0" indent="0">
               <a:buNone/>
             </a:pPr>
             <a:r>
@@ -12035,7 +12711,7 @@
             <a:endParaRPr lang="en-US" sz="1000" dirty="0"/>
           </a:p>
           <a:p>
-            <a:pPr indent="0" marL="0">
+            <a:pPr marL="0" indent="0">
               <a:buNone/>
             </a:pPr>
             <a:r>
@@ -12052,7 +12728,7 @@
             <a:endParaRPr lang="en-US" sz="1000" dirty="0"/>
           </a:p>
           <a:p>
-            <a:pPr indent="0" marL="0">
+            <a:pPr marL="0" indent="0">
               <a:buNone/>
             </a:pPr>
             <a:r>
@@ -12094,13 +12770,20 @@
             <a:prstDash val="solid"/>
           </a:ln>
           <a:effectLst>
-            <a:outerShdw sx="100000" sy="100000" kx="0" ky="0" algn="bl" rotWithShape="0" blurRad="101600" dist="38100" dir="8100000">
+            <a:outerShdw blurRad="101600" dist="38100" dir="8100000" algn="bl" rotWithShape="0">
               <a:srgbClr val="000000">
                 <a:alpha val="18000"/>
               </a:srgbClr>
             </a:outerShdw>
           </a:effectLst>
         </p:spPr>
+        <p:txBody>
+          <a:bodyPr/>
+          <a:lstStyle/>
+          <a:p>
+            <a:endParaRPr lang="ko-KR" altLang="en-US"/>
+          </a:p>
+        </p:txBody>
       </p:sp>
       <p:sp>
         <p:nvSpPr>
@@ -12126,6 +12809,13 @@
             <a:prstDash val="solid"/>
           </a:ln>
         </p:spPr>
+        <p:txBody>
+          <a:bodyPr/>
+          <a:lstStyle/>
+          <a:p>
+            <a:endParaRPr lang="ko-KR" altLang="en-US"/>
+          </a:p>
+        </p:txBody>
       </p:sp>
       <p:sp>
         <p:nvSpPr>
@@ -12148,7 +12838,7 @@
           <a:bodyPr wrap="square" lIns="0" tIns="0" rIns="0" bIns="0" rtlCol="0" anchor="ctr"/>
           <a:lstStyle/>
           <a:p>
-            <a:pPr algn="ctr" indent="0" marL="0">
+            <a:pPr marL="0" indent="0" algn="ctr">
               <a:buNone/>
             </a:pPr>
             <a:r>
@@ -12187,7 +12877,7 @@
           <a:bodyPr wrap="square" lIns="0" tIns="0" rIns="0" bIns="0" rtlCol="0" anchor="ctr"/>
           <a:lstStyle/>
           <a:p>
-            <a:pPr indent="0" marL="0">
+            <a:pPr marL="0" indent="0">
               <a:buNone/>
             </a:pPr>
             <a:r>
@@ -12226,7 +12916,7 @@
           <a:bodyPr wrap="square" lIns="0" tIns="0" rIns="0" bIns="0" rtlCol="0" anchor="t"/>
           <a:lstStyle/>
           <a:p>
-            <a:pPr indent="0" marL="0">
+            <a:pPr marL="0" indent="0">
               <a:buNone/>
             </a:pPr>
             <a:r>
@@ -12243,7 +12933,7 @@
             <a:endParaRPr lang="en-US" sz="1000" dirty="0"/>
           </a:p>
           <a:p>
-            <a:pPr indent="0" marL="0">
+            <a:pPr marL="0" indent="0">
               <a:buNone/>
             </a:pPr>
             <a:r>
@@ -12260,7 +12950,7 @@
             <a:endParaRPr lang="en-US" sz="1000" dirty="0"/>
           </a:p>
           <a:p>
-            <a:pPr indent="0" marL="0">
+            <a:pPr marL="0" indent="0">
               <a:buNone/>
             </a:pPr>
             <a:r>
@@ -12294,6 +12984,7 @@
         <a:solidFill>
           <a:srgbClr val="F8FAFC"/>
         </a:solidFill>
+        <a:effectLst/>
       </p:bgPr>
     </p:bg>
     <p:spTree>
@@ -12334,6 +13025,13 @@
             <a:prstDash val="solid"/>
           </a:ln>
         </p:spPr>
+        <p:txBody>
+          <a:bodyPr/>
+          <a:lstStyle/>
+          <a:p>
+            <a:endParaRPr lang="ko-KR" altLang="en-US"/>
+          </a:p>
+        </p:txBody>
       </p:sp>
       <p:sp>
         <p:nvSpPr>
@@ -12356,7 +13054,7 @@
           <a:bodyPr wrap="square" lIns="0" tIns="0" rIns="0" bIns="0" rtlCol="0" anchor="ctr"/>
           <a:lstStyle/>
           <a:p>
-            <a:pPr indent="0" marL="0">
+            <a:pPr marL="0" indent="0">
               <a:buNone/>
             </a:pPr>
             <a:r>
@@ -12395,7 +13093,7 @@
           <a:bodyPr wrap="square" lIns="0" tIns="0" rIns="0" bIns="0" rtlCol="0" anchor="ctr"/>
           <a:lstStyle/>
           <a:p>
-            <a:pPr indent="0" marL="0">
+            <a:pPr marL="0" indent="0">
               <a:buNone/>
             </a:pPr>
             <a:r>
@@ -12437,13 +13135,20 @@
             <a:prstDash val="solid"/>
           </a:ln>
           <a:effectLst>
-            <a:outerShdw sx="100000" sy="100000" kx="0" ky="0" algn="bl" rotWithShape="0" blurRad="101600" dist="38100" dir="8100000">
+            <a:outerShdw blurRad="101600" dist="38100" dir="8100000" algn="bl" rotWithShape="0">
               <a:srgbClr val="000000">
                 <a:alpha val="18000"/>
               </a:srgbClr>
             </a:outerShdw>
           </a:effectLst>
         </p:spPr>
+        <p:txBody>
+          <a:bodyPr/>
+          <a:lstStyle/>
+          <a:p>
+            <a:endParaRPr lang="ko-KR" altLang="en-US"/>
+          </a:p>
+        </p:txBody>
       </p:sp>
       <p:sp>
         <p:nvSpPr>
@@ -12469,6 +13174,13 @@
             <a:prstDash val="solid"/>
           </a:ln>
         </p:spPr>
+        <p:txBody>
+          <a:bodyPr/>
+          <a:lstStyle/>
+          <a:p>
+            <a:endParaRPr lang="ko-KR" altLang="en-US"/>
+          </a:p>
+        </p:txBody>
       </p:sp>
       <p:sp>
         <p:nvSpPr>
@@ -12491,7 +13203,7 @@
           <a:bodyPr wrap="square" lIns="0" tIns="0" rIns="0" bIns="0" rtlCol="0" anchor="ctr"/>
           <a:lstStyle/>
           <a:p>
-            <a:pPr algn="ctr" indent="0" marL="0">
+            <a:pPr marL="0" indent="0" algn="ctr">
               <a:buNone/>
             </a:pPr>
             <a:r>
@@ -12530,7 +13242,7 @@
           <a:bodyPr wrap="square" lIns="0" tIns="0" rIns="0" bIns="0" rtlCol="0" anchor="ctr"/>
           <a:lstStyle/>
           <a:p>
-            <a:pPr algn="ctr" indent="0" marL="0">
+            <a:pPr marL="0" indent="0" algn="ctr">
               <a:buNone/>
             </a:pPr>
             <a:r>
@@ -12574,6 +13286,13 @@
             <a:prstDash val="solid"/>
           </a:ln>
         </p:spPr>
+        <p:txBody>
+          <a:bodyPr/>
+          <a:lstStyle/>
+          <a:p>
+            <a:endParaRPr lang="ko-KR" altLang="en-US"/>
+          </a:p>
+        </p:txBody>
       </p:sp>
       <p:sp>
         <p:nvSpPr>
@@ -12596,7 +13315,7 @@
           <a:bodyPr wrap="square" lIns="0" tIns="0" rIns="0" bIns="0" rtlCol="0" anchor="ctr"/>
           <a:lstStyle/>
           <a:p>
-            <a:pPr algn="ctr" indent="0" marL="0">
+            <a:pPr marL="0" indent="0" algn="ctr">
               <a:buNone/>
             </a:pPr>
             <a:r>
@@ -12635,7 +13354,7 @@
           <a:bodyPr wrap="square" lIns="0" tIns="0" rIns="0" bIns="0" rtlCol="0" anchor="ctr"/>
           <a:lstStyle/>
           <a:p>
-            <a:pPr algn="ctr" indent="0" marL="0">
+            <a:pPr marL="0" indent="0" algn="ctr">
               <a:buNone/>
             </a:pPr>
             <a:r>
@@ -12675,6 +13394,13 @@
             <a:prstDash val="solid"/>
           </a:ln>
         </p:spPr>
+        <p:txBody>
+          <a:bodyPr/>
+          <a:lstStyle/>
+          <a:p>
+            <a:endParaRPr lang="ko-KR" altLang="en-US"/>
+          </a:p>
+        </p:txBody>
       </p:sp>
       <p:sp>
         <p:nvSpPr>
@@ -12697,7 +13423,7 @@
           <a:bodyPr wrap="square" lIns="0" tIns="0" rIns="0" bIns="0" rtlCol="0" anchor="t"/>
           <a:lstStyle/>
           <a:p>
-            <a:pPr indent="0" marL="0">
+            <a:pPr marL="0" indent="0">
               <a:buNone/>
             </a:pPr>
             <a:r>
@@ -12714,7 +13440,7 @@
             <a:endParaRPr lang="en-US" sz="1000" dirty="0"/>
           </a:p>
           <a:p>
-            <a:pPr indent="0" marL="0">
+            <a:pPr marL="0" indent="0">
               <a:buNone/>
             </a:pPr>
             <a:r>
@@ -12731,7 +13457,7 @@
             <a:endParaRPr lang="en-US" sz="1000" dirty="0"/>
           </a:p>
           <a:p>
-            <a:pPr indent="0" marL="0">
+            <a:pPr marL="0" indent="0">
               <a:buNone/>
             </a:pPr>
             <a:r>
@@ -12773,13 +13499,20 @@
             <a:prstDash val="solid"/>
           </a:ln>
           <a:effectLst>
-            <a:outerShdw sx="100000" sy="100000" kx="0" ky="0" algn="bl" rotWithShape="0" blurRad="101600" dist="38100" dir="8100000">
+            <a:outerShdw blurRad="101600" dist="38100" dir="8100000" algn="bl" rotWithShape="0">
               <a:srgbClr val="000000">
                 <a:alpha val="18000"/>
               </a:srgbClr>
             </a:outerShdw>
           </a:effectLst>
         </p:spPr>
+        <p:txBody>
+          <a:bodyPr/>
+          <a:lstStyle/>
+          <a:p>
+            <a:endParaRPr lang="ko-KR" altLang="en-US"/>
+          </a:p>
+        </p:txBody>
       </p:sp>
       <p:sp>
         <p:nvSpPr>
@@ -12805,6 +13538,13 @@
             <a:prstDash val="solid"/>
           </a:ln>
         </p:spPr>
+        <p:txBody>
+          <a:bodyPr/>
+          <a:lstStyle/>
+          <a:p>
+            <a:endParaRPr lang="ko-KR" altLang="en-US"/>
+          </a:p>
+        </p:txBody>
       </p:sp>
       <p:sp>
         <p:nvSpPr>
@@ -12827,7 +13567,7 @@
           <a:bodyPr wrap="square" lIns="0" tIns="0" rIns="0" bIns="0" rtlCol="0" anchor="ctr"/>
           <a:lstStyle/>
           <a:p>
-            <a:pPr algn="ctr" indent="0" marL="0">
+            <a:pPr marL="0" indent="0" algn="ctr">
               <a:buNone/>
             </a:pPr>
             <a:r>
@@ -12866,7 +13606,7 @@
           <a:bodyPr wrap="square" lIns="0" tIns="0" rIns="0" bIns="0" rtlCol="0" anchor="ctr"/>
           <a:lstStyle/>
           <a:p>
-            <a:pPr algn="ctr" indent="0" marL="0">
+            <a:pPr marL="0" indent="0" algn="ctr">
               <a:buNone/>
             </a:pPr>
             <a:r>
@@ -12910,6 +13650,13 @@
             <a:prstDash val="solid"/>
           </a:ln>
         </p:spPr>
+        <p:txBody>
+          <a:bodyPr/>
+          <a:lstStyle/>
+          <a:p>
+            <a:endParaRPr lang="ko-KR" altLang="en-US"/>
+          </a:p>
+        </p:txBody>
       </p:sp>
       <p:sp>
         <p:nvSpPr>
@@ -12932,7 +13679,7 @@
           <a:bodyPr wrap="square" lIns="0" tIns="0" rIns="0" bIns="0" rtlCol="0" anchor="ctr"/>
           <a:lstStyle/>
           <a:p>
-            <a:pPr algn="ctr" indent="0" marL="0">
+            <a:pPr marL="0" indent="0" algn="ctr">
               <a:buNone/>
             </a:pPr>
             <a:r>
@@ -12971,7 +13718,7 @@
           <a:bodyPr wrap="square" lIns="0" tIns="0" rIns="0" bIns="0" rtlCol="0" anchor="ctr"/>
           <a:lstStyle/>
           <a:p>
-            <a:pPr algn="ctr" indent="0" marL="0">
+            <a:pPr marL="0" indent="0" algn="ctr">
               <a:buNone/>
             </a:pPr>
             <a:r>
@@ -13011,6 +13758,13 @@
             <a:prstDash val="solid"/>
           </a:ln>
         </p:spPr>
+        <p:txBody>
+          <a:bodyPr/>
+          <a:lstStyle/>
+          <a:p>
+            <a:endParaRPr lang="ko-KR" altLang="en-US"/>
+          </a:p>
+        </p:txBody>
       </p:sp>
       <p:sp>
         <p:nvSpPr>
@@ -13033,7 +13787,7 @@
           <a:bodyPr wrap="square" lIns="0" tIns="0" rIns="0" bIns="0" rtlCol="0" anchor="t"/>
           <a:lstStyle/>
           <a:p>
-            <a:pPr indent="0" marL="0">
+            <a:pPr marL="0" indent="0">
               <a:buNone/>
             </a:pPr>
             <a:r>
@@ -13050,7 +13804,7 @@
             <a:endParaRPr lang="en-US" sz="1000" dirty="0"/>
           </a:p>
           <a:p>
-            <a:pPr indent="0" marL="0">
+            <a:pPr marL="0" indent="0">
               <a:buNone/>
             </a:pPr>
             <a:r>
@@ -13067,7 +13821,7 @@
             <a:endParaRPr lang="en-US" sz="1000" dirty="0"/>
           </a:p>
           <a:p>
-            <a:pPr indent="0" marL="0">
+            <a:pPr marL="0" indent="0">
               <a:buNone/>
             </a:pPr>
             <a:r>
@@ -13109,13 +13863,20 @@
             <a:prstDash val="solid"/>
           </a:ln>
           <a:effectLst>
-            <a:outerShdw sx="100000" sy="100000" kx="0" ky="0" algn="bl" rotWithShape="0" blurRad="101600" dist="38100" dir="8100000">
+            <a:outerShdw blurRad="101600" dist="38100" dir="8100000" algn="bl" rotWithShape="0">
               <a:srgbClr val="000000">
                 <a:alpha val="18000"/>
               </a:srgbClr>
             </a:outerShdw>
           </a:effectLst>
         </p:spPr>
+        <p:txBody>
+          <a:bodyPr/>
+          <a:lstStyle/>
+          <a:p>
+            <a:endParaRPr lang="ko-KR" altLang="en-US"/>
+          </a:p>
+        </p:txBody>
       </p:sp>
       <p:sp>
         <p:nvSpPr>
@@ -13141,6 +13902,13 @@
             <a:prstDash val="solid"/>
           </a:ln>
         </p:spPr>
+        <p:txBody>
+          <a:bodyPr/>
+          <a:lstStyle/>
+          <a:p>
+            <a:endParaRPr lang="ko-KR" altLang="en-US"/>
+          </a:p>
+        </p:txBody>
       </p:sp>
       <p:sp>
         <p:nvSpPr>
@@ -13163,7 +13931,7 @@
           <a:bodyPr wrap="square" lIns="0" tIns="0" rIns="0" bIns="0" rtlCol="0" anchor="ctr"/>
           <a:lstStyle/>
           <a:p>
-            <a:pPr algn="ctr" indent="0" marL="0">
+            <a:pPr marL="0" indent="0" algn="ctr">
               <a:buNone/>
             </a:pPr>
             <a:r>
@@ -13202,7 +13970,7 @@
           <a:bodyPr wrap="square" lIns="0" tIns="0" rIns="0" bIns="0" rtlCol="0" anchor="ctr"/>
           <a:lstStyle/>
           <a:p>
-            <a:pPr algn="ctr" indent="0" marL="0">
+            <a:pPr marL="0" indent="0" algn="ctr">
               <a:buNone/>
             </a:pPr>
             <a:r>
@@ -13246,6 +14014,13 @@
             <a:prstDash val="solid"/>
           </a:ln>
         </p:spPr>
+        <p:txBody>
+          <a:bodyPr/>
+          <a:lstStyle/>
+          <a:p>
+            <a:endParaRPr lang="ko-KR" altLang="en-US"/>
+          </a:p>
+        </p:txBody>
       </p:sp>
       <p:sp>
         <p:nvSpPr>
@@ -13268,7 +14043,7 @@
           <a:bodyPr wrap="square" lIns="0" tIns="0" rIns="0" bIns="0" rtlCol="0" anchor="ctr"/>
           <a:lstStyle/>
           <a:p>
-            <a:pPr algn="ctr" indent="0" marL="0">
+            <a:pPr marL="0" indent="0" algn="ctr">
               <a:buNone/>
             </a:pPr>
             <a:r>
@@ -13307,7 +14082,7 @@
           <a:bodyPr wrap="square" lIns="0" tIns="0" rIns="0" bIns="0" rtlCol="0" anchor="ctr"/>
           <a:lstStyle/>
           <a:p>
-            <a:pPr algn="ctr" indent="0" marL="0">
+            <a:pPr marL="0" indent="0" algn="ctr">
               <a:buNone/>
             </a:pPr>
             <a:r>
@@ -13347,6 +14122,13 @@
             <a:prstDash val="solid"/>
           </a:ln>
         </p:spPr>
+        <p:txBody>
+          <a:bodyPr/>
+          <a:lstStyle/>
+          <a:p>
+            <a:endParaRPr lang="ko-KR" altLang="en-US"/>
+          </a:p>
+        </p:txBody>
       </p:sp>
       <p:sp>
         <p:nvSpPr>
@@ -13369,7 +14151,7 @@
           <a:bodyPr wrap="square" lIns="0" tIns="0" rIns="0" bIns="0" rtlCol="0" anchor="t"/>
           <a:lstStyle/>
           <a:p>
-            <a:pPr indent="0" marL="0">
+            <a:pPr marL="0" indent="0">
               <a:buNone/>
             </a:pPr>
             <a:r>
@@ -13386,7 +14168,7 @@
             <a:endParaRPr lang="en-US" sz="1000" dirty="0"/>
           </a:p>
           <a:p>
-            <a:pPr indent="0" marL="0">
+            <a:pPr marL="0" indent="0">
               <a:buNone/>
             </a:pPr>
             <a:r>
@@ -13403,7 +14185,7 @@
             <a:endParaRPr lang="en-US" sz="1000" dirty="0"/>
           </a:p>
           <a:p>
-            <a:pPr indent="0" marL="0">
+            <a:pPr marL="0" indent="0">
               <a:buNone/>
             </a:pPr>
             <a:r>
@@ -13421,45 +14203,96 @@
           </a:p>
         </p:txBody>
       </p:sp>
-      <p:sp>
-        <p:nvSpPr>
-          <p:cNvPr id="32" name="Text 30"/>
-          <p:cNvSpPr/>
-          <p:nvPr/>
-        </p:nvSpPr>
-        <p:spPr>
-          <a:xfrm>
-            <a:off x="274320" y="4846320"/>
-            <a:ext cx="8595360" cy="256032"/>
-          </a:xfrm>
-          <a:prstGeom prst="rect">
-            <a:avLst/>
-          </a:prstGeom>
-          <a:noFill/>
-          <a:ln/>
-        </p:spPr>
-        <p:txBody>
-          <a:bodyPr wrap="square" lIns="0" tIns="0" rIns="0" bIns="0" rtlCol="0" anchor="ctr"/>
-          <a:lstStyle/>
-          <a:p>
-            <a:pPr indent="0" marL="0">
-              <a:buNone/>
-            </a:pPr>
-            <a:r>
-              <a:rPr lang="en-US" sz="900" dirty="0">
-                <a:solidFill>
-                  <a:srgbClr val="94A3B8"/>
-                </a:solidFill>
-                <a:latin typeface="Calibri" pitchFamily="34" charset="0"/>
-                <a:ea typeface="Calibri" pitchFamily="34" charset="-122"/>
-                <a:cs typeface="Calibri" pitchFamily="34" charset="-120"/>
-              </a:rPr>
-              <a:t>※ 유물을 획득하는 순간 팝업이 표시되며 게임이 일시정지됩니다. 1초 후 Space 키로 닫으면 즉시 사용 가능합니다.</a:t>
-            </a:r>
-            <a:endParaRPr lang="en-US" sz="900" dirty="0"/>
-          </a:p>
-        </p:txBody>
-      </p:sp>
+      <p:pic>
+        <p:nvPicPr>
+          <p:cNvPr id="34" name="그림 33">
+            <a:extLst>
+              <a:ext uri="{FF2B5EF4-FFF2-40B4-BE49-F238E27FC236}">
+                <a16:creationId xmlns:a16="http://schemas.microsoft.com/office/drawing/2014/main" id="{8ABFF00A-5AF0-3174-F020-8DD53606D480}"/>
+              </a:ext>
+            </a:extLst>
+          </p:cNvPr>
+          <p:cNvPicPr>
+            <a:picLocks noChangeAspect="1"/>
+          </p:cNvPicPr>
+          <p:nvPr/>
+        </p:nvPicPr>
+        <p:blipFill>
+          <a:blip r:embed="rId3"/>
+          <a:stretch>
+            <a:fillRect/>
+          </a:stretch>
+        </p:blipFill>
+        <p:spPr>
+          <a:xfrm>
+            <a:off x="1036320" y="3506724"/>
+            <a:ext cx="1219200" cy="1219200"/>
+          </a:xfrm>
+          <a:prstGeom prst="rect">
+            <a:avLst/>
+          </a:prstGeom>
+        </p:spPr>
+      </p:pic>
+      <p:pic>
+        <p:nvPicPr>
+          <p:cNvPr id="36" name="그림 35">
+            <a:extLst>
+              <a:ext uri="{FF2B5EF4-FFF2-40B4-BE49-F238E27FC236}">
+                <a16:creationId xmlns:a16="http://schemas.microsoft.com/office/drawing/2014/main" id="{0CDFA27C-05A8-CB05-2D8E-ED8AD7B24B2B}"/>
+              </a:ext>
+            </a:extLst>
+          </p:cNvPr>
+          <p:cNvPicPr>
+            <a:picLocks noChangeAspect="1"/>
+          </p:cNvPicPr>
+          <p:nvPr/>
+        </p:nvPicPr>
+        <p:blipFill>
+          <a:blip r:embed="rId4"/>
+          <a:stretch>
+            <a:fillRect/>
+          </a:stretch>
+        </p:blipFill>
+        <p:spPr>
+          <a:xfrm>
+            <a:off x="6736080" y="3032760"/>
+            <a:ext cx="1524000" cy="2019300"/>
+          </a:xfrm>
+          <a:prstGeom prst="rect">
+            <a:avLst/>
+          </a:prstGeom>
+        </p:spPr>
+      </p:pic>
+      <p:pic>
+        <p:nvPicPr>
+          <p:cNvPr id="38" name="그림 37">
+            <a:extLst>
+              <a:ext uri="{FF2B5EF4-FFF2-40B4-BE49-F238E27FC236}">
+                <a16:creationId xmlns:a16="http://schemas.microsoft.com/office/drawing/2014/main" id="{39CDC44A-E96E-C96A-4ABA-2F6C8CAA841B}"/>
+              </a:ext>
+            </a:extLst>
+          </p:cNvPr>
+          <p:cNvPicPr>
+            <a:picLocks noChangeAspect="1"/>
+          </p:cNvPicPr>
+          <p:nvPr/>
+        </p:nvPicPr>
+        <p:blipFill>
+          <a:blip r:embed="rId5"/>
+          <a:stretch>
+            <a:fillRect/>
+          </a:stretch>
+        </p:blipFill>
+        <p:spPr>
+          <a:xfrm>
+            <a:off x="3962400" y="3477768"/>
+            <a:ext cx="1219200" cy="1219200"/>
+          </a:xfrm>
+          <a:prstGeom prst="rect">
+            <a:avLst/>
+          </a:prstGeom>
+        </p:spPr>
+      </p:pic>
     </p:spTree>
   </p:cSld>
   <p:clrMapOvr>
@@ -13476,6 +14309,7 @@
         <a:solidFill>
           <a:srgbClr val="F8FAFC"/>
         </a:solidFill>
+        <a:effectLst/>
       </p:bgPr>
     </p:bg>
     <p:spTree>
@@ -13516,6 +14350,13 @@
             <a:prstDash val="solid"/>
           </a:ln>
         </p:spPr>
+        <p:txBody>
+          <a:bodyPr/>
+          <a:lstStyle/>
+          <a:p>
+            <a:endParaRPr lang="ko-KR" altLang="en-US" dirty="0"/>
+          </a:p>
+        </p:txBody>
       </p:sp>
       <p:sp>
         <p:nvSpPr>
@@ -13538,7 +14379,7 @@
           <a:bodyPr wrap="square" lIns="0" tIns="0" rIns="0" bIns="0" rtlCol="0" anchor="ctr"/>
           <a:lstStyle/>
           <a:p>
-            <a:pPr indent="0" marL="0">
+            <a:pPr marL="0" indent="0">
               <a:buNone/>
             </a:pPr>
             <a:r>
@@ -13577,7 +14418,7 @@
           <a:bodyPr wrap="square" lIns="0" tIns="0" rIns="0" bIns="0" rtlCol="0" anchor="ctr"/>
           <a:lstStyle/>
           <a:p>
-            <a:pPr indent="0" marL="0">
+            <a:pPr marL="0" indent="0">
               <a:buNone/>
             </a:pPr>
             <a:r>
@@ -13619,6 +14460,13 @@
             <a:prstDash val="solid"/>
           </a:ln>
         </p:spPr>
+        <p:txBody>
+          <a:bodyPr/>
+          <a:lstStyle/>
+          <a:p>
+            <a:endParaRPr lang="ko-KR" altLang="en-US"/>
+          </a:p>
+        </p:txBody>
       </p:sp>
       <p:sp>
         <p:nvSpPr>
@@ -13641,7 +14489,7 @@
           <a:bodyPr wrap="square" lIns="0" tIns="0" rIns="0" bIns="0" rtlCol="0" anchor="ctr"/>
           <a:lstStyle/>
           <a:p>
-            <a:pPr indent="0" marL="0">
+            <a:pPr marL="0" indent="0">
               <a:buNone/>
             </a:pPr>
             <a:r>
@@ -13683,13 +14531,20 @@
             <a:prstDash val="solid"/>
           </a:ln>
           <a:effectLst>
-            <a:outerShdw sx="100000" sy="100000" kx="0" ky="0" algn="bl" rotWithShape="0" blurRad="101600" dist="38100" dir="8100000">
+            <a:outerShdw blurRad="101600" dist="38100" dir="8100000" algn="bl" rotWithShape="0">
               <a:srgbClr val="000000">
                 <a:alpha val="18000"/>
               </a:srgbClr>
             </a:outerShdw>
           </a:effectLst>
         </p:spPr>
+        <p:txBody>
+          <a:bodyPr/>
+          <a:lstStyle/>
+          <a:p>
+            <a:endParaRPr lang="ko-KR" altLang="en-US"/>
+          </a:p>
+        </p:txBody>
       </p:sp>
       <p:sp>
         <p:nvSpPr>
@@ -13715,6 +14570,13 @@
             <a:prstDash val="solid"/>
           </a:ln>
         </p:spPr>
+        <p:txBody>
+          <a:bodyPr/>
+          <a:lstStyle/>
+          <a:p>
+            <a:endParaRPr lang="ko-KR" altLang="en-US"/>
+          </a:p>
+        </p:txBody>
       </p:sp>
       <p:sp>
         <p:nvSpPr>
@@ -13737,7 +14599,7 @@
           <a:bodyPr wrap="square" lIns="0" tIns="0" rIns="0" bIns="0" rtlCol="0" anchor="ctr"/>
           <a:lstStyle/>
           <a:p>
-            <a:pPr indent="0" marL="0">
+            <a:pPr marL="0" indent="0">
               <a:buNone/>
             </a:pPr>
             <a:r>
@@ -13776,7 +14638,7 @@
           <a:bodyPr wrap="square" lIns="0" tIns="0" rIns="0" bIns="0" rtlCol="0" anchor="ctr"/>
           <a:lstStyle/>
           <a:p>
-            <a:pPr indent="0" marL="0">
+            <a:pPr marL="0" indent="0">
               <a:buNone/>
             </a:pPr>
             <a:r>
@@ -13815,7 +14677,7 @@
           <a:bodyPr wrap="square" lIns="0" tIns="0" rIns="0" bIns="0" rtlCol="0" anchor="t"/>
           <a:lstStyle/>
           <a:p>
-            <a:pPr indent="0" marL="0">
+            <a:pPr marL="0" indent="0">
               <a:buNone/>
             </a:pPr>
             <a:r>
@@ -13857,13 +14719,20 @@
             <a:prstDash val="solid"/>
           </a:ln>
           <a:effectLst>
-            <a:outerShdw sx="100000" sy="100000" kx="0" ky="0" algn="bl" rotWithShape="0" blurRad="101600" dist="38100" dir="8100000">
+            <a:outerShdw blurRad="101600" dist="38100" dir="8100000" algn="bl" rotWithShape="0">
               <a:srgbClr val="000000">
                 <a:alpha val="18000"/>
               </a:srgbClr>
             </a:outerShdw>
           </a:effectLst>
         </p:spPr>
+        <p:txBody>
+          <a:bodyPr/>
+          <a:lstStyle/>
+          <a:p>
+            <a:endParaRPr lang="ko-KR" altLang="en-US"/>
+          </a:p>
+        </p:txBody>
       </p:sp>
       <p:sp>
         <p:nvSpPr>
@@ -13889,6 +14758,13 @@
             <a:prstDash val="solid"/>
           </a:ln>
         </p:spPr>
+        <p:txBody>
+          <a:bodyPr/>
+          <a:lstStyle/>
+          <a:p>
+            <a:endParaRPr lang="ko-KR" altLang="en-US"/>
+          </a:p>
+        </p:txBody>
       </p:sp>
       <p:sp>
         <p:nvSpPr>
@@ -13911,7 +14787,7 @@
           <a:bodyPr wrap="square" lIns="0" tIns="0" rIns="0" bIns="0" rtlCol="0" anchor="ctr"/>
           <a:lstStyle/>
           <a:p>
-            <a:pPr indent="0" marL="0">
+            <a:pPr marL="0" indent="0">
               <a:buNone/>
             </a:pPr>
             <a:r>
@@ -13950,7 +14826,7 @@
           <a:bodyPr wrap="square" lIns="0" tIns="0" rIns="0" bIns="0" rtlCol="0" anchor="ctr"/>
           <a:lstStyle/>
           <a:p>
-            <a:pPr indent="0" marL="0">
+            <a:pPr marL="0" indent="0">
               <a:buNone/>
             </a:pPr>
             <a:r>
@@ -13989,7 +14865,7 @@
           <a:bodyPr wrap="square" lIns="0" tIns="0" rIns="0" bIns="0" rtlCol="0" anchor="t"/>
           <a:lstStyle/>
           <a:p>
-            <a:pPr indent="0" marL="0">
+            <a:pPr marL="0" indent="0">
               <a:buNone/>
             </a:pPr>
             <a:r>
@@ -14006,7 +14882,7 @@
             <a:endParaRPr lang="en-US" sz="1000" dirty="0"/>
           </a:p>
           <a:p>
-            <a:pPr indent="0" marL="0">
+            <a:pPr marL="0" indent="0">
               <a:buNone/>
             </a:pPr>
             <a:r>
@@ -14048,13 +14924,20 @@
             <a:prstDash val="solid"/>
           </a:ln>
           <a:effectLst>
-            <a:outerShdw sx="100000" sy="100000" kx="0" ky="0" algn="bl" rotWithShape="0" blurRad="101600" dist="38100" dir="8100000">
+            <a:outerShdw blurRad="101600" dist="38100" dir="8100000" algn="bl" rotWithShape="0">
               <a:srgbClr val="000000">
                 <a:alpha val="18000"/>
               </a:srgbClr>
             </a:outerShdw>
           </a:effectLst>
         </p:spPr>
+        <p:txBody>
+          <a:bodyPr/>
+          <a:lstStyle/>
+          <a:p>
+            <a:endParaRPr lang="ko-KR" altLang="en-US"/>
+          </a:p>
+        </p:txBody>
       </p:sp>
       <p:sp>
         <p:nvSpPr>
@@ -14080,6 +14963,13 @@
             <a:prstDash val="solid"/>
           </a:ln>
         </p:spPr>
+        <p:txBody>
+          <a:bodyPr/>
+          <a:lstStyle/>
+          <a:p>
+            <a:endParaRPr lang="ko-KR" altLang="en-US"/>
+          </a:p>
+        </p:txBody>
       </p:sp>
       <p:sp>
         <p:nvSpPr>
@@ -14102,7 +14992,7 @@
           <a:bodyPr wrap="square" lIns="0" tIns="0" rIns="0" bIns="0" rtlCol="0" anchor="ctr"/>
           <a:lstStyle/>
           <a:p>
-            <a:pPr indent="0" marL="0">
+            <a:pPr marL="0" indent="0">
               <a:buNone/>
             </a:pPr>
             <a:r>
@@ -14141,7 +15031,7 @@
           <a:bodyPr wrap="square" lIns="0" tIns="0" rIns="0" bIns="0" rtlCol="0" anchor="ctr"/>
           <a:lstStyle/>
           <a:p>
-            <a:pPr indent="0" marL="0">
+            <a:pPr marL="0" indent="0">
               <a:buNone/>
             </a:pPr>
             <a:r>
@@ -14180,7 +15070,7 @@
           <a:bodyPr wrap="square" lIns="0" tIns="0" rIns="0" bIns="0" rtlCol="0" anchor="t"/>
           <a:lstStyle/>
           <a:p>
-            <a:pPr indent="0" marL="0">
+            <a:pPr marL="0" indent="0">
               <a:buNone/>
             </a:pPr>
             <a:r>
@@ -14197,7 +15087,7 @@
             <a:endParaRPr lang="en-US" sz="1000" dirty="0"/>
           </a:p>
           <a:p>
-            <a:pPr indent="0" marL="0">
+            <a:pPr marL="0" indent="0">
               <a:buNone/>
             </a:pPr>
             <a:r>
@@ -14214,7 +15104,7 @@
             <a:endParaRPr lang="en-US" sz="1000" dirty="0"/>
           </a:p>
           <a:p>
-            <a:pPr indent="0" marL="0">
+            <a:pPr marL="0" indent="0">
               <a:buNone/>
             </a:pPr>
             <a:r>
@@ -14256,6 +15146,13 @@
             <a:prstDash val="solid"/>
           </a:ln>
         </p:spPr>
+        <p:txBody>
+          <a:bodyPr/>
+          <a:lstStyle/>
+          <a:p>
+            <a:endParaRPr lang="ko-KR" altLang="en-US"/>
+          </a:p>
+        </p:txBody>
       </p:sp>
       <p:sp>
         <p:nvSpPr>
@@ -14278,7 +15175,7 @@
           <a:bodyPr wrap="square" lIns="0" tIns="0" rIns="0" bIns="0" rtlCol="0" anchor="ctr"/>
           <a:lstStyle/>
           <a:p>
-            <a:pPr indent="0" marL="0">
+            <a:pPr marL="0" indent="0">
               <a:buNone/>
             </a:pPr>
             <a:r>
@@ -14320,13 +15217,20 @@
             <a:prstDash val="solid"/>
           </a:ln>
           <a:effectLst>
-            <a:outerShdw sx="100000" sy="100000" kx="0" ky="0" algn="bl" rotWithShape="0" blurRad="101600" dist="38100" dir="8100000">
+            <a:outerShdw blurRad="101600" dist="38100" dir="8100000" algn="bl" rotWithShape="0">
               <a:srgbClr val="000000">
                 <a:alpha val="18000"/>
               </a:srgbClr>
             </a:outerShdw>
           </a:effectLst>
         </p:spPr>
+        <p:txBody>
+          <a:bodyPr/>
+          <a:lstStyle/>
+          <a:p>
+            <a:endParaRPr lang="ko-KR" altLang="en-US"/>
+          </a:p>
+        </p:txBody>
       </p:sp>
       <p:sp>
         <p:nvSpPr>
@@ -14349,7 +15253,7 @@
           <a:bodyPr wrap="square" lIns="0" tIns="0" rIns="0" bIns="0" rtlCol="0" anchor="ctr"/>
           <a:lstStyle/>
           <a:p>
-            <a:pPr indent="0" marL="0">
+            <a:pPr marL="0" indent="0">
               <a:buNone/>
             </a:pPr>
             <a:r>
@@ -14388,7 +15292,7 @@
           <a:bodyPr wrap="square" lIns="0" tIns="0" rIns="0" bIns="0" rtlCol="0" anchor="ctr"/>
           <a:lstStyle/>
           <a:p>
-            <a:pPr indent="0" marL="0">
+            <a:pPr marL="0" indent="0">
               <a:buNone/>
             </a:pPr>
             <a:r>
@@ -14427,7 +15331,7 @@
           <a:bodyPr wrap="square" lIns="0" tIns="0" rIns="0" bIns="0" rtlCol="0" anchor="t"/>
           <a:lstStyle/>
           <a:p>
-            <a:pPr indent="0" marL="0">
+            <a:pPr marL="0" indent="0">
               <a:buNone/>
             </a:pPr>
             <a:r>
@@ -14469,13 +15373,20 @@
             <a:prstDash val="solid"/>
           </a:ln>
           <a:effectLst>
-            <a:outerShdw sx="100000" sy="100000" kx="0" ky="0" algn="bl" rotWithShape="0" blurRad="101600" dist="38100" dir="8100000">
+            <a:outerShdw blurRad="101600" dist="38100" dir="8100000" algn="bl" rotWithShape="0">
               <a:srgbClr val="000000">
                 <a:alpha val="18000"/>
               </a:srgbClr>
             </a:outerShdw>
           </a:effectLst>
         </p:spPr>
+        <p:txBody>
+          <a:bodyPr/>
+          <a:lstStyle/>
+          <a:p>
+            <a:endParaRPr lang="ko-KR" altLang="en-US"/>
+          </a:p>
+        </p:txBody>
       </p:sp>
       <p:sp>
         <p:nvSpPr>
@@ -14498,7 +15409,7 @@
           <a:bodyPr wrap="square" lIns="0" tIns="0" rIns="0" bIns="0" rtlCol="0" anchor="ctr"/>
           <a:lstStyle/>
           <a:p>
-            <a:pPr indent="0" marL="0">
+            <a:pPr marL="0" indent="0">
               <a:buNone/>
             </a:pPr>
             <a:r>
@@ -14537,7 +15448,7 @@
           <a:bodyPr wrap="square" lIns="0" tIns="0" rIns="0" bIns="0" rtlCol="0" anchor="ctr"/>
           <a:lstStyle/>
           <a:p>
-            <a:pPr indent="0" marL="0">
+            <a:pPr marL="0" indent="0">
               <a:buNone/>
             </a:pPr>
             <a:r>
@@ -14576,7 +15487,7 @@
           <a:bodyPr wrap="square" lIns="0" tIns="0" rIns="0" bIns="0" rtlCol="0" anchor="t"/>
           <a:lstStyle/>
           <a:p>
-            <a:pPr indent="0" marL="0">
+            <a:pPr marL="0" indent="0">
               <a:buNone/>
             </a:pPr>
             <a:r>
@@ -14618,13 +15529,20 @@
             <a:prstDash val="solid"/>
           </a:ln>
           <a:effectLst>
-            <a:outerShdw sx="100000" sy="100000" kx="0" ky="0" algn="bl" rotWithShape="0" blurRad="101600" dist="38100" dir="8100000">
+            <a:outerShdw blurRad="101600" dist="38100" dir="8100000" algn="bl" rotWithShape="0">
               <a:srgbClr val="000000">
                 <a:alpha val="18000"/>
               </a:srgbClr>
             </a:outerShdw>
           </a:effectLst>
         </p:spPr>
+        <p:txBody>
+          <a:bodyPr/>
+          <a:lstStyle/>
+          <a:p>
+            <a:endParaRPr lang="ko-KR" altLang="en-US"/>
+          </a:p>
+        </p:txBody>
       </p:sp>
       <p:sp>
         <p:nvSpPr>
@@ -14647,7 +15565,7 @@
           <a:bodyPr wrap="square" lIns="0" tIns="0" rIns="0" bIns="0" rtlCol="0" anchor="ctr"/>
           <a:lstStyle/>
           <a:p>
-            <a:pPr indent="0" marL="0">
+            <a:pPr marL="0" indent="0">
               <a:buNone/>
             </a:pPr>
             <a:r>
@@ -14686,7 +15604,7 @@
           <a:bodyPr wrap="square" lIns="0" tIns="0" rIns="0" bIns="0" rtlCol="0" anchor="ctr"/>
           <a:lstStyle/>
           <a:p>
-            <a:pPr indent="0" marL="0">
+            <a:pPr marL="0" indent="0">
               <a:buNone/>
             </a:pPr>
             <a:r>
@@ -14725,7 +15643,7 @@
           <a:bodyPr wrap="square" lIns="0" tIns="0" rIns="0" bIns="0" rtlCol="0" anchor="t"/>
           <a:lstStyle/>
           <a:p>
-            <a:pPr indent="0" marL="0">
+            <a:pPr marL="0" indent="0">
               <a:buNone/>
             </a:pPr>
             <a:r>
@@ -14767,13 +15685,20 @@
             <a:prstDash val="solid"/>
           </a:ln>
           <a:effectLst>
-            <a:outerShdw sx="100000" sy="100000" kx="0" ky="0" algn="bl" rotWithShape="0" blurRad="101600" dist="38100" dir="8100000">
+            <a:outerShdw blurRad="101600" dist="38100" dir="8100000" algn="bl" rotWithShape="0">
               <a:srgbClr val="000000">
                 <a:alpha val="18000"/>
               </a:srgbClr>
             </a:outerShdw>
           </a:effectLst>
         </p:spPr>
+        <p:txBody>
+          <a:bodyPr/>
+          <a:lstStyle/>
+          <a:p>
+            <a:endParaRPr lang="ko-KR" altLang="en-US"/>
+          </a:p>
+        </p:txBody>
       </p:sp>
       <p:sp>
         <p:nvSpPr>
@@ -14796,7 +15721,7 @@
           <a:bodyPr wrap="square" lIns="0" tIns="0" rIns="0" bIns="0" rtlCol="0" anchor="ctr"/>
           <a:lstStyle/>
           <a:p>
-            <a:pPr indent="0" marL="0">
+            <a:pPr marL="0" indent="0">
               <a:buNone/>
             </a:pPr>
             <a:r>
@@ -14835,7 +15760,7 @@
           <a:bodyPr wrap="square" lIns="0" tIns="0" rIns="0" bIns="0" rtlCol="0" anchor="ctr"/>
           <a:lstStyle/>
           <a:p>
-            <a:pPr indent="0" marL="0">
+            <a:pPr marL="0" indent="0">
               <a:buNone/>
             </a:pPr>
             <a:r>
@@ -14874,7 +15799,7 @@
           <a:bodyPr wrap="square" lIns="0" tIns="0" rIns="0" bIns="0" rtlCol="0" anchor="t"/>
           <a:lstStyle/>
           <a:p>
-            <a:pPr indent="0" marL="0">
+            <a:pPr marL="0" indent="0">
               <a:buNone/>
             </a:pPr>
             <a:r>
@@ -14892,6 +15817,126 @@
           </a:p>
         </p:txBody>
       </p:sp>
+      <p:pic>
+        <p:nvPicPr>
+          <p:cNvPr id="41" name="그림 40">
+            <a:extLst>
+              <a:ext uri="{FF2B5EF4-FFF2-40B4-BE49-F238E27FC236}">
+                <a16:creationId xmlns:a16="http://schemas.microsoft.com/office/drawing/2014/main" id="{B30B1546-C5EA-105D-A14B-12D85C91C968}"/>
+              </a:ext>
+            </a:extLst>
+          </p:cNvPr>
+          <p:cNvPicPr>
+            <a:picLocks noChangeAspect="1"/>
+          </p:cNvPicPr>
+          <p:nvPr/>
+        </p:nvPicPr>
+        <p:blipFill>
+          <a:blip r:embed="rId3"/>
+          <a:stretch>
+            <a:fillRect/>
+          </a:stretch>
+        </p:blipFill>
+        <p:spPr>
+          <a:xfrm>
+            <a:off x="993648" y="1950720"/>
+            <a:ext cx="1219200" cy="1219200"/>
+          </a:xfrm>
+          <a:prstGeom prst="rect">
+            <a:avLst/>
+          </a:prstGeom>
+        </p:spPr>
+      </p:pic>
+      <p:pic>
+        <p:nvPicPr>
+          <p:cNvPr id="42" name="그림 41">
+            <a:extLst>
+              <a:ext uri="{FF2B5EF4-FFF2-40B4-BE49-F238E27FC236}">
+                <a16:creationId xmlns:a16="http://schemas.microsoft.com/office/drawing/2014/main" id="{3595D4CC-2C84-3F4C-5EDA-CAA58A137CB1}"/>
+              </a:ext>
+            </a:extLst>
+          </p:cNvPr>
+          <p:cNvPicPr>
+            <a:picLocks noChangeAspect="1"/>
+          </p:cNvPicPr>
+          <p:nvPr/>
+        </p:nvPicPr>
+        <p:blipFill>
+          <a:blip r:embed="rId4">
+            <a:duotone>
+              <a:prstClr val="black"/>
+              <a:schemeClr val="accent2">
+                <a:tint val="45000"/>
+                <a:satMod val="400000"/>
+              </a:schemeClr>
+            </a:duotone>
+            <a:extLst>
+              <a:ext uri="{BEBA8EAE-BF5A-486C-A8C5-ECC9F3942E4B}">
+                <a14:imgProps xmlns:a14="http://schemas.microsoft.com/office/drawing/2010/main">
+                  <a14:imgLayer r:embed="rId5">
+                    <a14:imgEffect>
+                      <a14:colorTemperature colorTemp="11400"/>
+                    </a14:imgEffect>
+                    <a14:imgEffect>
+                      <a14:saturation sat="242000"/>
+                    </a14:imgEffect>
+                  </a14:imgLayer>
+                </a14:imgProps>
+              </a:ext>
+            </a:extLst>
+          </a:blip>
+          <a:stretch>
+            <a:fillRect/>
+          </a:stretch>
+        </p:blipFill>
+        <p:spPr>
+          <a:xfrm>
+            <a:off x="3934968" y="1950720"/>
+            <a:ext cx="1219200" cy="1219200"/>
+          </a:xfrm>
+          <a:prstGeom prst="rect">
+            <a:avLst/>
+          </a:prstGeom>
+        </p:spPr>
+      </p:pic>
+      <p:pic>
+        <p:nvPicPr>
+          <p:cNvPr id="43" name="그림 42">
+            <a:extLst>
+              <a:ext uri="{FF2B5EF4-FFF2-40B4-BE49-F238E27FC236}">
+                <a16:creationId xmlns:a16="http://schemas.microsoft.com/office/drawing/2014/main" id="{D5833F11-8FA2-D4F8-90E5-18F2D945FD2E}"/>
+              </a:ext>
+            </a:extLst>
+          </p:cNvPr>
+          <p:cNvPicPr>
+            <a:picLocks noChangeAspect="1"/>
+          </p:cNvPicPr>
+          <p:nvPr/>
+        </p:nvPicPr>
+        <p:blipFill>
+          <a:blip r:embed="rId3">
+            <a:duotone>
+              <a:prstClr val="black"/>
+              <a:schemeClr val="accent6">
+                <a:tint val="45000"/>
+                <a:satMod val="400000"/>
+              </a:schemeClr>
+            </a:duotone>
+          </a:blip>
+          <a:stretch>
+            <a:fillRect/>
+          </a:stretch>
+        </p:blipFill>
+        <p:spPr>
+          <a:xfrm>
+            <a:off x="6931152" y="1950720"/>
+            <a:ext cx="1219200" cy="1219200"/>
+          </a:xfrm>
+          <a:prstGeom prst="rect">
+            <a:avLst/>
+          </a:prstGeom>
+        </p:spPr>
+      </p:pic>
     </p:spTree>
   </p:cSld>
   <p:clrMapOvr>
@@ -14908,6 +15953,7 @@
         <a:solidFill>
           <a:srgbClr val="1A2B4A"/>
         </a:solidFill>
+        <a:effectLst/>
       </p:bgPr>
     </p:bg>
     <p:spTree>
@@ -14948,6 +15994,13 @@
             <a:prstDash val="solid"/>
           </a:ln>
         </p:spPr>
+        <p:txBody>
+          <a:bodyPr/>
+          <a:lstStyle/>
+          <a:p>
+            <a:endParaRPr lang="ko-KR" altLang="en-US"/>
+          </a:p>
+        </p:txBody>
       </p:sp>
       <p:sp>
         <p:nvSpPr>
@@ -14970,7 +16023,7 @@
           <a:bodyPr wrap="square" lIns="0" tIns="0" rIns="0" bIns="0" rtlCol="0" anchor="ctr"/>
           <a:lstStyle/>
           <a:p>
-            <a:pPr indent="0" marL="0">
+            <a:pPr marL="0" indent="0">
               <a:buNone/>
             </a:pPr>
             <a:r>
@@ -15009,7 +16062,7 @@
           <a:bodyPr wrap="square" lIns="0" tIns="0" rIns="0" bIns="0" rtlCol="0" anchor="ctr"/>
           <a:lstStyle/>
           <a:p>
-            <a:pPr indent="0" marL="0">
+            <a:pPr marL="0" indent="0">
               <a:buNone/>
             </a:pPr>
             <a:r>
@@ -15051,13 +16104,20 @@
             <a:prstDash val="solid"/>
           </a:ln>
           <a:effectLst>
-            <a:outerShdw sx="100000" sy="100000" kx="0" ky="0" algn="bl" rotWithShape="0" blurRad="101600" dist="38100" dir="8100000">
+            <a:outerShdw blurRad="101600" dist="38100" dir="8100000" algn="bl" rotWithShape="0">
               <a:srgbClr val="000000">
                 <a:alpha val="18000"/>
               </a:srgbClr>
             </a:outerShdw>
           </a:effectLst>
         </p:spPr>
+        <p:txBody>
+          <a:bodyPr/>
+          <a:lstStyle/>
+          <a:p>
+            <a:endParaRPr lang="ko-KR" altLang="en-US"/>
+          </a:p>
+        </p:txBody>
       </p:sp>
       <p:sp>
         <p:nvSpPr>
@@ -15083,6 +16143,13 @@
             <a:prstDash val="solid"/>
           </a:ln>
         </p:spPr>
+        <p:txBody>
+          <a:bodyPr/>
+          <a:lstStyle/>
+          <a:p>
+            <a:endParaRPr lang="ko-KR" altLang="en-US"/>
+          </a:p>
+        </p:txBody>
       </p:sp>
       <p:sp>
         <p:nvSpPr>
@@ -15105,7 +16172,7 @@
           <a:bodyPr wrap="square" lIns="0" tIns="0" rIns="0" bIns="0" rtlCol="0" anchor="ctr"/>
           <a:lstStyle/>
           <a:p>
-            <a:pPr indent="0" marL="0">
+            <a:pPr marL="0" indent="0">
               <a:buNone/>
             </a:pPr>
             <a:r>
@@ -15144,7 +16211,7 @@
           <a:bodyPr wrap="square" lIns="0" tIns="0" rIns="0" bIns="0" rtlCol="0" anchor="t"/>
           <a:lstStyle/>
           <a:p>
-            <a:pPr indent="0" marL="0">
+            <a:pPr marL="0" indent="0">
               <a:buNone/>
             </a:pPr>
             <a:r>
@@ -15186,6 +16253,13 @@
             <a:prstDash val="solid"/>
           </a:ln>
         </p:spPr>
+        <p:txBody>
+          <a:bodyPr/>
+          <a:lstStyle/>
+          <a:p>
+            <a:endParaRPr lang="ko-KR" altLang="en-US"/>
+          </a:p>
+        </p:txBody>
       </p:sp>
       <p:sp>
         <p:nvSpPr>
@@ -15208,7 +16282,7 @@
           <a:bodyPr wrap="square" lIns="0" tIns="0" rIns="0" bIns="0" rtlCol="0" anchor="ctr"/>
           <a:lstStyle/>
           <a:p>
-            <a:pPr indent="0" marL="0">
+            <a:pPr marL="0" indent="0">
               <a:buNone/>
             </a:pPr>
             <a:r>
@@ -15250,13 +16324,20 @@
             <a:prstDash val="solid"/>
           </a:ln>
           <a:effectLst>
-            <a:outerShdw sx="100000" sy="100000" kx="0" ky="0" algn="bl" rotWithShape="0" blurRad="101600" dist="38100" dir="8100000">
+            <a:outerShdw blurRad="101600" dist="38100" dir="8100000" algn="bl" rotWithShape="0">
               <a:srgbClr val="000000">
                 <a:alpha val="18000"/>
               </a:srgbClr>
             </a:outerShdw>
           </a:effectLst>
         </p:spPr>
+        <p:txBody>
+          <a:bodyPr/>
+          <a:lstStyle/>
+          <a:p>
+            <a:endParaRPr lang="ko-KR" altLang="en-US"/>
+          </a:p>
+        </p:txBody>
       </p:sp>
       <p:sp>
         <p:nvSpPr>
@@ -15282,6 +16363,13 @@
             <a:prstDash val="solid"/>
           </a:ln>
         </p:spPr>
+        <p:txBody>
+          <a:bodyPr/>
+          <a:lstStyle/>
+          <a:p>
+            <a:endParaRPr lang="ko-KR" altLang="en-US"/>
+          </a:p>
+        </p:txBody>
       </p:sp>
       <p:sp>
         <p:nvSpPr>
@@ -15304,7 +16392,7 @@
           <a:bodyPr wrap="square" lIns="0" tIns="0" rIns="0" bIns="0" rtlCol="0" anchor="ctr"/>
           <a:lstStyle/>
           <a:p>
-            <a:pPr indent="0" marL="0">
+            <a:pPr marL="0" indent="0">
               <a:buNone/>
             </a:pPr>
             <a:r>
@@ -15343,7 +16431,7 @@
           <a:bodyPr wrap="square" lIns="0" tIns="0" rIns="0" bIns="0" rtlCol="0" anchor="t"/>
           <a:lstStyle/>
           <a:p>
-            <a:pPr indent="0" marL="0">
+            <a:pPr marL="0" indent="0">
               <a:buNone/>
             </a:pPr>
             <a:r>
@@ -15385,6 +16473,13 @@
             <a:prstDash val="solid"/>
           </a:ln>
         </p:spPr>
+        <p:txBody>
+          <a:bodyPr/>
+          <a:lstStyle/>
+          <a:p>
+            <a:endParaRPr lang="ko-KR" altLang="en-US"/>
+          </a:p>
+        </p:txBody>
       </p:sp>
       <p:sp>
         <p:nvSpPr>
@@ -15407,7 +16502,7 @@
           <a:bodyPr wrap="square" lIns="0" tIns="0" rIns="0" bIns="0" rtlCol="0" anchor="ctr"/>
           <a:lstStyle/>
           <a:p>
-            <a:pPr indent="0" marL="0">
+            <a:pPr marL="0" indent="0">
               <a:buNone/>
             </a:pPr>
             <a:r>
@@ -15449,13 +16544,20 @@
             <a:prstDash val="solid"/>
           </a:ln>
           <a:effectLst>
-            <a:outerShdw sx="100000" sy="100000" kx="0" ky="0" algn="bl" rotWithShape="0" blurRad="101600" dist="38100" dir="8100000">
+            <a:outerShdw blurRad="101600" dist="38100" dir="8100000" algn="bl" rotWithShape="0">
               <a:srgbClr val="000000">
                 <a:alpha val="18000"/>
               </a:srgbClr>
             </a:outerShdw>
           </a:effectLst>
         </p:spPr>
+        <p:txBody>
+          <a:bodyPr/>
+          <a:lstStyle/>
+          <a:p>
+            <a:endParaRPr lang="ko-KR" altLang="en-US"/>
+          </a:p>
+        </p:txBody>
       </p:sp>
       <p:sp>
         <p:nvSpPr>
@@ -15481,6 +16583,13 @@
             <a:prstDash val="solid"/>
           </a:ln>
         </p:spPr>
+        <p:txBody>
+          <a:bodyPr/>
+          <a:lstStyle/>
+          <a:p>
+            <a:endParaRPr lang="ko-KR" altLang="en-US"/>
+          </a:p>
+        </p:txBody>
       </p:sp>
       <p:sp>
         <p:nvSpPr>
@@ -15503,7 +16612,7 @@
           <a:bodyPr wrap="square" lIns="0" tIns="0" rIns="0" bIns="0" rtlCol="0" anchor="ctr"/>
           <a:lstStyle/>
           <a:p>
-            <a:pPr indent="0" marL="0">
+            <a:pPr marL="0" indent="0">
               <a:buNone/>
             </a:pPr>
             <a:r>
@@ -15542,7 +16651,7 @@
           <a:bodyPr wrap="square" lIns="0" tIns="0" rIns="0" bIns="0" rtlCol="0" anchor="t"/>
           <a:lstStyle/>
           <a:p>
-            <a:pPr indent="0" marL="0">
+            <a:pPr marL="0" indent="0">
               <a:buNone/>
             </a:pPr>
             <a:r>
@@ -15584,6 +16693,13 @@
             <a:prstDash val="solid"/>
           </a:ln>
         </p:spPr>
+        <p:txBody>
+          <a:bodyPr/>
+          <a:lstStyle/>
+          <a:p>
+            <a:endParaRPr lang="ko-KR" altLang="en-US"/>
+          </a:p>
+        </p:txBody>
       </p:sp>
       <p:sp>
         <p:nvSpPr>
@@ -15606,7 +16722,7 @@
           <a:bodyPr wrap="square" lIns="0" tIns="0" rIns="0" bIns="0" rtlCol="0" anchor="ctr"/>
           <a:lstStyle/>
           <a:p>
-            <a:pPr indent="0" marL="0">
+            <a:pPr marL="0" indent="0">
               <a:buNone/>
             </a:pPr>
             <a:r>
@@ -15648,13 +16764,20 @@
             <a:prstDash val="solid"/>
           </a:ln>
           <a:effectLst>
-            <a:outerShdw sx="100000" sy="100000" kx="0" ky="0" algn="bl" rotWithShape="0" blurRad="101600" dist="38100" dir="8100000">
+            <a:outerShdw blurRad="101600" dist="38100" dir="8100000" algn="bl" rotWithShape="0">
               <a:srgbClr val="000000">
                 <a:alpha val="18000"/>
               </a:srgbClr>
             </a:outerShdw>
           </a:effectLst>
         </p:spPr>
+        <p:txBody>
+          <a:bodyPr/>
+          <a:lstStyle/>
+          <a:p>
+            <a:endParaRPr lang="ko-KR" altLang="en-US"/>
+          </a:p>
+        </p:txBody>
       </p:sp>
       <p:sp>
         <p:nvSpPr>
@@ -15680,6 +16803,13 @@
             <a:prstDash val="solid"/>
           </a:ln>
         </p:spPr>
+        <p:txBody>
+          <a:bodyPr/>
+          <a:lstStyle/>
+          <a:p>
+            <a:endParaRPr lang="ko-KR" altLang="en-US"/>
+          </a:p>
+        </p:txBody>
       </p:sp>
       <p:sp>
         <p:nvSpPr>
@@ -15702,7 +16832,7 @@
           <a:bodyPr wrap="square" lIns="0" tIns="0" rIns="0" bIns="0" rtlCol="0" anchor="ctr"/>
           <a:lstStyle/>
           <a:p>
-            <a:pPr indent="0" marL="0">
+            <a:pPr marL="0" indent="0">
               <a:buNone/>
             </a:pPr>
             <a:r>
@@ -15741,7 +16871,7 @@
           <a:bodyPr wrap="square" lIns="0" tIns="0" rIns="0" bIns="0" rtlCol="0" anchor="t"/>
           <a:lstStyle/>
           <a:p>
-            <a:pPr indent="0" marL="0">
+            <a:pPr marL="0" indent="0">
               <a:buNone/>
             </a:pPr>
             <a:r>
@@ -15783,6 +16913,13 @@
             <a:prstDash val="solid"/>
           </a:ln>
         </p:spPr>
+        <p:txBody>
+          <a:bodyPr/>
+          <a:lstStyle/>
+          <a:p>
+            <a:endParaRPr lang="ko-KR" altLang="en-US"/>
+          </a:p>
+        </p:txBody>
       </p:sp>
       <p:sp>
         <p:nvSpPr>
@@ -15805,7 +16942,7 @@
           <a:bodyPr wrap="square" lIns="0" tIns="0" rIns="0" bIns="0" rtlCol="0" anchor="ctr"/>
           <a:lstStyle/>
           <a:p>
-            <a:pPr indent="0" marL="0">
+            <a:pPr marL="0" indent="0">
               <a:buNone/>
             </a:pPr>
             <a:r>
@@ -15847,13 +16984,20 @@
             <a:prstDash val="solid"/>
           </a:ln>
           <a:effectLst>
-            <a:outerShdw sx="100000" sy="100000" kx="0" ky="0" algn="bl" rotWithShape="0" blurRad="101600" dist="38100" dir="8100000">
+            <a:outerShdw blurRad="101600" dist="38100" dir="8100000" algn="bl" rotWithShape="0">
               <a:srgbClr val="000000">
                 <a:alpha val="18000"/>
               </a:srgbClr>
             </a:outerShdw>
           </a:effectLst>
         </p:spPr>
+        <p:txBody>
+          <a:bodyPr/>
+          <a:lstStyle/>
+          <a:p>
+            <a:endParaRPr lang="ko-KR" altLang="en-US"/>
+          </a:p>
+        </p:txBody>
       </p:sp>
       <p:sp>
         <p:nvSpPr>
@@ -15879,6 +17023,13 @@
             <a:prstDash val="solid"/>
           </a:ln>
         </p:spPr>
+        <p:txBody>
+          <a:bodyPr/>
+          <a:lstStyle/>
+          <a:p>
+            <a:endParaRPr lang="ko-KR" altLang="en-US"/>
+          </a:p>
+        </p:txBody>
       </p:sp>
       <p:sp>
         <p:nvSpPr>
@@ -15901,7 +17052,7 @@
           <a:bodyPr wrap="square" lIns="0" tIns="0" rIns="0" bIns="0" rtlCol="0" anchor="ctr"/>
           <a:lstStyle/>
           <a:p>
-            <a:pPr indent="0" marL="0">
+            <a:pPr marL="0" indent="0">
               <a:buNone/>
             </a:pPr>
             <a:r>
@@ -15940,7 +17091,7 @@
           <a:bodyPr wrap="square" lIns="0" tIns="0" rIns="0" bIns="0" rtlCol="0" anchor="t"/>
           <a:lstStyle/>
           <a:p>
-            <a:pPr indent="0" marL="0">
+            <a:pPr marL="0" indent="0">
               <a:buNone/>
             </a:pPr>
             <a:r>
@@ -15982,6 +17133,13 @@
             <a:prstDash val="solid"/>
           </a:ln>
         </p:spPr>
+        <p:txBody>
+          <a:bodyPr/>
+          <a:lstStyle/>
+          <a:p>
+            <a:endParaRPr lang="ko-KR" altLang="en-US"/>
+          </a:p>
+        </p:txBody>
       </p:sp>
       <p:sp>
         <p:nvSpPr>
@@ -16004,7 +17162,7 @@
           <a:bodyPr wrap="square" lIns="0" tIns="0" rIns="0" bIns="0" rtlCol="0" anchor="ctr"/>
           <a:lstStyle/>
           <a:p>
-            <a:pPr indent="0" marL="0">
+            <a:pPr marL="0" indent="0">
               <a:buNone/>
             </a:pPr>
             <a:r>
@@ -16046,13 +17204,20 @@
             <a:prstDash val="solid"/>
           </a:ln>
           <a:effectLst>
-            <a:outerShdw sx="100000" sy="100000" kx="0" ky="0" algn="bl" rotWithShape="0" blurRad="101600" dist="38100" dir="8100000">
+            <a:outerShdw blurRad="101600" dist="38100" dir="8100000" algn="bl" rotWithShape="0">
               <a:srgbClr val="000000">
                 <a:alpha val="18000"/>
               </a:srgbClr>
             </a:outerShdw>
           </a:effectLst>
         </p:spPr>
+        <p:txBody>
+          <a:bodyPr/>
+          <a:lstStyle/>
+          <a:p>
+            <a:endParaRPr lang="ko-KR" altLang="en-US"/>
+          </a:p>
+        </p:txBody>
       </p:sp>
       <p:sp>
         <p:nvSpPr>
@@ -16078,6 +17243,13 @@
             <a:prstDash val="solid"/>
           </a:ln>
         </p:spPr>
+        <p:txBody>
+          <a:bodyPr/>
+          <a:lstStyle/>
+          <a:p>
+            <a:endParaRPr lang="ko-KR" altLang="en-US"/>
+          </a:p>
+        </p:txBody>
       </p:sp>
       <p:sp>
         <p:nvSpPr>
@@ -16100,7 +17272,7 @@
           <a:bodyPr wrap="square" lIns="0" tIns="0" rIns="0" bIns="0" rtlCol="0" anchor="ctr"/>
           <a:lstStyle/>
           <a:p>
-            <a:pPr indent="0" marL="0">
+            <a:pPr marL="0" indent="0">
               <a:buNone/>
             </a:pPr>
             <a:r>
@@ -16139,7 +17311,7 @@
           <a:bodyPr wrap="square" lIns="0" tIns="0" rIns="0" bIns="0" rtlCol="0" anchor="t"/>
           <a:lstStyle/>
           <a:p>
-            <a:pPr indent="0" marL="0">
+            <a:pPr marL="0" indent="0">
               <a:buNone/>
             </a:pPr>
             <a:r>
@@ -16181,6 +17353,13 @@
             <a:prstDash val="solid"/>
           </a:ln>
         </p:spPr>
+        <p:txBody>
+          <a:bodyPr/>
+          <a:lstStyle/>
+          <a:p>
+            <a:endParaRPr lang="ko-KR" altLang="en-US"/>
+          </a:p>
+        </p:txBody>
       </p:sp>
       <p:sp>
         <p:nvSpPr>
@@ -16203,7 +17382,7 @@
           <a:bodyPr wrap="square" lIns="0" tIns="0" rIns="0" bIns="0" rtlCol="0" anchor="ctr"/>
           <a:lstStyle/>
           <a:p>
-            <a:pPr indent="0" marL="0">
+            <a:pPr marL="0" indent="0">
               <a:buNone/>
             </a:pPr>
             <a:r>
@@ -16522,4 +17701,319 @@
     </a:ext>
   </a:extLst>
 </a:theme>
+</file>
+
+<file path=ppt/theme/theme2.xml><?xml version="1.0" encoding="utf-8"?>
+<a:theme xmlns:a="http://schemas.openxmlformats.org/drawingml/2006/main" name="Office 테마">
+  <a:themeElements>
+    <a:clrScheme name="Office">
+      <a:dk1>
+        <a:sysClr val="windowText" lastClr="000000"/>
+      </a:dk1>
+      <a:lt1>
+        <a:sysClr val="window" lastClr="FFFFFF"/>
+      </a:lt1>
+      <a:dk2>
+        <a:srgbClr val="0E2841"/>
+      </a:dk2>
+      <a:lt2>
+        <a:srgbClr val="E8E8E8"/>
+      </a:lt2>
+      <a:accent1>
+        <a:srgbClr val="156082"/>
+      </a:accent1>
+      <a:accent2>
+        <a:srgbClr val="E97132"/>
+      </a:accent2>
+      <a:accent3>
+        <a:srgbClr val="196B24"/>
+      </a:accent3>
+      <a:accent4>
+        <a:srgbClr val="0F9ED5"/>
+      </a:accent4>
+      <a:accent5>
+        <a:srgbClr val="A02B93"/>
+      </a:accent5>
+      <a:accent6>
+        <a:srgbClr val="4EA72E"/>
+      </a:accent6>
+      <a:hlink>
+        <a:srgbClr val="467886"/>
+      </a:hlink>
+      <a:folHlink>
+        <a:srgbClr val="96607D"/>
+      </a:folHlink>
+    </a:clrScheme>
+    <a:fontScheme name="Office">
+      <a:majorFont>
+        <a:latin typeface="맑은 고딕" panose="02110004020202020204"/>
+        <a:ea typeface=""/>
+        <a:cs typeface=""/>
+        <a:font script="Jpan" typeface="游ゴシック Light"/>
+        <a:font script="Hang" typeface="맑은 고딕"/>
+        <a:font script="Hans" typeface="等线 Light"/>
+        <a:font script="Hant" typeface="新細明體"/>
+        <a:font script="Arab" typeface="Times New Roman"/>
+        <a:font script="Hebr" typeface="Times New Roman"/>
+        <a:font script="Thai" typeface="Angsana New"/>
+        <a:font script="Ethi" typeface="Nyala"/>
+        <a:font script="Beng" typeface="Vrinda"/>
+        <a:font script="Gujr" typeface="Shruti"/>
+        <a:font script="Khmr" typeface="MoolBoran"/>
+        <a:font script="Knda" typeface="Tunga"/>
+        <a:font script="Guru" typeface="Raavi"/>
+        <a:font script="Cans" typeface="Euphemia"/>
+        <a:font script="Cher" typeface="Plantagenet Cherokee"/>
+        <a:font script="Yiii" typeface="Microsoft Yi Baiti"/>
+        <a:font script="Tibt" typeface="Microsoft Himalaya"/>
+        <a:font script="Thaa" typeface="MV Boli"/>
+        <a:font script="Deva" typeface="Mangal"/>
+        <a:font script="Telu" typeface="Gautami"/>
+        <a:font script="Taml" typeface="Latha"/>
+        <a:font script="Syrc" typeface="Estrangelo Edessa"/>
+        <a:font script="Orya" typeface="Kalinga"/>
+        <a:font script="Mlym" typeface="Kartika"/>
+        <a:font script="Laoo" typeface="DokChampa"/>
+        <a:font script="Sinh" typeface="Iskoola Pota"/>
+        <a:font script="Mong" typeface="Mongolian Baiti"/>
+        <a:font script="Viet" typeface="Times New Roman"/>
+        <a:font script="Uigh" typeface="Microsoft Uighur"/>
+        <a:font script="Geor" typeface="Sylfaen"/>
+        <a:font script="Armn" typeface="Arial"/>
+        <a:font script="Bugi" typeface="Leelawadee UI"/>
+        <a:font script="Bopo" typeface="Microsoft JhengHei"/>
+        <a:font script="Java" typeface="Javanese Text"/>
+        <a:font script="Lisu" typeface="Segoe UI"/>
+        <a:font script="Mymr" typeface="Myanmar Text"/>
+        <a:font script="Nkoo" typeface="Ebrima"/>
+        <a:font script="Olck" typeface="Nirmala UI"/>
+        <a:font script="Osma" typeface="Ebrima"/>
+        <a:font script="Phag" typeface="Phagspa"/>
+        <a:font script="Syrn" typeface="Estrangelo Edessa"/>
+        <a:font script="Syrj" typeface="Estrangelo Edessa"/>
+        <a:font script="Syre" typeface="Estrangelo Edessa"/>
+        <a:font script="Sora" typeface="Nirmala UI"/>
+        <a:font script="Tale" typeface="Microsoft Tai Le"/>
+        <a:font script="Talu" typeface="Microsoft New Tai Lue"/>
+        <a:font script="Tfng" typeface="Ebrima"/>
+      </a:majorFont>
+      <a:minorFont>
+        <a:latin typeface="맑은 고딕" panose="02110004020202020204"/>
+        <a:ea typeface=""/>
+        <a:cs typeface=""/>
+        <a:font script="Jpan" typeface="游ゴシック"/>
+        <a:font script="Hang" typeface="맑은 고딕"/>
+        <a:font script="Hans" typeface="等线"/>
+        <a:font script="Hant" typeface="新細明體"/>
+        <a:font script="Arab" typeface="Arial"/>
+        <a:font script="Hebr" typeface="Arial"/>
+        <a:font script="Thai" typeface="Cordia New"/>
+        <a:font script="Ethi" typeface="Nyala"/>
+        <a:font script="Beng" typeface="Vrinda"/>
+        <a:font script="Gujr" typeface="Shruti"/>
+        <a:font script="Khmr" typeface="DaunPenh"/>
+        <a:font script="Knda" typeface="Tunga"/>
+        <a:font script="Guru" typeface="Raavi"/>
+        <a:font script="Cans" typeface="Euphemia"/>
+        <a:font script="Cher" typeface="Plantagenet Cherokee"/>
+        <a:font script="Yiii" typeface="Microsoft Yi Baiti"/>
+        <a:font script="Tibt" typeface="Microsoft Himalaya"/>
+        <a:font script="Thaa" typeface="MV Boli"/>
+        <a:font script="Deva" typeface="Mangal"/>
+        <a:font script="Telu" typeface="Gautami"/>
+        <a:font script="Taml" typeface="Latha"/>
+        <a:font script="Syrc" typeface="Estrangelo Edessa"/>
+        <a:font script="Orya" typeface="Kalinga"/>
+        <a:font script="Mlym" typeface="Kartika"/>
+        <a:font script="Laoo" typeface="DokChampa"/>
+        <a:font script="Sinh" typeface="Iskoola Pota"/>
+        <a:font script="Mong" typeface="Mongolian Baiti"/>
+        <a:font script="Viet" typeface="Arial"/>
+        <a:font script="Uigh" typeface="Microsoft Uighur"/>
+        <a:font script="Geor" typeface="Sylfaen"/>
+        <a:font script="Armn" typeface="Arial"/>
+        <a:font script="Bugi" typeface="Leelawadee UI"/>
+        <a:font script="Bopo" typeface="Microsoft JhengHei"/>
+        <a:font script="Java" typeface="Javanese Text"/>
+        <a:font script="Lisu" typeface="Segoe UI"/>
+        <a:font script="Mymr" typeface="Myanmar Text"/>
+        <a:font script="Nkoo" typeface="Ebrima"/>
+        <a:font script="Olck" typeface="Nirmala UI"/>
+        <a:font script="Osma" typeface="Ebrima"/>
+        <a:font script="Phag" typeface="Phagspa"/>
+        <a:font script="Syrn" typeface="Estrangelo Edessa"/>
+        <a:font script="Syrj" typeface="Estrangelo Edessa"/>
+        <a:font script="Syre" typeface="Estrangelo Edessa"/>
+        <a:font script="Sora" typeface="Nirmala UI"/>
+        <a:font script="Tale" typeface="Microsoft Tai Le"/>
+        <a:font script="Talu" typeface="Microsoft New Tai Lue"/>
+        <a:font script="Tfng" typeface="Ebrima"/>
+      </a:minorFont>
+    </a:fontScheme>
+    <a:fmtScheme name="Office">
+      <a:fillStyleLst>
+        <a:solidFill>
+          <a:schemeClr val="phClr"/>
+        </a:solidFill>
+        <a:gradFill rotWithShape="1">
+          <a:gsLst>
+            <a:gs pos="0">
+              <a:schemeClr val="phClr">
+                <a:lumMod val="110000"/>
+                <a:satMod val="105000"/>
+                <a:tint val="67000"/>
+              </a:schemeClr>
+            </a:gs>
+            <a:gs pos="50000">
+              <a:schemeClr val="phClr">
+                <a:lumMod val="105000"/>
+                <a:satMod val="103000"/>
+                <a:tint val="73000"/>
+              </a:schemeClr>
+            </a:gs>
+            <a:gs pos="100000">
+              <a:schemeClr val="phClr">
+                <a:lumMod val="105000"/>
+                <a:satMod val="109000"/>
+                <a:tint val="81000"/>
+              </a:schemeClr>
+            </a:gs>
+          </a:gsLst>
+          <a:lin ang="5400000" scaled="0"/>
+        </a:gradFill>
+        <a:gradFill rotWithShape="1">
+          <a:gsLst>
+            <a:gs pos="0">
+              <a:schemeClr val="phClr">
+                <a:satMod val="103000"/>
+                <a:lumMod val="102000"/>
+                <a:tint val="94000"/>
+              </a:schemeClr>
+            </a:gs>
+            <a:gs pos="50000">
+              <a:schemeClr val="phClr">
+                <a:satMod val="110000"/>
+                <a:lumMod val="100000"/>
+                <a:shade val="100000"/>
+              </a:schemeClr>
+            </a:gs>
+            <a:gs pos="100000">
+              <a:schemeClr val="phClr">
+                <a:lumMod val="99000"/>
+                <a:satMod val="120000"/>
+                <a:shade val="78000"/>
+              </a:schemeClr>
+            </a:gs>
+          </a:gsLst>
+          <a:lin ang="5400000" scaled="0"/>
+        </a:gradFill>
+      </a:fillStyleLst>
+      <a:lnStyleLst>
+        <a:ln w="12700" cap="flat" cmpd="sng" algn="ctr">
+          <a:solidFill>
+            <a:schemeClr val="phClr"/>
+          </a:solidFill>
+          <a:prstDash val="solid"/>
+          <a:miter lim="800000"/>
+        </a:ln>
+        <a:ln w="19050" cap="flat" cmpd="sng" algn="ctr">
+          <a:solidFill>
+            <a:schemeClr val="phClr"/>
+          </a:solidFill>
+          <a:prstDash val="solid"/>
+          <a:miter lim="800000"/>
+        </a:ln>
+        <a:ln w="25400" cap="flat" cmpd="sng" algn="ctr">
+          <a:solidFill>
+            <a:schemeClr val="phClr"/>
+          </a:solidFill>
+          <a:prstDash val="solid"/>
+          <a:miter lim="800000"/>
+        </a:ln>
+      </a:lnStyleLst>
+      <a:effectStyleLst>
+        <a:effectStyle>
+          <a:effectLst/>
+        </a:effectStyle>
+        <a:effectStyle>
+          <a:effectLst/>
+        </a:effectStyle>
+        <a:effectStyle>
+          <a:effectLst>
+            <a:outerShdw blurRad="57150" dist="19050" dir="5400000" algn="ctr" rotWithShape="0">
+              <a:srgbClr val="000000">
+                <a:alpha val="63000"/>
+              </a:srgbClr>
+            </a:outerShdw>
+          </a:effectLst>
+        </a:effectStyle>
+      </a:effectStyleLst>
+      <a:bgFillStyleLst>
+        <a:solidFill>
+          <a:schemeClr val="phClr"/>
+        </a:solidFill>
+        <a:solidFill>
+          <a:schemeClr val="phClr">
+            <a:tint val="95000"/>
+            <a:satMod val="170000"/>
+          </a:schemeClr>
+        </a:solidFill>
+        <a:gradFill rotWithShape="1">
+          <a:gsLst>
+            <a:gs pos="0">
+              <a:schemeClr val="phClr">
+                <a:tint val="93000"/>
+                <a:satMod val="150000"/>
+                <a:shade val="98000"/>
+                <a:lumMod val="102000"/>
+              </a:schemeClr>
+            </a:gs>
+            <a:gs pos="50000">
+              <a:schemeClr val="phClr">
+                <a:tint val="98000"/>
+                <a:satMod val="130000"/>
+                <a:shade val="90000"/>
+                <a:lumMod val="103000"/>
+              </a:schemeClr>
+            </a:gs>
+            <a:gs pos="100000">
+              <a:schemeClr val="phClr">
+                <a:shade val="63000"/>
+                <a:satMod val="120000"/>
+              </a:schemeClr>
+            </a:gs>
+          </a:gsLst>
+          <a:lin ang="5400000" scaled="0"/>
+        </a:gradFill>
+      </a:bgFillStyleLst>
+    </a:fmtScheme>
+  </a:themeElements>
+  <a:objectDefaults>
+    <a:lnDef>
+      <a:spPr/>
+      <a:bodyPr/>
+      <a:lstStyle/>
+      <a:style>
+        <a:lnRef idx="2">
+          <a:schemeClr val="accent1"/>
+        </a:lnRef>
+        <a:fillRef idx="0">
+          <a:schemeClr val="accent1"/>
+        </a:fillRef>
+        <a:effectRef idx="1">
+          <a:schemeClr val="accent1"/>
+        </a:effectRef>
+        <a:fontRef idx="minor">
+          <a:schemeClr val="tx1"/>
+        </a:fontRef>
+      </a:style>
+    </a:lnDef>
+  </a:objectDefaults>
+  <a:extraClrSchemeLst/>
+  <a:extLst>
+    <a:ext uri="{05A4C25C-085E-4340-85A3-A5531E510DB2}">
+      <thm15:themeFamily xmlns:thm15="http://schemas.microsoft.com/office/thememl/2012/main" name="Office Theme" id="{2E142A2C-CD16-42D6-873A-C26D2A0506FA}" vid="{1BDDFF52-6CD6-40A5-AB3C-68EB2F1E4D0A}"/>
+    </a:ext>
+  </a:extLst>
+</a:theme>
 </file>
--- a/Retrieve_최종발표.pptx
+++ b/Retrieve_최종발표.pptx
@@ -4484,9 +4484,6 @@
           <a:bodyPr wrap="square" lIns="0" tIns="0" rIns="0" bIns="0" rtlCol="0" anchor="ctr"/>
           <a:lstStyle/>
           <a:p>
-            <a:pPr marL="0" indent="0">
-              <a:buNone/>
-            </a:pPr>
             <a:r>
               <a:rPr lang="en-US" sz="950" dirty="0">
                 <a:solidFill>
@@ -4496,7 +4493,40 @@
                 <a:ea typeface="Calibri" pitchFamily="34" charset="-122"/>
                 <a:cs typeface="Calibri" pitchFamily="34" charset="-120"/>
               </a:rPr>
-              <a:t>유물 추가 · 멀티플레이 기능</a:t>
+              <a:t>유물 추가 · </a:t>
+            </a:r>
+            <a:r>
+              <a:rPr lang="ko-KR" altLang="en-US" sz="950" dirty="0">
+                <a:solidFill>
+                  <a:srgbClr val="0F172A"/>
+                </a:solidFill>
+                <a:latin typeface="Calibri" pitchFamily="34" charset="0"/>
+                <a:ea typeface="Calibri" pitchFamily="34" charset="-122"/>
+                <a:cs typeface="Calibri" pitchFamily="34" charset="-120"/>
+              </a:rPr>
+              <a:t>몬스터 추가</a:t>
+            </a:r>
+            <a:r>
+              <a:rPr lang="en-US" altLang="ko-KR" sz="950" dirty="0">
+                <a:solidFill>
+                  <a:srgbClr val="0F172A"/>
+                </a:solidFill>
+                <a:latin typeface="Calibri" pitchFamily="34" charset="0"/>
+                <a:ea typeface="Calibri" pitchFamily="34" charset="-122"/>
+                <a:cs typeface="Calibri" pitchFamily="34" charset="-120"/>
+              </a:rPr>
+              <a:t> · </a:t>
+            </a:r>
+            <a:r>
+              <a:rPr lang="en-US" sz="950" dirty="0" err="1">
+                <a:solidFill>
+                  <a:srgbClr val="0F172A"/>
+                </a:solidFill>
+                <a:latin typeface="Calibri" pitchFamily="34" charset="0"/>
+                <a:ea typeface="Calibri" pitchFamily="34" charset="-122"/>
+                <a:cs typeface="Calibri" pitchFamily="34" charset="-120"/>
+              </a:rPr>
+              <a:t>멀티플레이</a:t>
             </a:r>
             <a:endParaRPr lang="en-US" sz="950" dirty="0"/>
           </a:p>
@@ -4599,7 +4629,73 @@
                 <a:ea typeface="Calibri" pitchFamily="34" charset="-122"/>
                 <a:cs typeface="Calibri" pitchFamily="34" charset="-120"/>
               </a:rPr>
-              <a:t>"그동안 쌓아온 경험이 실제 프로젝트에서 어떻게 가치를 발휘하는지 직접 체감할 수 있었습니다."</a:t>
+              <a:t>＂</a:t>
+            </a:r>
+            <a:r>
+              <a:rPr lang="ko-KR" altLang="en-US" sz="1100" i="1" dirty="0">
+                <a:solidFill>
+                  <a:srgbClr val="5EEAD4"/>
+                </a:solidFill>
+                <a:latin typeface="Calibri" pitchFamily="34" charset="0"/>
+                <a:ea typeface="Calibri" pitchFamily="34" charset="-122"/>
+                <a:cs typeface="Calibri" pitchFamily="34" charset="-120"/>
+              </a:rPr>
+              <a:t>객체지향 설계와 </a:t>
+            </a:r>
+            <a:r>
+              <a:rPr lang="ko-KR" altLang="en-US" sz="1100" i="1" dirty="0" err="1">
+                <a:solidFill>
+                  <a:srgbClr val="5EEAD4"/>
+                </a:solidFill>
+                <a:latin typeface="Calibri" pitchFamily="34" charset="0"/>
+                <a:ea typeface="Calibri" pitchFamily="34" charset="-122"/>
+                <a:cs typeface="Calibri" pitchFamily="34" charset="-120"/>
+              </a:rPr>
+              <a:t>싱그톤</a:t>
+            </a:r>
+            <a:r>
+              <a:rPr lang="ko-KR" altLang="en-US" sz="1100" i="1" dirty="0">
+                <a:solidFill>
+                  <a:srgbClr val="5EEAD4"/>
+                </a:solidFill>
+                <a:latin typeface="Calibri" pitchFamily="34" charset="0"/>
+                <a:ea typeface="Calibri" pitchFamily="34" charset="-122"/>
+                <a:cs typeface="Calibri" pitchFamily="34" charset="-120"/>
+              </a:rPr>
+              <a:t> 패턴을 실제 게임 엔진에 적용하며</a:t>
+            </a:r>
+            <a:r>
+              <a:rPr lang="en-US" altLang="ko-KR" sz="1100" i="1" dirty="0">
+                <a:solidFill>
+                  <a:srgbClr val="5EEAD4"/>
+                </a:solidFill>
+                <a:latin typeface="Calibri" pitchFamily="34" charset="0"/>
+                <a:ea typeface="Calibri" pitchFamily="34" charset="-122"/>
+                <a:cs typeface="Calibri" pitchFamily="34" charset="-120"/>
+              </a:rPr>
+              <a:t>, </a:t>
+            </a:r>
+            <a:r>
+              <a:rPr lang="ko-KR" altLang="en-US" sz="1100" i="1" dirty="0">
+                <a:solidFill>
+                  <a:srgbClr val="5EEAD4"/>
+                </a:solidFill>
+                <a:latin typeface="Calibri" pitchFamily="34" charset="0"/>
+                <a:ea typeface="Calibri" pitchFamily="34" charset="-122"/>
+                <a:cs typeface="Calibri" pitchFamily="34" charset="-120"/>
+              </a:rPr>
+              <a:t>이론이 동작하는 순간을 직접 체감할 수 있었습니다</a:t>
+            </a:r>
+            <a:r>
+              <a:rPr lang="en-US" altLang="ko-KR" sz="1100" i="1" dirty="0">
+                <a:solidFill>
+                  <a:srgbClr val="5EEAD4"/>
+                </a:solidFill>
+                <a:latin typeface="Calibri" pitchFamily="34" charset="0"/>
+                <a:ea typeface="Calibri" pitchFamily="34" charset="-122"/>
+                <a:cs typeface="Calibri" pitchFamily="34" charset="-120"/>
+              </a:rPr>
+              <a:t>.”</a:t>
             </a:r>
             <a:endParaRPr lang="en-US" sz="1100" dirty="0"/>
           </a:p>
@@ -11630,7 +11726,18 @@
                 <a:ea typeface="Calibri" pitchFamily="34" charset="-122"/>
                 <a:cs typeface="Calibri" pitchFamily="34" charset="-120"/>
               </a:rPr>
-              <a:t>04  이동 / 점프 / 스킬</a:t>
+              <a:t>04  이동 / 점프 / </a:t>
+            </a:r>
+            <a:r>
+              <a:rPr lang="ko-KR" altLang="en-US" sz="1100" dirty="0">
+                <a:solidFill>
+                  <a:srgbClr val="5EEAD4"/>
+                </a:solidFill>
+                <a:latin typeface="Calibri" pitchFamily="34" charset="0"/>
+                <a:ea typeface="Calibri" pitchFamily="34" charset="-122"/>
+                <a:cs typeface="Calibri" pitchFamily="34" charset="-120"/>
+              </a:rPr>
+              <a:t>피격</a:t>
             </a:r>
             <a:endParaRPr lang="en-US" sz="1100" dirty="0"/>
           </a:p>
@@ -11644,7 +11751,7 @@
         </p:nvSpPr>
         <p:spPr>
           <a:xfrm>
-            <a:off x="274320" y="1051560"/>
+            <a:off x="274320" y="1997809"/>
             <a:ext cx="2743200" cy="1737360"/>
           </a:xfrm>
           <a:prstGeom prst="rect">
@@ -11671,7 +11778,7 @@
           <a:bodyPr/>
           <a:lstStyle/>
           <a:p>
-            <a:endParaRPr lang="ko-KR" altLang="en-US"/>
+            <a:endParaRPr lang="ko-KR" altLang="en-US" dirty="0"/>
           </a:p>
         </p:txBody>
       </p:sp>
@@ -11683,7 +11790,7 @@
         </p:nvSpPr>
         <p:spPr>
           <a:xfrm>
-            <a:off x="411480" y="1234440"/>
+            <a:off x="411480" y="2180689"/>
             <a:ext cx="502920" cy="502920"/>
           </a:xfrm>
           <a:prstGeom prst="ellipse">
@@ -11715,7 +11822,7 @@
         </p:nvSpPr>
         <p:spPr>
           <a:xfrm>
-            <a:off x="411480" y="1234440"/>
+            <a:off x="411480" y="2180689"/>
             <a:ext cx="502920" cy="502920"/>
           </a:xfrm>
           <a:prstGeom prst="rect">
@@ -11754,7 +11861,7 @@
         </p:nvSpPr>
         <p:spPr>
           <a:xfrm>
-            <a:off x="987552" y="1252728"/>
+            <a:off x="987552" y="2198977"/>
             <a:ext cx="1920240" cy="347472"/>
           </a:xfrm>
           <a:prstGeom prst="rect">
@@ -11793,7 +11900,7 @@
         </p:nvSpPr>
         <p:spPr>
           <a:xfrm>
-            <a:off x="411480" y="1801368"/>
+            <a:off x="411480" y="2747617"/>
             <a:ext cx="2514600" cy="914400"/>
           </a:xfrm>
           <a:prstGeom prst="rect">
@@ -11849,7 +11956,7 @@
         </p:nvSpPr>
         <p:spPr>
           <a:xfrm>
-            <a:off x="3246120" y="1051560"/>
+            <a:off x="3246120" y="1997809"/>
             <a:ext cx="2743200" cy="1737360"/>
           </a:xfrm>
           <a:prstGeom prst="rect">
@@ -11888,7 +11995,7 @@
         </p:nvSpPr>
         <p:spPr>
           <a:xfrm>
-            <a:off x="3383280" y="1234440"/>
+            <a:off x="3383280" y="2180689"/>
             <a:ext cx="502920" cy="502920"/>
           </a:xfrm>
           <a:prstGeom prst="ellipse">
@@ -11920,7 +12027,7 @@
         </p:nvSpPr>
         <p:spPr>
           <a:xfrm>
-            <a:off x="3383280" y="1234440"/>
+            <a:off x="3383280" y="2180689"/>
             <a:ext cx="502920" cy="502920"/>
           </a:xfrm>
           <a:prstGeom prst="rect">
@@ -11955,7 +12062,7 @@
         </p:nvSpPr>
         <p:spPr>
           <a:xfrm>
-            <a:off x="3959352" y="1252728"/>
+            <a:off x="3959352" y="2198977"/>
             <a:ext cx="1920240" cy="347472"/>
           </a:xfrm>
           <a:prstGeom prst="rect">
@@ -11994,7 +12101,7 @@
         </p:nvSpPr>
         <p:spPr>
           <a:xfrm>
-            <a:off x="3383280" y="1801368"/>
+            <a:off x="3383280" y="2747617"/>
             <a:ext cx="2514600" cy="914400"/>
           </a:xfrm>
           <a:prstGeom prst="rect">
@@ -12067,7 +12174,7 @@
         </p:nvSpPr>
         <p:spPr>
           <a:xfrm>
-            <a:off x="6217920" y="1051560"/>
+            <a:off x="6217920" y="1997809"/>
             <a:ext cx="2743200" cy="1737360"/>
           </a:xfrm>
           <a:prstGeom prst="rect">
@@ -12106,7 +12213,7 @@
         </p:nvSpPr>
         <p:spPr>
           <a:xfrm>
-            <a:off x="6355080" y="1234440"/>
+            <a:off x="6355080" y="2180689"/>
             <a:ext cx="502920" cy="502920"/>
           </a:xfrm>
           <a:prstGeom prst="ellipse">
@@ -12138,7 +12245,7 @@
         </p:nvSpPr>
         <p:spPr>
           <a:xfrm>
-            <a:off x="6355080" y="1234440"/>
+            <a:off x="6355080" y="2180689"/>
             <a:ext cx="502920" cy="502920"/>
           </a:xfrm>
           <a:prstGeom prst="rect">
@@ -12198,7 +12305,7 @@
         </p:nvSpPr>
         <p:spPr>
           <a:xfrm>
-            <a:off x="6931152" y="1252728"/>
+            <a:off x="6931152" y="2198977"/>
             <a:ext cx="1920240" cy="347472"/>
           </a:xfrm>
           <a:prstGeom prst="rect">
@@ -12237,7 +12344,7 @@
         </p:nvSpPr>
         <p:spPr>
           <a:xfrm>
-            <a:off x="6355080" y="1801368"/>
+            <a:off x="6355080" y="2747617"/>
             <a:ext cx="2514600" cy="914400"/>
           </a:xfrm>
           <a:prstGeom prst="rect">
@@ -12304,13 +12411,13 @@
       </p:sp>
       <p:sp>
         <p:nvSpPr>
-          <p:cNvPr id="20" name="Shape 18"/>
-          <p:cNvSpPr/>
-          <p:nvPr/>
-        </p:nvSpPr>
-        <p:spPr>
-          <a:xfrm>
-            <a:off x="274320" y="2971800"/>
+          <p:cNvPr id="30" name="Shape 28"/>
+          <p:cNvSpPr/>
+          <p:nvPr/>
+        </p:nvSpPr>
+        <p:spPr>
+          <a:xfrm>
+            <a:off x="6217920" y="1997809"/>
             <a:ext cx="2743200" cy="1737360"/>
           </a:xfrm>
           <a:prstGeom prst="rect">
@@ -12343,13 +12450,13 @@
       </p:sp>
       <p:sp>
         <p:nvSpPr>
-          <p:cNvPr id="21" name="Shape 19"/>
-          <p:cNvSpPr/>
-          <p:nvPr/>
-        </p:nvSpPr>
-        <p:spPr>
-          <a:xfrm>
-            <a:off x="411480" y="3154680"/>
+          <p:cNvPr id="31" name="Shape 29"/>
+          <p:cNvSpPr/>
+          <p:nvPr/>
+        </p:nvSpPr>
+        <p:spPr>
+          <a:xfrm>
+            <a:off x="6355080" y="2180689"/>
             <a:ext cx="502920" cy="502920"/>
           </a:xfrm>
           <a:prstGeom prst="ellipse">
@@ -12375,13 +12482,13 @@
       </p:sp>
       <p:sp>
         <p:nvSpPr>
-          <p:cNvPr id="22" name="Text 20"/>
-          <p:cNvSpPr/>
-          <p:nvPr/>
-        </p:nvSpPr>
-        <p:spPr>
-          <a:xfrm>
-            <a:off x="411480" y="3154680"/>
+          <p:cNvPr id="32" name="Text 30"/>
+          <p:cNvSpPr/>
+          <p:nvPr/>
+        </p:nvSpPr>
+        <p:spPr>
+          <a:xfrm>
+            <a:off x="6355080" y="2180689"/>
             <a:ext cx="502920" cy="502920"/>
           </a:xfrm>
           <a:prstGeom prst="rect">
@@ -12406,7 +12513,7 @@
                 <a:ea typeface="Calibri" pitchFamily="34" charset="-122"/>
                 <a:cs typeface="Calibri" pitchFamily="34" charset="-120"/>
               </a:rPr>
-              <a:t>Q</a:t>
+              <a:t>❤</a:t>
             </a:r>
             <a:endParaRPr lang="en-US" sz="1400" dirty="0"/>
           </a:p>
@@ -12414,13 +12521,13 @@
       </p:sp>
       <p:sp>
         <p:nvSpPr>
-          <p:cNvPr id="23" name="Text 21"/>
-          <p:cNvSpPr/>
-          <p:nvPr/>
-        </p:nvSpPr>
-        <p:spPr>
-          <a:xfrm>
-            <a:off x="987552" y="3172968"/>
+          <p:cNvPr id="33" name="Text 31"/>
+          <p:cNvSpPr/>
+          <p:nvPr/>
+        </p:nvSpPr>
+        <p:spPr>
+          <a:xfrm>
+            <a:off x="6931152" y="2198977"/>
             <a:ext cx="1920240" cy="347472"/>
           </a:xfrm>
           <a:prstGeom prst="rect">
@@ -12445,7 +12552,7 @@
                 <a:ea typeface="Calibri" pitchFamily="34" charset="-122"/>
                 <a:cs typeface="Calibri" pitchFamily="34" charset="-120"/>
               </a:rPr>
-              <a:t>스킬 Q (청동검)</a:t>
+              <a:t>피격 / 무적</a:t>
             </a:r>
             <a:endParaRPr lang="en-US" sz="1200" dirty="0"/>
           </a:p>
@@ -12453,13 +12560,13 @@
       </p:sp>
       <p:sp>
         <p:nvSpPr>
-          <p:cNvPr id="24" name="Text 22"/>
-          <p:cNvSpPr/>
-          <p:nvPr/>
-        </p:nvSpPr>
-        <p:spPr>
-          <a:xfrm>
-            <a:off x="411480" y="3721608"/>
+          <p:cNvPr id="34" name="Text 32"/>
+          <p:cNvSpPr/>
+          <p:nvPr/>
+        </p:nvSpPr>
+        <p:spPr>
+          <a:xfrm>
+            <a:off x="6355080" y="2747617"/>
             <a:ext cx="2514600" cy="914400"/>
           </a:xfrm>
           <a:prstGeom prst="rect">
@@ -12484,7 +12591,7 @@
                 <a:ea typeface="Calibri" pitchFamily="34" charset="-122"/>
                 <a:cs typeface="Calibri" pitchFamily="34" charset="-120"/>
               </a:rPr>
-              <a:t>청동검 획득 후 해금</a:t>
+              <a:t>take_damage(amount)</a:t>
             </a:r>
             <a:endParaRPr lang="en-US" sz="1000" dirty="0"/>
           </a:p>
@@ -12501,451 +12608,106 @@
                 <a:ea typeface="Calibri" pitchFamily="34" charset="-122"/>
                 <a:cs typeface="Calibri" pitchFamily="34" charset="-120"/>
               </a:rPr>
-              <a:t>범위 내 적에게 공포 상태 적용, 재사용 대기시간 5초</a:t>
-            </a:r>
-            <a:endParaRPr lang="en-US" sz="1000" dirty="0"/>
+              <a:t>피격 후 </a:t>
+            </a:r>
+            <a:r>
+              <a:rPr lang="ko-KR" altLang="en-US" sz="1000" dirty="0" err="1">
+                <a:solidFill>
+                  <a:srgbClr val="94A3B8"/>
+                </a:solidFill>
+                <a:latin typeface="Calibri" pitchFamily="34" charset="0"/>
+                <a:ea typeface="Calibri" pitchFamily="34" charset="-122"/>
+                <a:cs typeface="Calibri" pitchFamily="34" charset="-120"/>
+              </a:rPr>
+              <a:t>넉백</a:t>
+            </a:r>
+            <a:r>
+              <a:rPr lang="en-US" altLang="ko-KR" sz="1000" dirty="0">
+                <a:solidFill>
+                  <a:srgbClr val="94A3B8"/>
+                </a:solidFill>
+                <a:latin typeface="Calibri" pitchFamily="34" charset="0"/>
+                <a:ea typeface="Calibri" pitchFamily="34" charset="-122"/>
+                <a:cs typeface="Calibri" pitchFamily="34" charset="-120"/>
+              </a:rPr>
+              <a:t> </a:t>
+            </a:r>
+            <a:r>
+              <a:rPr lang="ko-KR" altLang="en-US" sz="1000" dirty="0">
+                <a:solidFill>
+                  <a:srgbClr val="94A3B8"/>
+                </a:solidFill>
+                <a:latin typeface="Calibri" pitchFamily="34" charset="0"/>
+                <a:ea typeface="Calibri" pitchFamily="34" charset="-122"/>
+                <a:cs typeface="Calibri" pitchFamily="34" charset="-120"/>
+              </a:rPr>
+              <a:t>및 </a:t>
+            </a:r>
+            <a:r>
+              <a:rPr lang="en-US" sz="1000" dirty="0" err="1">
+                <a:solidFill>
+                  <a:srgbClr val="94A3B8"/>
+                </a:solidFill>
+                <a:latin typeface="Calibri" pitchFamily="34" charset="0"/>
+                <a:ea typeface="Calibri" pitchFamily="34" charset="-122"/>
+                <a:cs typeface="Calibri" pitchFamily="34" charset="-120"/>
+              </a:rPr>
+              <a:t>무적</a:t>
+            </a:r>
+            <a:r>
+              <a:rPr lang="en-US" sz="1000" dirty="0">
+                <a:solidFill>
+                  <a:srgbClr val="94A3B8"/>
+                </a:solidFill>
+                <a:latin typeface="Calibri" pitchFamily="34" charset="0"/>
+                <a:ea typeface="Calibri" pitchFamily="34" charset="-122"/>
+                <a:cs typeface="Calibri" pitchFamily="34" charset="-120"/>
+              </a:rPr>
+              <a:t> </a:t>
+            </a:r>
+            <a:r>
+              <a:rPr lang="en-US" sz="1000" dirty="0" err="1">
+                <a:solidFill>
+                  <a:srgbClr val="94A3B8"/>
+                </a:solidFill>
+                <a:latin typeface="Calibri" pitchFamily="34" charset="0"/>
+                <a:ea typeface="Calibri" pitchFamily="34" charset="-122"/>
+                <a:cs typeface="Calibri" pitchFamily="34" charset="-120"/>
+              </a:rPr>
+              <a:t>프레임</a:t>
+            </a:r>
+            <a:endParaRPr lang="en-US" sz="1000" dirty="0">
+              <a:solidFill>
+                <a:srgbClr val="94A3B8"/>
+              </a:solidFill>
+              <a:latin typeface="Calibri" pitchFamily="34" charset="0"/>
+              <a:ea typeface="Calibri" pitchFamily="34" charset="-122"/>
+              <a:cs typeface="Calibri" pitchFamily="34" charset="-120"/>
+            </a:endParaRPr>
           </a:p>
           <a:p>
             <a:pPr marL="0" indent="0">
               <a:buNone/>
             </a:pPr>
             <a:r>
-              <a:rPr lang="en-US" sz="1000" dirty="0">
+              <a:rPr lang="ko-KR" altLang="en-US" sz="1000" dirty="0">
                 <a:solidFill>
                   <a:srgbClr val="94A3B8"/>
                 </a:solidFill>
                 <a:latin typeface="Calibri" pitchFamily="34" charset="0"/>
-                <a:ea typeface="Calibri" pitchFamily="34" charset="-122"/>
-                <a:cs typeface="Calibri" pitchFamily="34" charset="-120"/>
-              </a:rPr>
-              <a:t>HUD 쿨타임 오버레이</a:t>
-            </a:r>
-            <a:endParaRPr lang="en-US" sz="1000" dirty="0"/>
-          </a:p>
-        </p:txBody>
-      </p:sp>
-      <p:sp>
-        <p:nvSpPr>
-          <p:cNvPr id="25" name="Shape 23"/>
-          <p:cNvSpPr/>
-          <p:nvPr/>
-        </p:nvSpPr>
-        <p:spPr>
-          <a:xfrm>
-            <a:off x="3246120" y="2971800"/>
-            <a:ext cx="2743200" cy="1737360"/>
-          </a:xfrm>
-          <a:prstGeom prst="rect">
-            <a:avLst/>
-          </a:prstGeom>
-          <a:solidFill>
-            <a:srgbClr val="1E3A5F"/>
-          </a:solidFill>
-          <a:ln w="12700">
-            <a:solidFill>
-              <a:srgbClr val="2A4A6B"/>
-            </a:solidFill>
-            <a:prstDash val="solid"/>
-          </a:ln>
-          <a:effectLst>
-            <a:outerShdw blurRad="101600" dist="38100" dir="8100000" algn="bl" rotWithShape="0">
-              <a:srgbClr val="000000">
-                <a:alpha val="18000"/>
-              </a:srgbClr>
-            </a:outerShdw>
-          </a:effectLst>
-        </p:spPr>
-        <p:txBody>
-          <a:bodyPr/>
-          <a:lstStyle/>
-          <a:p>
-            <a:endParaRPr lang="ko-KR" altLang="en-US"/>
-          </a:p>
-        </p:txBody>
-      </p:sp>
-      <p:sp>
-        <p:nvSpPr>
-          <p:cNvPr id="26" name="Shape 24"/>
-          <p:cNvSpPr/>
-          <p:nvPr/>
-        </p:nvSpPr>
-        <p:spPr>
-          <a:xfrm>
-            <a:off x="3383280" y="3154680"/>
-            <a:ext cx="502920" cy="502920"/>
-          </a:xfrm>
-          <a:prstGeom prst="ellipse">
-            <a:avLst/>
-          </a:prstGeom>
-          <a:solidFill>
-            <a:srgbClr val="0D9488"/>
-          </a:solidFill>
-          <a:ln w="12700">
-            <a:solidFill>
-              <a:srgbClr val="0D9488"/>
-            </a:solidFill>
-            <a:prstDash val="solid"/>
-          </a:ln>
-        </p:spPr>
-        <p:txBody>
-          <a:bodyPr/>
-          <a:lstStyle/>
-          <a:p>
-            <a:endParaRPr lang="ko-KR" altLang="en-US"/>
-          </a:p>
-        </p:txBody>
-      </p:sp>
-      <p:sp>
-        <p:nvSpPr>
-          <p:cNvPr id="27" name="Text 25"/>
-          <p:cNvSpPr/>
-          <p:nvPr/>
-        </p:nvSpPr>
-        <p:spPr>
-          <a:xfrm>
-            <a:off x="3383280" y="3154680"/>
-            <a:ext cx="502920" cy="502920"/>
-          </a:xfrm>
-          <a:prstGeom prst="rect">
-            <a:avLst/>
-          </a:prstGeom>
-          <a:noFill/>
-          <a:ln/>
-        </p:spPr>
-        <p:txBody>
-          <a:bodyPr wrap="square" lIns="0" tIns="0" rIns="0" bIns="0" rtlCol="0" anchor="ctr"/>
-          <a:lstStyle/>
-          <a:p>
-            <a:pPr marL="0" indent="0" algn="ctr">
-              <a:buNone/>
-            </a:pPr>
-            <a:r>
-              <a:rPr lang="en-US" sz="1400" b="1" dirty="0">
-                <a:solidFill>
-                  <a:srgbClr val="FFFFFF"/>
-                </a:solidFill>
-                <a:latin typeface="Calibri" pitchFamily="34" charset="0"/>
-                <a:ea typeface="Calibri" pitchFamily="34" charset="-122"/>
-                <a:cs typeface="Calibri" pitchFamily="34" charset="-120"/>
-              </a:rPr>
-              <a:t>W</a:t>
-            </a:r>
-            <a:endParaRPr lang="en-US" sz="1400" dirty="0"/>
-          </a:p>
-        </p:txBody>
-      </p:sp>
-      <p:sp>
-        <p:nvSpPr>
-          <p:cNvPr id="28" name="Text 26"/>
-          <p:cNvSpPr/>
-          <p:nvPr/>
-        </p:nvSpPr>
-        <p:spPr>
-          <a:xfrm>
-            <a:off x="3959352" y="3172968"/>
-            <a:ext cx="1920240" cy="347472"/>
-          </a:xfrm>
-          <a:prstGeom prst="rect">
-            <a:avLst/>
-          </a:prstGeom>
-          <a:noFill/>
-          <a:ln/>
-        </p:spPr>
-        <p:txBody>
-          <a:bodyPr wrap="square" lIns="0" tIns="0" rIns="0" bIns="0" rtlCol="0" anchor="ctr"/>
-          <a:lstStyle/>
-          <a:p>
-            <a:pPr marL="0" indent="0">
-              <a:buNone/>
-            </a:pPr>
-            <a:r>
-              <a:rPr lang="en-US" sz="1200" b="1" dirty="0">
-                <a:solidFill>
-                  <a:srgbClr val="FFFFFF"/>
-                </a:solidFill>
-                <a:latin typeface="Calibri" pitchFamily="34" charset="0"/>
-                <a:ea typeface="Calibri" pitchFamily="34" charset="-122"/>
-                <a:cs typeface="Calibri" pitchFamily="34" charset="-120"/>
-              </a:rPr>
-              <a:t>스킬 W (노리개)</a:t>
-            </a:r>
-            <a:endParaRPr lang="en-US" sz="1200" dirty="0"/>
-          </a:p>
-        </p:txBody>
-      </p:sp>
-      <p:sp>
-        <p:nvSpPr>
-          <p:cNvPr id="29" name="Text 27"/>
-          <p:cNvSpPr/>
-          <p:nvPr/>
-        </p:nvSpPr>
-        <p:spPr>
-          <a:xfrm>
-            <a:off x="3383280" y="3721608"/>
-            <a:ext cx="2514600" cy="914400"/>
-          </a:xfrm>
-          <a:prstGeom prst="rect">
-            <a:avLst/>
-          </a:prstGeom>
-          <a:noFill/>
-          <a:ln/>
-        </p:spPr>
-        <p:txBody>
-          <a:bodyPr wrap="square" lIns="0" tIns="0" rIns="0" bIns="0" rtlCol="0" anchor="t"/>
-          <a:lstStyle/>
-          <a:p>
-            <a:pPr marL="0" indent="0">
-              <a:buNone/>
-            </a:pPr>
-            <a:r>
-              <a:rPr lang="en-US" sz="1000" dirty="0">
+                <a:cs typeface="Calibri" pitchFamily="34" charset="-120"/>
+              </a:rPr>
+              <a:t>낙하 시 체력 </a:t>
+            </a:r>
+            <a:r>
+              <a:rPr lang="en-US" altLang="ko-KR" sz="1000" dirty="0">
                 <a:solidFill>
                   <a:srgbClr val="94A3B8"/>
                 </a:solidFill>
                 <a:latin typeface="Calibri" pitchFamily="34" charset="0"/>
-                <a:ea typeface="Calibri" pitchFamily="34" charset="-122"/>
-                <a:cs typeface="Calibri" pitchFamily="34" charset="-120"/>
-              </a:rPr>
-              <a:t>노리개 획득 후 해금</a:t>
-            </a:r>
-            <a:endParaRPr lang="en-US" sz="1000" dirty="0"/>
-          </a:p>
-          <a:p>
-            <a:pPr marL="0" indent="0">
-              <a:buNone/>
-            </a:pPr>
-            <a:r>
-              <a:rPr lang="en-US" sz="1000" dirty="0">
-                <a:solidFill>
-                  <a:srgbClr val="94A3B8"/>
-                </a:solidFill>
-                <a:latin typeface="Calibri" pitchFamily="34" charset="0"/>
-                <a:ea typeface="Calibri" pitchFamily="34" charset="-122"/>
-                <a:cs typeface="Calibri" pitchFamily="34" charset="-120"/>
-              </a:rPr>
-              <a:t>이동 플랫폼(MovingPlatform) 활성화, 재사용 대기시간 7초</a:t>
-            </a:r>
-            <a:endParaRPr lang="en-US" sz="1000" dirty="0"/>
-          </a:p>
-          <a:p>
-            <a:pPr marL="0" indent="0">
-              <a:buNone/>
-            </a:pPr>
-            <a:r>
-              <a:rPr lang="en-US" sz="1000" dirty="0">
-                <a:solidFill>
-                  <a:srgbClr val="94A3B8"/>
-                </a:solidFill>
-                <a:latin typeface="Calibri" pitchFamily="34" charset="0"/>
-                <a:ea typeface="Calibri" pitchFamily="34" charset="-122"/>
-                <a:cs typeface="Calibri" pitchFamily="34" charset="-120"/>
-              </a:rPr>
-              <a:t>HUD 쿨타임 오버레이</a:t>
-            </a:r>
-            <a:endParaRPr lang="en-US" sz="1000" dirty="0"/>
-          </a:p>
-        </p:txBody>
-      </p:sp>
-      <p:sp>
-        <p:nvSpPr>
-          <p:cNvPr id="30" name="Shape 28"/>
-          <p:cNvSpPr/>
-          <p:nvPr/>
-        </p:nvSpPr>
-        <p:spPr>
-          <a:xfrm>
-            <a:off x="6217920" y="2971800"/>
-            <a:ext cx="2743200" cy="1737360"/>
-          </a:xfrm>
-          <a:prstGeom prst="rect">
-            <a:avLst/>
-          </a:prstGeom>
-          <a:solidFill>
-            <a:srgbClr val="1E3A5F"/>
-          </a:solidFill>
-          <a:ln w="12700">
-            <a:solidFill>
-              <a:srgbClr val="2A4A6B"/>
-            </a:solidFill>
-            <a:prstDash val="solid"/>
-          </a:ln>
-          <a:effectLst>
-            <a:outerShdw blurRad="101600" dist="38100" dir="8100000" algn="bl" rotWithShape="0">
-              <a:srgbClr val="000000">
-                <a:alpha val="18000"/>
-              </a:srgbClr>
-            </a:outerShdw>
-          </a:effectLst>
-        </p:spPr>
-        <p:txBody>
-          <a:bodyPr/>
-          <a:lstStyle/>
-          <a:p>
-            <a:endParaRPr lang="ko-KR" altLang="en-US"/>
-          </a:p>
-        </p:txBody>
-      </p:sp>
-      <p:sp>
-        <p:nvSpPr>
-          <p:cNvPr id="31" name="Shape 29"/>
-          <p:cNvSpPr/>
-          <p:nvPr/>
-        </p:nvSpPr>
-        <p:spPr>
-          <a:xfrm>
-            <a:off x="6355080" y="3154680"/>
-            <a:ext cx="502920" cy="502920"/>
-          </a:xfrm>
-          <a:prstGeom prst="ellipse">
-            <a:avLst/>
-          </a:prstGeom>
-          <a:solidFill>
-            <a:srgbClr val="0D9488"/>
-          </a:solidFill>
-          <a:ln w="12700">
-            <a:solidFill>
-              <a:srgbClr val="0D9488"/>
-            </a:solidFill>
-            <a:prstDash val="solid"/>
-          </a:ln>
-        </p:spPr>
-        <p:txBody>
-          <a:bodyPr/>
-          <a:lstStyle/>
-          <a:p>
-            <a:endParaRPr lang="ko-KR" altLang="en-US"/>
-          </a:p>
-        </p:txBody>
-      </p:sp>
-      <p:sp>
-        <p:nvSpPr>
-          <p:cNvPr id="32" name="Text 30"/>
-          <p:cNvSpPr/>
-          <p:nvPr/>
-        </p:nvSpPr>
-        <p:spPr>
-          <a:xfrm>
-            <a:off x="6355080" y="3154680"/>
-            <a:ext cx="502920" cy="502920"/>
-          </a:xfrm>
-          <a:prstGeom prst="rect">
-            <a:avLst/>
-          </a:prstGeom>
-          <a:noFill/>
-          <a:ln/>
-        </p:spPr>
-        <p:txBody>
-          <a:bodyPr wrap="square" lIns="0" tIns="0" rIns="0" bIns="0" rtlCol="0" anchor="ctr"/>
-          <a:lstStyle/>
-          <a:p>
-            <a:pPr marL="0" indent="0" algn="ctr">
-              <a:buNone/>
-            </a:pPr>
-            <a:r>
-              <a:rPr lang="en-US" sz="1400" b="1" dirty="0">
-                <a:solidFill>
-                  <a:srgbClr val="FFFFFF"/>
-                </a:solidFill>
-                <a:latin typeface="Calibri" pitchFamily="34" charset="0"/>
-                <a:ea typeface="Calibri" pitchFamily="34" charset="-122"/>
-                <a:cs typeface="Calibri" pitchFamily="34" charset="-120"/>
-              </a:rPr>
-              <a:t>❤</a:t>
-            </a:r>
-            <a:endParaRPr lang="en-US" sz="1400" dirty="0"/>
-          </a:p>
-        </p:txBody>
-      </p:sp>
-      <p:sp>
-        <p:nvSpPr>
-          <p:cNvPr id="33" name="Text 31"/>
-          <p:cNvSpPr/>
-          <p:nvPr/>
-        </p:nvSpPr>
-        <p:spPr>
-          <a:xfrm>
-            <a:off x="6931152" y="3172968"/>
-            <a:ext cx="1920240" cy="347472"/>
-          </a:xfrm>
-          <a:prstGeom prst="rect">
-            <a:avLst/>
-          </a:prstGeom>
-          <a:noFill/>
-          <a:ln/>
-        </p:spPr>
-        <p:txBody>
-          <a:bodyPr wrap="square" lIns="0" tIns="0" rIns="0" bIns="0" rtlCol="0" anchor="ctr"/>
-          <a:lstStyle/>
-          <a:p>
-            <a:pPr marL="0" indent="0">
-              <a:buNone/>
-            </a:pPr>
-            <a:r>
-              <a:rPr lang="en-US" sz="1200" b="1" dirty="0">
-                <a:solidFill>
-                  <a:srgbClr val="FFFFFF"/>
-                </a:solidFill>
-                <a:latin typeface="Calibri" pitchFamily="34" charset="0"/>
-                <a:ea typeface="Calibri" pitchFamily="34" charset="-122"/>
-                <a:cs typeface="Calibri" pitchFamily="34" charset="-120"/>
-              </a:rPr>
-              <a:t>피격 / 무적</a:t>
-            </a:r>
-            <a:endParaRPr lang="en-US" sz="1200" dirty="0"/>
-          </a:p>
-        </p:txBody>
-      </p:sp>
-      <p:sp>
-        <p:nvSpPr>
-          <p:cNvPr id="34" name="Text 32"/>
-          <p:cNvSpPr/>
-          <p:nvPr/>
-        </p:nvSpPr>
-        <p:spPr>
-          <a:xfrm>
-            <a:off x="6355080" y="3721608"/>
-            <a:ext cx="2514600" cy="914400"/>
-          </a:xfrm>
-          <a:prstGeom prst="rect">
-            <a:avLst/>
-          </a:prstGeom>
-          <a:noFill/>
-          <a:ln/>
-        </p:spPr>
-        <p:txBody>
-          <a:bodyPr wrap="square" lIns="0" tIns="0" rIns="0" bIns="0" rtlCol="0" anchor="t"/>
-          <a:lstStyle/>
-          <a:p>
-            <a:pPr marL="0" indent="0">
-              <a:buNone/>
-            </a:pPr>
-            <a:r>
-              <a:rPr lang="en-US" sz="1000" dirty="0">
-                <a:solidFill>
-                  <a:srgbClr val="94A3B8"/>
-                </a:solidFill>
-                <a:latin typeface="Calibri" pitchFamily="34" charset="0"/>
-                <a:ea typeface="Calibri" pitchFamily="34" charset="-122"/>
-                <a:cs typeface="Calibri" pitchFamily="34" charset="-120"/>
-              </a:rPr>
-              <a:t>take_damage(amount)</a:t>
-            </a:r>
-            <a:endParaRPr lang="en-US" sz="1000" dirty="0"/>
-          </a:p>
-          <a:p>
-            <a:pPr marL="0" indent="0">
-              <a:buNone/>
-            </a:pPr>
-            <a:r>
-              <a:rPr lang="en-US" sz="1000" dirty="0">
-                <a:solidFill>
-                  <a:srgbClr val="94A3B8"/>
-                </a:solidFill>
-                <a:latin typeface="Calibri" pitchFamily="34" charset="0"/>
-                <a:ea typeface="Calibri" pitchFamily="34" charset="-122"/>
-                <a:cs typeface="Calibri" pitchFamily="34" charset="-120"/>
-              </a:rPr>
-              <a:t>피격 후 무적 프레임</a:t>
+                <a:cs typeface="Calibri" pitchFamily="34" charset="-120"/>
+              </a:rPr>
+              <a:t>- 10</a:t>
             </a:r>
             <a:endParaRPr lang="en-US" sz="1000" dirty="0"/>
           </a:p>
@@ -14877,7 +14639,18 @@
                 <a:ea typeface="Calibri" pitchFamily="34" charset="-122"/>
                 <a:cs typeface="Calibri" pitchFamily="34" charset="-120"/>
               </a:rPr>
-              <a:t>BlueSlime + 빠른 이동속도</a:t>
+              <a:t>BlueSlime + </a:t>
+            </a:r>
+            <a:r>
+              <a:rPr lang="ko-KR" altLang="en-US" sz="1000" dirty="0">
+                <a:solidFill>
+                  <a:srgbClr val="0F172A"/>
+                </a:solidFill>
+                <a:latin typeface="Calibri" pitchFamily="34" charset="0"/>
+                <a:ea typeface="Calibri" pitchFamily="34" charset="-122"/>
+                <a:cs typeface="Calibri" pitchFamily="34" charset="-120"/>
+              </a:rPr>
+              <a:t>점프</a:t>
             </a:r>
             <a:endParaRPr lang="en-US" sz="1000" dirty="0"/>
           </a:p>
@@ -15099,16 +14872,10 @@
                 <a:ea typeface="Calibri" pitchFamily="34" charset="-122"/>
                 <a:cs typeface="Calibri" pitchFamily="34" charset="-120"/>
               </a:rPr>
-              <a:t>범위 내 플레이어 감지 시 Bullet 발사</a:t>
-            </a:r>
-            <a:endParaRPr lang="en-US" sz="1000" dirty="0"/>
-          </a:p>
-          <a:p>
-            <a:pPr marL="0" indent="0">
-              <a:buNone/>
-            </a:pPr>
-            <a:r>
-              <a:rPr lang="en-US" sz="1000" dirty="0">
+              <a:t>범위 내 플레이어 감지 시 Bullet </a:t>
+            </a:r>
+            <a:r>
+              <a:rPr lang="en-US" sz="1000" dirty="0" err="1">
                 <a:solidFill>
                   <a:srgbClr val="0F172A"/>
                 </a:solidFill>
@@ -15116,7 +14883,7 @@
                 <a:ea typeface="Calibri" pitchFamily="34" charset="-122"/>
                 <a:cs typeface="Calibri" pitchFamily="34" charset="-120"/>
               </a:rPr>
-              <a:t>collision_mask=4로 플레이어 레이어 타격</a:t>
+              <a:t>발사</a:t>
             </a:r>
             <a:endParaRPr lang="en-US" sz="1000" dirty="0"/>
           </a:p>
